--- a/lectures/18.solid/Принципы SOLID.pptx
+++ b/lectures/18.solid/Принципы SOLID.pptx
@@ -328,7 +328,7 @@
           <a:p>
             <a:fld id="{1F452FF6-3607-4C4E-A116-BCC07DF7B9AE}" type="datetimeFigureOut">
               <a:rPr lang="ru-RU" smtClean="0"/>
-              <a:t>11.12.2025</a:t>
+              <a:t>06.02.2026</a:t>
             </a:fld>
             <a:endParaRPr lang="ru-RU"/>
           </a:p>
@@ -723,71 +723,7 @@
           <a:bodyPr/>
           <a:lstStyle/>
           <a:p>
-            <a:r>
-              <a:rPr lang="ru-RU" dirty="0"/>
-              <a:t>Стоит также отметить, что множество известных паттернов проектирования просто рождены из OCP.</a:t>
-            </a:r>
-          </a:p>
-          <a:p>
-            <a:br>
-              <a:rPr lang="ru-RU" dirty="0"/>
-            </a:br>
-            <a:r>
-              <a:rPr lang="ru-RU" dirty="0"/>
-              <a:t>Strategy позволяет подменять алгоритм. </a:t>
-            </a:r>
-            <a:r>
-              <a:rPr lang="ru-RU" dirty="0" err="1"/>
-              <a:t>Decorator</a:t>
-            </a:r>
-            <a:r>
-              <a:rPr lang="ru-RU" dirty="0"/>
-              <a:t> — добавлять функциональность без изменения класса. </a:t>
-            </a:r>
-            <a:r>
-              <a:rPr lang="ru-RU" dirty="0" err="1"/>
-              <a:t>Template</a:t>
-            </a:r>
-            <a:r>
-              <a:rPr lang="ru-RU" dirty="0"/>
-              <a:t> </a:t>
-            </a:r>
-            <a:r>
-              <a:rPr lang="ru-RU" dirty="0" err="1"/>
-              <a:t>Method</a:t>
-            </a:r>
-            <a:r>
-              <a:rPr lang="ru-RU" dirty="0"/>
-              <a:t> — переопределять отдельные шаги алгоритма. Factory </a:t>
-            </a:r>
-            <a:r>
-              <a:rPr lang="ru-RU" dirty="0" err="1"/>
-              <a:t>Method</a:t>
-            </a:r>
-            <a:r>
-              <a:rPr lang="ru-RU" dirty="0"/>
-              <a:t> и </a:t>
-            </a:r>
-            <a:r>
-              <a:rPr lang="ru-RU" dirty="0" err="1"/>
-              <a:t>Abstract</a:t>
-            </a:r>
-            <a:r>
-              <a:rPr lang="ru-RU" dirty="0"/>
-              <a:t> Factory помогают создавать расширяемые семейства объектов.</a:t>
-            </a:r>
-          </a:p>
-          <a:p>
-            <a:endParaRPr lang="ru-RU" dirty="0"/>
-          </a:p>
-          <a:p>
-            <a:r>
-              <a:rPr lang="ru-RU" dirty="0"/>
-              <a:t>То есть OCP — это не теория, это реальная основа для архитектур, которые выдерживают длительное развитие. Он позволяет добавлять новые возможности без страха сломать существующий код.</a:t>
-            </a:r>
-          </a:p>
-          <a:p>
-            <a:endParaRPr lang="ru-RU" dirty="0"/>
+            <a:endParaRPr lang="en-US"/>
           </a:p>
         </p:txBody>
       </p:sp>
@@ -808,7 +744,7 @@
           <a:p>
             <a:fld id="{9BF0A773-BC3A-474D-8036-883A816F0F99}" type="slidenum">
               <a:rPr lang="ru-RU" smtClean="0"/>
-              <a:t>12</a:t>
+              <a:t>10</a:t>
             </a:fld>
             <a:endParaRPr lang="ru-RU"/>
           </a:p>
@@ -817,7 +753,7 @@
     </p:spTree>
     <p:extLst>
       <p:ext uri="{BB962C8B-B14F-4D97-AF65-F5344CB8AC3E}">
-        <p14:creationId xmlns:p14="http://schemas.microsoft.com/office/powerpoint/2010/main" val="2583481274"/>
+        <p14:creationId xmlns:p14="http://schemas.microsoft.com/office/powerpoint/2010/main" val="3518451462"/>
       </p:ext>
     </p:extLst>
   </p:cSld>
@@ -846,7 +782,7 @@
       </p:grpSpPr>
       <p:sp>
         <p:nvSpPr>
-          <p:cNvPr id="2" name="Slide Image Placeholder 1"/>
+          <p:cNvPr id="2" name="Образ слайда 1"/>
           <p:cNvSpPr>
             <a:spLocks noGrp="1" noRot="1" noChangeAspect="1"/>
           </p:cNvSpPr>
@@ -858,7 +794,7 @@
       </p:sp>
       <p:sp>
         <p:nvSpPr>
-          <p:cNvPr id="3" name="Notes Placeholder 2"/>
+          <p:cNvPr id="3" name="Заметки 2"/>
           <p:cNvSpPr>
             <a:spLocks noGrp="1"/>
           </p:cNvSpPr>
@@ -873,7 +809,7 @@
           <a:p>
             <a:r>
               <a:rPr lang="ru-RU" dirty="0"/>
-              <a:t>Рассмотрим простой и очень жизненный пример — логирование.</a:t>
+              <a:t>Например, если у нас есть энкодер изображений, который умеет сохранять только PNG, и мы хотим добавить JPEG — по OCP мы создаём новый энкодер, а не лезем редактировать код старого. Это уменьшает хрупкость системы: вероятность что-то сломать в проверенном коде намного ниже.</a:t>
             </a:r>
           </a:p>
           <a:p>
@@ -882,78 +818,75 @@
           <a:p>
             <a:r>
               <a:rPr lang="ru-RU" dirty="0"/>
-              <a:t>Вот у нас есть класс </a:t>
-            </a:r>
-            <a:r>
-              <a:rPr lang="ru-RU" dirty="0" err="1"/>
-              <a:t>Logger</a:t>
-            </a:r>
-            <a:r>
-              <a:rPr lang="ru-RU" dirty="0"/>
-              <a:t>, который пишет сообщения в файл. На первый взгляд всё отлично. Но что произойдёт, когда заинтересованные лица попросят:</a:t>
-            </a:r>
-            <a:br>
-              <a:rPr lang="ru-RU" dirty="0"/>
-            </a:br>
-            <a:r>
-              <a:rPr lang="ru-RU" dirty="0"/>
-              <a:t>— а сделайте, пожалуйста, логирование ещё и в консоль;</a:t>
-            </a:r>
-            <a:br>
-              <a:rPr lang="ru-RU" dirty="0"/>
-            </a:br>
-            <a:r>
-              <a:rPr lang="ru-RU" dirty="0"/>
-              <a:t>— и в </a:t>
-            </a:r>
-            <a:r>
-              <a:rPr lang="ru-RU" dirty="0" err="1"/>
-              <a:t>syslog</a:t>
-            </a:r>
-            <a:r>
-              <a:rPr lang="ru-RU" dirty="0"/>
-              <a:t>;</a:t>
-            </a:r>
-            <a:br>
-              <a:rPr lang="ru-RU" dirty="0"/>
-            </a:br>
-            <a:r>
-              <a:rPr lang="ru-RU" dirty="0"/>
-              <a:t>— и отправку логов на удалённый сервер?</a:t>
-            </a:r>
-          </a:p>
-          <a:p>
-            <a:r>
-              <a:rPr lang="ru-RU" dirty="0"/>
-              <a:t>Если наш </a:t>
-            </a:r>
-            <a:r>
-              <a:rPr lang="ru-RU" dirty="0" err="1"/>
-              <a:t>Logger</a:t>
-            </a:r>
-            <a:r>
-              <a:rPr lang="ru-RU" dirty="0"/>
-              <a:t> жёстко привязан к записи в файл, как в изначальном примере, нам придётся каждый раз заходить внутрь класса и дописывать туда новые ветки, новые условия, новые варианты поведения. Это прямое нарушение принципа открытости/закрытости: мы </a:t>
+              <a:t>Теперь давайте посмотрим, как можно достичь соблюдения OCP.</a:t>
+            </a:r>
+          </a:p>
+          <a:p>
+            <a:r>
+              <a:rPr lang="ru-RU" dirty="0"/>
+              <a:t>Первый инструмент — это </a:t>
             </a:r>
             <a:r>
               <a:rPr lang="ru-RU" b="1" dirty="0"/>
-              <a:t>расширяем поведение только через изменение существующего кода</a:t>
-            </a:r>
-            <a:r>
-              <a:rPr lang="ru-RU" dirty="0"/>
-              <a:t>, что делает систему хрупкой.</a:t>
+              <a:t>полиморфизм</a:t>
+            </a:r>
+            <a:r>
+              <a:rPr lang="ru-RU" dirty="0"/>
+              <a:t>. Мы выделяем абстракцию, описывающую поведение, а конкретные реализации помещаем в отдельные классы. Код, который пользуется абстракцией, больше не зависит от деталей реализации и может работать с чем угодно, что эту абстракцию реализует.</a:t>
+            </a:r>
+          </a:p>
+          <a:p>
+            <a:r>
+              <a:rPr lang="ru-RU" dirty="0"/>
+              <a:t>Второй подход — </a:t>
+            </a:r>
+            <a:r>
+              <a:rPr lang="ru-RU" b="1" dirty="0"/>
+              <a:t>композиция</a:t>
+            </a:r>
+            <a:r>
+              <a:rPr lang="ru-RU" dirty="0"/>
+              <a:t>. Вместо того чтобы менять класс изнутри, мы передаём внутрь компонент с нужным поведением. Хотим другое поведение — передаём другой компонент.</a:t>
+            </a:r>
+          </a:p>
+          <a:p>
+            <a:r>
+              <a:rPr lang="ru-RU" dirty="0"/>
+              <a:t>Третий механизм — </a:t>
+            </a:r>
+            <a:r>
+              <a:rPr lang="ru-RU" b="1" dirty="0"/>
+              <a:t>параметризация поведением</a:t>
+            </a:r>
+            <a:r>
+              <a:rPr lang="ru-RU" dirty="0"/>
+              <a:t>, как через интерфейсы, так и через функции или лямбда-выражения. Это особенно удобно, когда изменение касается небольшой части алгоритма.</a:t>
+            </a:r>
+          </a:p>
+          <a:p>
+            <a:r>
+              <a:rPr lang="ru-RU" dirty="0"/>
+              <a:t>В C++ у нас есть и более мощный инструмент — </a:t>
+            </a:r>
+            <a:r>
+              <a:rPr lang="ru-RU" b="1" dirty="0"/>
+              <a:t>шаблоны</a:t>
+            </a:r>
+            <a:r>
+              <a:rPr lang="ru-RU" dirty="0"/>
+              <a:t>. Шаблоны позволяют расширять поведение на этапе компиляции, не изменяя код существующего класса. Политики, CRTP, параметризация типами — всё это механизмы, которые отлично работают в рамках OCP.</a:t>
             </a:r>
           </a:p>
         </p:txBody>
       </p:sp>
       <p:sp>
         <p:nvSpPr>
-          <p:cNvPr id="4" name="Slide Number Placeholder 3"/>
+          <p:cNvPr id="4" name="Номер слайда 3"/>
           <p:cNvSpPr>
             <a:spLocks noGrp="1"/>
           </p:cNvSpPr>
           <p:nvPr>
-            <p:ph type="sldNum" sz="quarter" idx="5"/>
+            <p:ph type="sldNum" sz="quarter" idx="10"/>
           </p:nvPr>
         </p:nvSpPr>
         <p:spPr/>
@@ -963,7 +896,7 @@
           <a:p>
             <a:fld id="{9BF0A773-BC3A-474D-8036-883A816F0F99}" type="slidenum">
               <a:rPr lang="ru-RU" smtClean="0"/>
-              <a:t>13</a:t>
+              <a:t>11</a:t>
             </a:fld>
             <a:endParaRPr lang="ru-RU"/>
           </a:p>
@@ -972,7 +905,7 @@
     </p:spTree>
     <p:extLst>
       <p:ext uri="{BB962C8B-B14F-4D97-AF65-F5344CB8AC3E}">
-        <p14:creationId xmlns:p14="http://schemas.microsoft.com/office/powerpoint/2010/main" val="1137092375"/>
+        <p14:creationId xmlns:p14="http://schemas.microsoft.com/office/powerpoint/2010/main" val="26544882"/>
       </p:ext>
     </p:extLst>
   </p:cSld>
@@ -1028,23 +961,56 @@
           <a:p>
             <a:r>
               <a:rPr lang="ru-RU" dirty="0"/>
-              <a:t>Чтобы соблюсти OCP, мы выносим изменяемую часть — именно </a:t>
-            </a:r>
-            <a:r>
-              <a:rPr lang="ru-RU" i="1" dirty="0"/>
-              <a:t>куда</a:t>
-            </a:r>
-            <a:r>
-              <a:rPr lang="ru-RU" dirty="0"/>
-              <a:t> писать лог — в отдельную абстракцию. Мы вводим интерфейс </a:t>
+              <a:t>Стоит также отметить, что множество известных паттернов проектирования просто рождены из OCP.</a:t>
+            </a:r>
+          </a:p>
+          <a:p>
+            <a:br>
+              <a:rPr lang="ru-RU" dirty="0"/>
+            </a:br>
+            <a:r>
+              <a:rPr lang="ru-RU" dirty="0"/>
+              <a:t>Strategy позволяет подменять алгоритм. </a:t>
             </a:r>
             <a:r>
               <a:rPr lang="ru-RU" dirty="0" err="1"/>
-              <a:t>ILogSink</a:t>
-            </a:r>
-            <a:r>
-              <a:rPr lang="ru-RU" dirty="0"/>
-              <a:t>, который описывает лишь одну операцию: записать сообщение.</a:t>
+              <a:t>Decorator</a:t>
+            </a:r>
+            <a:r>
+              <a:rPr lang="ru-RU" dirty="0"/>
+              <a:t> — добавлять функциональность без изменения класса. </a:t>
+            </a:r>
+            <a:r>
+              <a:rPr lang="ru-RU" dirty="0" err="1"/>
+              <a:t>Template</a:t>
+            </a:r>
+            <a:r>
+              <a:rPr lang="ru-RU" dirty="0"/>
+              <a:t> </a:t>
+            </a:r>
+            <a:r>
+              <a:rPr lang="ru-RU" dirty="0" err="1"/>
+              <a:t>Method</a:t>
+            </a:r>
+            <a:r>
+              <a:rPr lang="ru-RU" dirty="0"/>
+              <a:t> — переопределять отдельные шаги алгоритма. Factory </a:t>
+            </a:r>
+            <a:r>
+              <a:rPr lang="ru-RU" dirty="0" err="1"/>
+              <a:t>Method</a:t>
+            </a:r>
+            <a:r>
+              <a:rPr lang="ru-RU" dirty="0"/>
+              <a:t> и </a:t>
+            </a:r>
+            <a:r>
+              <a:rPr lang="ru-RU" dirty="0" err="1"/>
+              <a:t>Abstract</a:t>
+            </a:r>
+            <a:r>
+              <a:rPr lang="ru-RU" dirty="0"/>
+              <a:t> Factory помогают создавать расширяемые семейства объектов.</a:t>
             </a:r>
           </a:p>
           <a:p>
@@ -1053,122 +1019,11 @@
           <a:p>
             <a:r>
               <a:rPr lang="ru-RU" dirty="0"/>
-              <a:t>После этого класс </a:t>
-            </a:r>
-            <a:r>
-              <a:rPr lang="ru-RU" dirty="0" err="1"/>
-              <a:t>Logger</a:t>
-            </a:r>
-            <a:r>
-              <a:rPr lang="ru-RU" dirty="0"/>
-              <a:t> начинает зависеть не от конкретного файла, не от конкретного способа логирования, а от абстракции — от интерфейса. Теперь </a:t>
-            </a:r>
-            <a:r>
-              <a:rPr lang="ru-RU" dirty="0" err="1"/>
-              <a:t>Logger</a:t>
-            </a:r>
-            <a:r>
-              <a:rPr lang="ru-RU" dirty="0"/>
-              <a:t> вообще не интересует, </a:t>
-            </a:r>
-            <a:r>
-              <a:rPr lang="ru-RU" i="1" dirty="0"/>
-              <a:t>как</a:t>
-            </a:r>
-            <a:r>
-              <a:rPr lang="ru-RU" dirty="0"/>
-              <a:t> именно происходит запись. Он просто вызывает метод </a:t>
-            </a:r>
-            <a:r>
-              <a:rPr lang="ru-RU" dirty="0" err="1"/>
-              <a:t>Write</a:t>
-            </a:r>
-            <a:r>
-              <a:rPr lang="ru-RU" dirty="0"/>
-              <a:t>.</a:t>
+              <a:t>То есть OCP — это не теория, это реальная основа для архитектур, которые выдерживают длительное развитие. Он позволяет добавлять новые возможности без страха сломать существующий код.</a:t>
             </a:r>
           </a:p>
           <a:p>
             <a:endParaRPr lang="ru-RU" dirty="0"/>
-          </a:p>
-          <a:p>
-            <a:r>
-              <a:rPr lang="ru-RU" dirty="0"/>
-              <a:t>Хотим писать в файл — создаём </a:t>
-            </a:r>
-            <a:r>
-              <a:rPr lang="ru-RU" dirty="0" err="1"/>
-              <a:t>FileSink</a:t>
-            </a:r>
-            <a:r>
-              <a:rPr lang="ru-RU" dirty="0"/>
-              <a:t>.</a:t>
-            </a:r>
-            <a:br>
-              <a:rPr lang="ru-RU" dirty="0"/>
-            </a:br>
-            <a:r>
-              <a:rPr lang="ru-RU" dirty="0"/>
-              <a:t>Хотим выводить в консоль — создаём </a:t>
-            </a:r>
-            <a:r>
-              <a:rPr lang="ru-RU" dirty="0" err="1"/>
-              <a:t>ConsoleSink</a:t>
-            </a:r>
-            <a:r>
-              <a:rPr lang="ru-RU" dirty="0"/>
-              <a:t>.</a:t>
-            </a:r>
-            <a:br>
-              <a:rPr lang="ru-RU" dirty="0"/>
-            </a:br>
-            <a:r>
-              <a:rPr lang="ru-RU" dirty="0"/>
-              <a:t>Хотим </a:t>
-            </a:r>
-            <a:r>
-              <a:rPr lang="ru-RU" dirty="0" err="1"/>
-              <a:t>логировать</a:t>
-            </a:r>
-            <a:r>
-              <a:rPr lang="ru-RU" dirty="0"/>
-              <a:t> в </a:t>
-            </a:r>
-            <a:r>
-              <a:rPr lang="ru-RU" dirty="0" err="1"/>
-              <a:t>syslog</a:t>
-            </a:r>
-            <a:r>
-              <a:rPr lang="ru-RU" dirty="0"/>
-              <a:t> или отправлять логи в сеть — пишем новую реализацию.</a:t>
-            </a:r>
-          </a:p>
-          <a:p>
-            <a:r>
-              <a:rPr lang="ru-RU" dirty="0"/>
-              <a:t>И самое важное: </a:t>
-            </a:r>
-            <a:r>
-              <a:rPr lang="ru-RU" b="1" dirty="0" err="1"/>
-              <a:t>Logger</a:t>
-            </a:r>
-            <a:r>
-              <a:rPr lang="ru-RU" b="1" dirty="0"/>
-              <a:t> остаётся неизменным.</a:t>
-            </a:r>
-            <a:r>
-              <a:rPr lang="ru-RU" dirty="0"/>
-              <a:t> Мы расширяем поведение, не трогая уже существующий код.</a:t>
-            </a:r>
-          </a:p>
-          <a:p>
-            <a:r>
-              <a:rPr lang="ru-RU" dirty="0"/>
-              <a:t>Такой подход делает систему предсказуемой, тестируемой и легко расширяемой. Именно этого и добивается принцип OCP на практике: мы добавляем новое поведение, не ломая старое.</a:t>
-            </a:r>
-          </a:p>
-          <a:p>
-            <a:endParaRPr lang="en-US" dirty="0"/>
           </a:p>
         </p:txBody>
       </p:sp>
@@ -1189,7 +1044,7 @@
           <a:p>
             <a:fld id="{9BF0A773-BC3A-474D-8036-883A816F0F99}" type="slidenum">
               <a:rPr lang="ru-RU" smtClean="0"/>
-              <a:t>14</a:t>
+              <a:t>12</a:t>
             </a:fld>
             <a:endParaRPr lang="ru-RU"/>
           </a:p>
@@ -1198,7 +1053,7 @@
     </p:spTree>
     <p:extLst>
       <p:ext uri="{BB962C8B-B14F-4D97-AF65-F5344CB8AC3E}">
-        <p14:creationId xmlns:p14="http://schemas.microsoft.com/office/powerpoint/2010/main" val="1617755554"/>
+        <p14:creationId xmlns:p14="http://schemas.microsoft.com/office/powerpoint/2010/main" val="2583481274"/>
       </p:ext>
     </p:extLst>
   </p:cSld>
@@ -1254,7 +1109,7 @@
           <a:p>
             <a:r>
               <a:rPr lang="ru-RU" dirty="0"/>
-              <a:t>Рассмотрим пример, который очень хорошо демонстрирует принцип открытости/закрытости — форматирование значений отчёта.</a:t>
+              <a:t>Рассмотрим простой и очень жизненный пример — логирование.</a:t>
             </a:r>
           </a:p>
           <a:p>
@@ -1263,34 +1118,33 @@
           <a:p>
             <a:r>
               <a:rPr lang="ru-RU" dirty="0"/>
-              <a:t>Представьте, что у нас есть рендерер, который просто выводит последовательность чисел: это могут быть финансовые показатели, статистика, результаты измерений. Пока всё просто — мы выводим числа как есть.</a:t>
-            </a:r>
-          </a:p>
-          <a:p>
-            <a:endParaRPr lang="ru-RU" dirty="0"/>
-          </a:p>
-          <a:p>
-            <a:r>
-              <a:rPr lang="ru-RU" dirty="0"/>
-              <a:t>Но в реальной жизни почти всегда возникает необходимость менять способ форматирования. Например:</a:t>
+              <a:t>Вот у нас есть класс </a:t>
+            </a:r>
+            <a:r>
+              <a:rPr lang="ru-RU" dirty="0" err="1"/>
+              <a:t>Logger</a:t>
+            </a:r>
+            <a:r>
+              <a:rPr lang="ru-RU" dirty="0"/>
+              <a:t>, который пишет сообщения в файл. На первый взгляд всё отлично. Но что произойдёт, когда заинтересованные лица попросят:</a:t>
             </a:r>
             <a:br>
               <a:rPr lang="ru-RU" dirty="0"/>
             </a:br>
             <a:r>
               <a:rPr lang="ru-RU" dirty="0"/>
-              <a:t>— кто-то хочет, чтобы большие числа группировались по разрядам: </a:t>
-            </a:r>
-            <a:r>
-              <a:rPr lang="ru-RU" sz="1200" kern="1200" dirty="0">
-                <a:solidFill>
-                  <a:schemeClr val="tx1"/>
-                </a:solidFill>
-                <a:latin typeface="+mn-lt"/>
-                <a:ea typeface="+mn-ea"/>
-                <a:cs typeface="+mn-cs"/>
-              </a:rPr>
-              <a:t>1 234 567</a:t>
+              <a:t>— а сделайте, пожалуйста, логирование ещё и в консоль;</a:t>
+            </a:r>
+            <a:br>
+              <a:rPr lang="ru-RU" dirty="0"/>
+            </a:br>
+            <a:r>
+              <a:rPr lang="ru-RU" dirty="0"/>
+              <a:t>— и в </a:t>
+            </a:r>
+            <a:r>
+              <a:rPr lang="ru-RU" dirty="0" err="1"/>
+              <a:t>syslog</a:t>
             </a:r>
             <a:r>
               <a:rPr lang="ru-RU" dirty="0"/>
@@ -1301,99 +1155,30 @@
             </a:br>
             <a:r>
               <a:rPr lang="ru-RU" dirty="0"/>
-              <a:t>— кому-то нужен другой разделитель дробной части: запятая вместо точки;</a:t>
-            </a:r>
-            <a:br>
-              <a:rPr lang="ru-RU" dirty="0"/>
-            </a:br>
-            <a:r>
-              <a:rPr lang="ru-RU" dirty="0"/>
-              <a:t>— финансовые отчёты должны добавлять символ валюты: </a:t>
-            </a:r>
-            <a:r>
-              <a:rPr lang="ru-RU" sz="1200" kern="1200" dirty="0">
-                <a:solidFill>
-                  <a:schemeClr val="tx1"/>
-                </a:solidFill>
-                <a:latin typeface="+mn-lt"/>
-                <a:ea typeface="+mn-ea"/>
-                <a:cs typeface="+mn-cs"/>
-              </a:rPr>
-              <a:t>$123.45</a:t>
-            </a:r>
-            <a:r>
-              <a:rPr lang="ru-RU" dirty="0"/>
-              <a:t> или </a:t>
-            </a:r>
-            <a:r>
-              <a:rPr lang="ru-RU" sz="1200" kern="1200" dirty="0">
-                <a:solidFill>
-                  <a:schemeClr val="tx1"/>
-                </a:solidFill>
-                <a:latin typeface="+mn-lt"/>
-                <a:ea typeface="+mn-ea"/>
-                <a:cs typeface="+mn-cs"/>
-              </a:rPr>
-              <a:t>123,45 ₽</a:t>
-            </a:r>
-            <a:r>
-              <a:rPr lang="ru-RU" dirty="0"/>
-              <a:t>;</a:t>
-            </a:r>
-            <a:br>
-              <a:rPr lang="ru-RU" dirty="0"/>
-            </a:br>
-            <a:r>
-              <a:rPr lang="ru-RU" dirty="0"/>
-              <a:t>— отрицательные значения нужно отображать в скобках: </a:t>
-            </a:r>
-            <a:r>
-              <a:rPr lang="ru-RU" sz="1200" kern="1200" dirty="0">
-                <a:solidFill>
-                  <a:schemeClr val="tx1"/>
-                </a:solidFill>
-                <a:latin typeface="+mn-lt"/>
-                <a:ea typeface="+mn-ea"/>
-                <a:cs typeface="+mn-cs"/>
-              </a:rPr>
-              <a:t>(123)</a:t>
-            </a:r>
-            <a:r>
-              <a:rPr lang="ru-RU" dirty="0"/>
-              <a:t> вместо </a:t>
-            </a:r>
-            <a:r>
-              <a:rPr lang="ru-RU" sz="1200" kern="1200" dirty="0">
-                <a:solidFill>
-                  <a:schemeClr val="tx1"/>
-                </a:solidFill>
-                <a:latin typeface="+mn-lt"/>
-                <a:ea typeface="+mn-ea"/>
-                <a:cs typeface="+mn-cs"/>
-              </a:rPr>
-              <a:t>-123</a:t>
-            </a:r>
-            <a:r>
-              <a:rPr lang="ru-RU" dirty="0"/>
-              <a:t>.</a:t>
-            </a:r>
-          </a:p>
-          <a:p>
-            <a:r>
-              <a:rPr lang="ru-RU" dirty="0"/>
-              <a:t>Если всё это будет зашито прямо в класс </a:t>
+              <a:t>— и отправку логов на удалённый сервер?</a:t>
+            </a:r>
+          </a:p>
+          <a:p>
+            <a:r>
+              <a:rPr lang="ru-RU" dirty="0"/>
+              <a:t>Если наш </a:t>
             </a:r>
             <a:r>
               <a:rPr lang="ru-RU" dirty="0" err="1"/>
-              <a:t>ReportRenderer</a:t>
-            </a:r>
-            <a:r>
-              <a:rPr lang="ru-RU" dirty="0"/>
-              <a:t>, он мгновенно превратится в "комбайн" из множества условий и переключателей. Каждый новый формат — это правка существующего кода, а значит прямое нарушение OCP.</a:t>
-            </a:r>
-          </a:p>
-          <a:p>
-            <a:endParaRPr lang="en-US" dirty="0"/>
+              <a:t>Logger</a:t>
+            </a:r>
+            <a:r>
+              <a:rPr lang="ru-RU" dirty="0"/>
+              <a:t> жёстко привязан к записи в файл, как в изначальном примере, нам придётся каждый раз заходить внутрь класса и дописывать туда новые ветки, новые условия, новые варианты поведения. Это прямое нарушение принципа открытости/закрытости: мы </a:t>
+            </a:r>
+            <a:r>
+              <a:rPr lang="ru-RU" b="1" dirty="0"/>
+              <a:t>расширяем поведение только через изменение существующего кода</a:t>
+            </a:r>
+            <a:r>
+              <a:rPr lang="ru-RU" dirty="0"/>
+              <a:t>, что делает систему хрупкой.</a:t>
+            </a:r>
           </a:p>
         </p:txBody>
       </p:sp>
@@ -1414,7 +1199,7 @@
           <a:p>
             <a:fld id="{9BF0A773-BC3A-474D-8036-883A816F0F99}" type="slidenum">
               <a:rPr lang="ru-RU" smtClean="0"/>
-              <a:t>15</a:t>
+              <a:t>13</a:t>
             </a:fld>
             <a:endParaRPr lang="ru-RU"/>
           </a:p>
@@ -1423,7 +1208,7 @@
     </p:spTree>
     <p:extLst>
       <p:ext uri="{BB962C8B-B14F-4D97-AF65-F5344CB8AC3E}">
-        <p14:creationId xmlns:p14="http://schemas.microsoft.com/office/powerpoint/2010/main" val="417118510"/>
+        <p14:creationId xmlns:p14="http://schemas.microsoft.com/office/powerpoint/2010/main" val="1137092375"/>
       </p:ext>
     </p:extLst>
   </p:cSld>
@@ -1479,125 +1264,143 @@
           <a:p>
             <a:r>
               <a:rPr lang="ru-RU" dirty="0"/>
-              <a:t>Чтобы этого избежать, мы отделяем </a:t>
+              <a:t>Чтобы соблюсти OCP, мы выносим изменяемую часть — именно </a:t>
+            </a:r>
+            <a:r>
+              <a:rPr lang="ru-RU" i="1" dirty="0"/>
+              <a:t>куда</a:t>
+            </a:r>
+            <a:r>
+              <a:rPr lang="ru-RU" dirty="0"/>
+              <a:t> писать лог — в отдельную абстракцию. Мы вводим интерфейс </a:t>
+            </a:r>
+            <a:r>
+              <a:rPr lang="ru-RU" dirty="0" err="1"/>
+              <a:t>ILogSink</a:t>
+            </a:r>
+            <a:r>
+              <a:rPr lang="ru-RU" dirty="0"/>
+              <a:t>, который описывает лишь одну операцию: записать сообщение.</a:t>
+            </a:r>
+          </a:p>
+          <a:p>
+            <a:endParaRPr lang="ru-RU" dirty="0"/>
+          </a:p>
+          <a:p>
+            <a:r>
+              <a:rPr lang="ru-RU" dirty="0"/>
+              <a:t>После этого класс </a:t>
+            </a:r>
+            <a:r>
+              <a:rPr lang="ru-RU" dirty="0" err="1"/>
+              <a:t>Logger</a:t>
+            </a:r>
+            <a:r>
+              <a:rPr lang="ru-RU" dirty="0"/>
+              <a:t> начинает зависеть не от конкретного файла, не от конкретного способа логирования, а от абстракции — от интерфейса. Теперь </a:t>
+            </a:r>
+            <a:r>
+              <a:rPr lang="ru-RU" dirty="0" err="1"/>
+              <a:t>Logger</a:t>
+            </a:r>
+            <a:r>
+              <a:rPr lang="ru-RU" dirty="0"/>
+              <a:t> вообще не интересует, </a:t>
+            </a:r>
+            <a:r>
+              <a:rPr lang="ru-RU" i="1" dirty="0"/>
+              <a:t>как</a:t>
+            </a:r>
+            <a:r>
+              <a:rPr lang="ru-RU" dirty="0"/>
+              <a:t> именно происходит запись. Он просто вызывает метод </a:t>
+            </a:r>
+            <a:r>
+              <a:rPr lang="ru-RU" dirty="0" err="1"/>
+              <a:t>Write</a:t>
+            </a:r>
+            <a:r>
+              <a:rPr lang="ru-RU" dirty="0"/>
+              <a:t>.</a:t>
+            </a:r>
+          </a:p>
+          <a:p>
+            <a:endParaRPr lang="ru-RU" dirty="0"/>
+          </a:p>
+          <a:p>
+            <a:r>
+              <a:rPr lang="ru-RU" dirty="0"/>
+              <a:t>Хотим писать в файл — создаём </a:t>
+            </a:r>
+            <a:r>
+              <a:rPr lang="ru-RU" dirty="0" err="1"/>
+              <a:t>FileSink</a:t>
+            </a:r>
+            <a:r>
+              <a:rPr lang="ru-RU" dirty="0"/>
+              <a:t>.</a:t>
+            </a:r>
+            <a:br>
+              <a:rPr lang="ru-RU" dirty="0"/>
+            </a:br>
+            <a:r>
+              <a:rPr lang="ru-RU" dirty="0"/>
+              <a:t>Хотим выводить в консоль — создаём </a:t>
+            </a:r>
+            <a:r>
+              <a:rPr lang="ru-RU" dirty="0" err="1"/>
+              <a:t>ConsoleSink</a:t>
+            </a:r>
+            <a:r>
+              <a:rPr lang="ru-RU" dirty="0"/>
+              <a:t>.</a:t>
+            </a:r>
+            <a:br>
+              <a:rPr lang="ru-RU" dirty="0"/>
+            </a:br>
+            <a:r>
+              <a:rPr lang="ru-RU" dirty="0"/>
+              <a:t>Хотим </a:t>
+            </a:r>
+            <a:r>
+              <a:rPr lang="ru-RU" dirty="0" err="1"/>
+              <a:t>логировать</a:t>
+            </a:r>
+            <a:r>
+              <a:rPr lang="ru-RU" dirty="0"/>
+              <a:t> в </a:t>
+            </a:r>
+            <a:r>
+              <a:rPr lang="ru-RU" dirty="0" err="1"/>
+              <a:t>syslog</a:t>
+            </a:r>
+            <a:r>
+              <a:rPr lang="ru-RU" dirty="0"/>
+              <a:t> или отправлять логи в сеть — пишем новую реализацию.</a:t>
+            </a:r>
+          </a:p>
+          <a:p>
+            <a:r>
+              <a:rPr lang="ru-RU" dirty="0"/>
+              <a:t>И самое важное: </a:t>
+            </a:r>
+            <a:r>
+              <a:rPr lang="ru-RU" b="1" dirty="0" err="1"/>
+              <a:t>Logger</a:t>
             </a:r>
             <a:r>
               <a:rPr lang="ru-RU" b="1" dirty="0"/>
-              <a:t>изменяемое поведение</a:t>
-            </a:r>
-            <a:r>
-              <a:rPr lang="ru-RU" dirty="0"/>
-              <a:t> — то есть форматирование значения — в отдельную абстракцию: </a:t>
-            </a:r>
-            <a:r>
-              <a:rPr lang="ru-RU" dirty="0" err="1"/>
-              <a:t>IReportFormatter</a:t>
-            </a:r>
-            <a:r>
-              <a:rPr lang="ru-RU" dirty="0"/>
-              <a:t>.</a:t>
-            </a:r>
-          </a:p>
-          <a:p>
-            <a:endParaRPr lang="ru-RU" dirty="0"/>
-          </a:p>
-          <a:p>
-            <a:r>
-              <a:rPr lang="ru-RU" dirty="0"/>
-              <a:t>Теперь рендерер использует только интерфейс и не знает, какое именно форматирование применяется. Хотим привычный "сырой" вывод — используем </a:t>
-            </a:r>
-            <a:r>
-              <a:rPr lang="ru-RU" dirty="0" err="1"/>
-              <a:t>TextFormatter</a:t>
-            </a:r>
-            <a:r>
-              <a:rPr lang="ru-RU" dirty="0"/>
-              <a:t>. </a:t>
-            </a:r>
-          </a:p>
-          <a:p>
-            <a:r>
-              <a:rPr lang="ru-RU" dirty="0"/>
-              <a:t>Хотим форматировать числа по правилам бухгалтерии — создаём </a:t>
-            </a:r>
-            <a:r>
-              <a:rPr lang="ru-RU" dirty="0" err="1"/>
-              <a:t>AccountingFormatter</a:t>
-            </a:r>
-            <a:r>
-              <a:rPr lang="ru-RU" dirty="0"/>
-              <a:t>. Нужна валюта — </a:t>
-            </a:r>
-            <a:r>
-              <a:rPr lang="ru-RU" dirty="0" err="1"/>
-              <a:t>CurrencyFormatter</a:t>
-            </a:r>
-            <a:r>
-              <a:rPr lang="ru-RU" dirty="0"/>
-              <a:t>. Иногда отделы хотят использовать европейскую </a:t>
-            </a:r>
-            <a:r>
-              <a:rPr lang="ru-RU" dirty="0" err="1"/>
-              <a:t>локаль</a:t>
-            </a:r>
-            <a:r>
-              <a:rPr lang="ru-RU" dirty="0"/>
-              <a:t> — делаем </a:t>
-            </a:r>
-            <a:r>
-              <a:rPr lang="ru-RU" dirty="0" err="1"/>
-              <a:t>EuroLocaleFormatter</a:t>
-            </a:r>
-            <a:r>
-              <a:rPr lang="ru-RU" dirty="0"/>
-              <a:t>.</a:t>
-            </a:r>
-          </a:p>
-          <a:p>
-            <a:endParaRPr lang="ru-RU" dirty="0"/>
-          </a:p>
-          <a:p>
-            <a:r>
-              <a:rPr lang="ru-RU" dirty="0"/>
-              <a:t>И самое важное: в любом из этих случаев </a:t>
-            </a:r>
-            <a:r>
-              <a:rPr lang="ru-RU" b="1" dirty="0" err="1"/>
-              <a:t>ReportRenderer</a:t>
-            </a:r>
-            <a:r>
-              <a:rPr lang="ru-RU" b="1" dirty="0"/>
-              <a:t> остаётся неизменным</a:t>
-            </a:r>
-            <a:r>
-              <a:rPr lang="ru-RU" dirty="0"/>
-              <a:t>. </a:t>
-            </a:r>
-          </a:p>
-          <a:p>
-            <a:endParaRPr lang="ru-RU" dirty="0"/>
-          </a:p>
-          <a:p>
-            <a:r>
-              <a:rPr lang="ru-RU" dirty="0"/>
-              <a:t>Мы расширяем систему новыми возможностями, </a:t>
-            </a:r>
-            <a:r>
-              <a:rPr lang="ru-RU" i="1" dirty="0"/>
-              <a:t>не трогая существующий код</a:t>
-            </a:r>
-            <a:r>
-              <a:rPr lang="ru-RU" dirty="0"/>
-              <a:t>.</a:t>
-            </a:r>
-          </a:p>
-          <a:p>
-            <a:endParaRPr lang="ru-RU" dirty="0"/>
-          </a:p>
-          <a:p>
-            <a:r>
-              <a:rPr lang="ru-RU" dirty="0"/>
-              <a:t>Это и есть принцип открытости/закрытости в действии: изменяемая часть вынесена в отдельный компонент, и теперь любую логику форматирования можно добавлять отдельными классами. Так структура отчёта остаётся стабильной, а форматирование становится гибким и легко расширяемым.</a:t>
+              <a:t> остаётся неизменным.</a:t>
+            </a:r>
+            <a:r>
+              <a:rPr lang="ru-RU" dirty="0"/>
+              <a:t> Мы расширяем поведение, не трогая уже существующий код.</a:t>
+            </a:r>
+          </a:p>
+          <a:p>
+            <a:r>
+              <a:rPr lang="ru-RU" dirty="0"/>
+              <a:t>Такой подход делает систему предсказуемой, тестируемой и легко расширяемой. Именно этого и добивается принцип OCP на практике: мы добавляем новое поведение, не ломая старое.</a:t>
             </a:r>
           </a:p>
           <a:p>
@@ -1622,7 +1425,7 @@
           <a:p>
             <a:fld id="{9BF0A773-BC3A-474D-8036-883A816F0F99}" type="slidenum">
               <a:rPr lang="ru-RU" smtClean="0"/>
-              <a:t>16</a:t>
+              <a:t>14</a:t>
             </a:fld>
             <a:endParaRPr lang="ru-RU"/>
           </a:p>
@@ -1631,7 +1434,7 @@
     </p:spTree>
     <p:extLst>
       <p:ext uri="{BB962C8B-B14F-4D97-AF65-F5344CB8AC3E}">
-        <p14:creationId xmlns:p14="http://schemas.microsoft.com/office/powerpoint/2010/main" val="755439476"/>
+        <p14:creationId xmlns:p14="http://schemas.microsoft.com/office/powerpoint/2010/main" val="1617755554"/>
       </p:ext>
     </p:extLst>
   </p:cSld>
@@ -1687,7 +1490,7 @@
           <a:p>
             <a:r>
               <a:rPr lang="ru-RU" dirty="0"/>
-              <a:t>Подведём итоги применения принципа открытости/закрытости.</a:t>
+              <a:t>Рассмотрим пример, который очень хорошо демонстрирует принцип открытости/закрытости — форматирование значений отчёта.</a:t>
             </a:r>
           </a:p>
           <a:p>
@@ -1696,15 +1499,7 @@
           <a:p>
             <a:r>
               <a:rPr lang="ru-RU" dirty="0"/>
-              <a:t>Главная сила OCP в том, что он позволяет </a:t>
-            </a:r>
-            <a:r>
-              <a:rPr lang="ru-RU" b="1" dirty="0"/>
-              <a:t>минимизировать изменения существующего кода</a:t>
-            </a:r>
-            <a:r>
-              <a:rPr lang="ru-RU" dirty="0"/>
-              <a:t>. Если вам нужно добавить новую функциональность, вы делаете это за счёт создания новых классов, а не за счёт изменений старых. Такой подход делает систему значительно более стабильной: исправленный и протестированный код остаётся нетронутым, и мы снижаем риск регрессий.</a:t>
+              <a:t>Представьте, что у нас есть рендерер, который просто выводит последовательность чисел: это могут быть финансовые показатели, статистика, результаты измерений. Пока всё просто — мы выводим числа как есть.</a:t>
             </a:r>
           </a:p>
           <a:p>
@@ -1713,30 +1508,124 @@
           <a:p>
             <a:r>
               <a:rPr lang="ru-RU" dirty="0"/>
-              <a:t>Второй плюс — расширяемость. Когда архитектура построена вокруг абстракций и правильных зависимостей, нам легко добавлять новые поведения: новые </a:t>
+              <a:t>Но в реальной жизни почти всегда возникает необходимость менять способ форматирования. Например:</a:t>
+            </a:r>
+            <a:br>
+              <a:rPr lang="ru-RU" dirty="0"/>
+            </a:br>
+            <a:r>
+              <a:rPr lang="ru-RU" dirty="0"/>
+              <a:t>— кто-то хочет, чтобы большие числа группировались по разрядам: </a:t>
+            </a:r>
+            <a:r>
+              <a:rPr lang="ru-RU" sz="1200" kern="1200" dirty="0">
+                <a:solidFill>
+                  <a:schemeClr val="tx1"/>
+                </a:solidFill>
+                <a:latin typeface="+mn-lt"/>
+                <a:ea typeface="+mn-ea"/>
+                <a:cs typeface="+mn-cs"/>
+              </a:rPr>
+              <a:t>1 234 567</a:t>
+            </a:r>
+            <a:r>
+              <a:rPr lang="ru-RU" dirty="0"/>
+              <a:t>;</a:t>
+            </a:r>
+            <a:br>
+              <a:rPr lang="ru-RU" dirty="0"/>
+            </a:br>
+            <a:r>
+              <a:rPr lang="ru-RU" dirty="0"/>
+              <a:t>— кому-то нужен другой разделитель дробной части: запятая вместо точки;</a:t>
+            </a:r>
+            <a:br>
+              <a:rPr lang="ru-RU" dirty="0"/>
+            </a:br>
+            <a:r>
+              <a:rPr lang="ru-RU" dirty="0"/>
+              <a:t>— финансовые отчёты должны добавлять символ валюты: </a:t>
+            </a:r>
+            <a:r>
+              <a:rPr lang="ru-RU" sz="1200" kern="1200" dirty="0">
+                <a:solidFill>
+                  <a:schemeClr val="tx1"/>
+                </a:solidFill>
+                <a:latin typeface="+mn-lt"/>
+                <a:ea typeface="+mn-ea"/>
+                <a:cs typeface="+mn-cs"/>
+              </a:rPr>
+              <a:t>$123.45</a:t>
+            </a:r>
+            <a:r>
+              <a:rPr lang="ru-RU" dirty="0"/>
+              <a:t> или </a:t>
+            </a:r>
+            <a:r>
+              <a:rPr lang="ru-RU" sz="1200" kern="1200" dirty="0">
+                <a:solidFill>
+                  <a:schemeClr val="tx1"/>
+                </a:solidFill>
+                <a:latin typeface="+mn-lt"/>
+                <a:ea typeface="+mn-ea"/>
+                <a:cs typeface="+mn-cs"/>
+              </a:rPr>
+              <a:t>123,45 ₽</a:t>
+            </a:r>
+            <a:r>
+              <a:rPr lang="ru-RU" dirty="0"/>
+              <a:t>;</a:t>
+            </a:r>
+            <a:br>
+              <a:rPr lang="ru-RU" dirty="0"/>
+            </a:br>
+            <a:r>
+              <a:rPr lang="ru-RU" dirty="0"/>
+              <a:t>— отрицательные значения нужно отображать в скобках: </a:t>
+            </a:r>
+            <a:r>
+              <a:rPr lang="ru-RU" sz="1200" kern="1200" dirty="0">
+                <a:solidFill>
+                  <a:schemeClr val="tx1"/>
+                </a:solidFill>
+                <a:latin typeface="+mn-lt"/>
+                <a:ea typeface="+mn-ea"/>
+                <a:cs typeface="+mn-cs"/>
+              </a:rPr>
+              <a:t>(123)</a:t>
+            </a:r>
+            <a:r>
+              <a:rPr lang="ru-RU" dirty="0"/>
+              <a:t> вместо </a:t>
+            </a:r>
+            <a:r>
+              <a:rPr lang="ru-RU" sz="1200" kern="1200" dirty="0">
+                <a:solidFill>
+                  <a:schemeClr val="tx1"/>
+                </a:solidFill>
+                <a:latin typeface="+mn-lt"/>
+                <a:ea typeface="+mn-ea"/>
+                <a:cs typeface="+mn-cs"/>
+              </a:rPr>
+              <a:t>-123</a:t>
+            </a:r>
+            <a:r>
+              <a:rPr lang="ru-RU" dirty="0"/>
+              <a:t>.</a:t>
+            </a:r>
+          </a:p>
+          <a:p>
+            <a:r>
+              <a:rPr lang="ru-RU" dirty="0"/>
+              <a:t>Если всё это будет зашито прямо в класс </a:t>
             </a:r>
             <a:r>
               <a:rPr lang="ru-RU" dirty="0" err="1"/>
-              <a:t>форматтеры</a:t>
-            </a:r>
-            <a:r>
-              <a:rPr lang="ru-RU" dirty="0"/>
-              <a:t>, новые адаптеры, новые стратегии, новые способы рендеринга отчётов. </a:t>
-            </a:r>
-          </a:p>
-          <a:p>
-            <a:r>
-              <a:rPr lang="ru-RU" dirty="0"/>
-              <a:t>Важный момент — существующие компоненты остаются неизменными.</a:t>
-            </a:r>
-          </a:p>
-          <a:p>
-            <a:endParaRPr lang="ru-RU" dirty="0"/>
-          </a:p>
-          <a:p>
-            <a:r>
-              <a:rPr lang="ru-RU" dirty="0"/>
-              <a:t>Третий плюс — упрощение тестирования. Стабильные компоненты можно протестировать один раз, а все новые поведения добавляются в изолированных классах, что снижает сложность тестов.</a:t>
+              <a:t>ReportRenderer</a:t>
+            </a:r>
+            <a:r>
+              <a:rPr lang="ru-RU" dirty="0"/>
+              <a:t>, он мгновенно превратится в "комбайн" из множества условий и переключателей. Каждый новый формат — это правка существующего кода, а значит прямое нарушение OCP.</a:t>
             </a:r>
           </a:p>
           <a:p>
@@ -1761,7 +1650,7 @@
           <a:p>
             <a:fld id="{9BF0A773-BC3A-474D-8036-883A816F0F99}" type="slidenum">
               <a:rPr lang="ru-RU" smtClean="0"/>
-              <a:t>17</a:t>
+              <a:t>15</a:t>
             </a:fld>
             <a:endParaRPr lang="ru-RU"/>
           </a:p>
@@ -1770,7 +1659,7 @@
     </p:spTree>
     <p:extLst>
       <p:ext uri="{BB962C8B-B14F-4D97-AF65-F5344CB8AC3E}">
-        <p14:creationId xmlns:p14="http://schemas.microsoft.com/office/powerpoint/2010/main" val="1763525319"/>
+        <p14:creationId xmlns:p14="http://schemas.microsoft.com/office/powerpoint/2010/main" val="417118510"/>
       </p:ext>
     </p:extLst>
   </p:cSld>
@@ -1826,15 +1715,116 @@
           <a:p>
             <a:r>
               <a:rPr lang="ru-RU" dirty="0"/>
-              <a:t>Теперь про недостатки. За гибкость мы платим усложнением структуры. OCP приводит к появлению </a:t>
+              <a:t>Чтобы этого избежать, мы отделяем </a:t>
+            </a:r>
+            <a:r>
+              <a:rPr lang="ru-RU" b="1" dirty="0"/>
+              <a:t>изменяемое поведение</a:t>
+            </a:r>
+            <a:r>
+              <a:rPr lang="ru-RU" dirty="0"/>
+              <a:t> — то есть форматирование значения — в отдельную абстракцию: </a:t>
+            </a:r>
+            <a:r>
+              <a:rPr lang="ru-RU" dirty="0" err="1"/>
+              <a:t>IReportFormatter</a:t>
+            </a:r>
+            <a:r>
+              <a:rPr lang="ru-RU" dirty="0"/>
+              <a:t>.</a:t>
+            </a:r>
+          </a:p>
+          <a:p>
+            <a:endParaRPr lang="ru-RU" dirty="0"/>
+          </a:p>
+          <a:p>
+            <a:r>
+              <a:rPr lang="ru-RU" dirty="0"/>
+              <a:t>Теперь рендерер использует только интерфейс и не знает, какое именно форматирование применяется. Хотим привычный "сырой" вывод — используем </a:t>
+            </a:r>
+            <a:r>
+              <a:rPr lang="ru-RU" dirty="0" err="1"/>
+              <a:t>TextFormatter</a:t>
+            </a:r>
+            <a:r>
+              <a:rPr lang="ru-RU" dirty="0"/>
+              <a:t>. </a:t>
+            </a:r>
+          </a:p>
+          <a:p>
+            <a:r>
+              <a:rPr lang="ru-RU" dirty="0"/>
+              <a:t>Хотим форматировать числа по правилам бухгалтерии — создаём </a:t>
+            </a:r>
+            <a:r>
+              <a:rPr lang="ru-RU" dirty="0" err="1"/>
+              <a:t>AccountingFormatter</a:t>
+            </a:r>
+            <a:r>
+              <a:rPr lang="ru-RU" dirty="0"/>
+              <a:t>. Нужна валюта — </a:t>
+            </a:r>
+            <a:r>
+              <a:rPr lang="ru-RU" dirty="0" err="1"/>
+              <a:t>CurrencyFormatter</a:t>
+            </a:r>
+            <a:r>
+              <a:rPr lang="ru-RU" dirty="0"/>
+              <a:t>. Иногда отделы хотят использовать европейскую </a:t>
+            </a:r>
+            <a:r>
+              <a:rPr lang="ru-RU" dirty="0" err="1"/>
+              <a:t>локаль</a:t>
+            </a:r>
+            <a:r>
+              <a:rPr lang="ru-RU" dirty="0"/>
+              <a:t> — делаем </a:t>
+            </a:r>
+            <a:r>
+              <a:rPr lang="ru-RU" dirty="0" err="1"/>
+              <a:t>EuroLocaleFormatter</a:t>
+            </a:r>
+            <a:r>
+              <a:rPr lang="ru-RU" dirty="0"/>
+              <a:t>.</a:t>
+            </a:r>
+          </a:p>
+          <a:p>
+            <a:endParaRPr lang="ru-RU" dirty="0"/>
+          </a:p>
+          <a:p>
+            <a:r>
+              <a:rPr lang="ru-RU" dirty="0"/>
+              <a:t>И самое важное: в любом из этих случаев </a:t>
+            </a:r>
+            <a:r>
+              <a:rPr lang="ru-RU" b="1" dirty="0" err="1"/>
+              <a:t>ReportRenderer</a:t>
+            </a:r>
+            <a:r>
+              <a:rPr lang="ru-RU" b="1" dirty="0"/>
+              <a:t> остаётся неизменным</a:t>
+            </a:r>
+            <a:r>
+              <a:rPr lang="ru-RU" dirty="0"/>
+              <a:t>. </a:t>
+            </a:r>
+          </a:p>
+          <a:p>
+            <a:endParaRPr lang="ru-RU" dirty="0"/>
+          </a:p>
+          <a:p>
+            <a:r>
+              <a:rPr lang="ru-RU" dirty="0"/>
+              <a:t>Мы расширяем систему новыми возможностями, </a:t>
             </a:r>
             <a:r>
               <a:rPr lang="ru-RU" i="1" dirty="0"/>
-              <a:t>большего количества абстракций, интерфейсов и классов</a:t>
-            </a:r>
-            <a:r>
-              <a:rPr lang="ru-RU" dirty="0"/>
-              <a:t>. Это нормально, но требует дисциплины в проекте.</a:t>
+              <a:t>не трогая существующий код</a:t>
+            </a:r>
+            <a:r>
+              <a:rPr lang="ru-RU" dirty="0"/>
+              <a:t>.</a:t>
             </a:r>
           </a:p>
           <a:p>
@@ -1843,41 +1833,7 @@
           <a:p>
             <a:r>
               <a:rPr lang="ru-RU" dirty="0"/>
-              <a:t>Второй минус — ухудшение </a:t>
-            </a:r>
-            <a:r>
-              <a:rPr lang="ru-RU" dirty="0" err="1"/>
-              <a:t>discoverability</a:t>
-            </a:r>
-            <a:r>
-              <a:rPr lang="ru-RU" dirty="0"/>
-              <a:t>. Чтобы понять, как работает система, нужно пройтись по нескольким классам и абстракциям, а не по одному большому классу.</a:t>
-            </a:r>
-          </a:p>
-          <a:p>
-            <a:endParaRPr lang="ru-RU" dirty="0"/>
-          </a:p>
-          <a:p>
-            <a:r>
-              <a:rPr lang="ru-RU" dirty="0"/>
-              <a:t>И, наконец, существует опасность </a:t>
-            </a:r>
-            <a:r>
-              <a:rPr lang="ru-RU" b="1" dirty="0"/>
-              <a:t>преждевременной абстракции</a:t>
-            </a:r>
-            <a:r>
-              <a:rPr lang="ru-RU" dirty="0"/>
-              <a:t>. Если принципом злоупотреблять, можно создать слишком сложную архитектуру для задач, которые не требуют такой гибкости.</a:t>
-            </a:r>
-          </a:p>
-          <a:p>
-            <a:endParaRPr lang="ru-RU" dirty="0"/>
-          </a:p>
-          <a:p>
-            <a:r>
-              <a:rPr lang="ru-RU" dirty="0"/>
-              <a:t>Поэтому OCP — это не догма, а инструмент. Он приносит огромную пользу там, где изменения происходят часто или заранее известна вариативность поведения. В остальных случаях важно сохранять баланс и применять абстракции ровно там, где они действительно помогают.</a:t>
+              <a:t>Это и есть принцип открытости/закрытости в действии: изменяемая часть вынесена в отдельный компонент, и теперь любую логику форматирования можно добавлять отдельными классами. Так структура отчёта остаётся стабильной, а форматирование становится гибким и легко расширяемым.</a:t>
             </a:r>
           </a:p>
           <a:p>
@@ -1902,7 +1858,7 @@
           <a:p>
             <a:fld id="{9BF0A773-BC3A-474D-8036-883A816F0F99}" type="slidenum">
               <a:rPr lang="ru-RU" smtClean="0"/>
-              <a:t>18</a:t>
+              <a:t>16</a:t>
             </a:fld>
             <a:endParaRPr lang="ru-RU"/>
           </a:p>
@@ -1911,7 +1867,7 @@
     </p:spTree>
     <p:extLst>
       <p:ext uri="{BB962C8B-B14F-4D97-AF65-F5344CB8AC3E}">
-        <p14:creationId xmlns:p14="http://schemas.microsoft.com/office/powerpoint/2010/main" val="3234432323"/>
+        <p14:creationId xmlns:p14="http://schemas.microsoft.com/office/powerpoint/2010/main" val="755439476"/>
       </p:ext>
     </p:extLst>
   </p:cSld>
@@ -1965,6 +1921,61 @@
           <a:bodyPr/>
           <a:lstStyle/>
           <a:p>
+            <a:r>
+              <a:rPr lang="ru-RU" dirty="0"/>
+              <a:t>Подведём итоги применения принципа открытости/закрытости.</a:t>
+            </a:r>
+          </a:p>
+          <a:p>
+            <a:endParaRPr lang="ru-RU" dirty="0"/>
+          </a:p>
+          <a:p>
+            <a:r>
+              <a:rPr lang="ru-RU" dirty="0"/>
+              <a:t>Главная сила OCP в том, что он позволяет </a:t>
+            </a:r>
+            <a:r>
+              <a:rPr lang="ru-RU" b="1" dirty="0"/>
+              <a:t>минимизировать изменения существующего кода</a:t>
+            </a:r>
+            <a:r>
+              <a:rPr lang="ru-RU" dirty="0"/>
+              <a:t>. Если вам нужно добавить новую функциональность, вы делаете это за счёт создания новых классов, а не за счёт изменений старых. Такой подход делает систему значительно более стабильной: исправленный и протестированный код остаётся нетронутым, и мы снижаем риск регрессий.</a:t>
+            </a:r>
+          </a:p>
+          <a:p>
+            <a:endParaRPr lang="ru-RU" dirty="0"/>
+          </a:p>
+          <a:p>
+            <a:r>
+              <a:rPr lang="ru-RU" dirty="0"/>
+              <a:t>Второй плюс — расширяемость. Когда архитектура построена вокруг абстракций и правильных зависимостей, нам легко добавлять новые поведения: новые </a:t>
+            </a:r>
+            <a:r>
+              <a:rPr lang="ru-RU" dirty="0" err="1"/>
+              <a:t>форматтеры</a:t>
+            </a:r>
+            <a:r>
+              <a:rPr lang="ru-RU" dirty="0"/>
+              <a:t>, новые адаптеры, новые стратегии, новые способы рендеринга отчётов. </a:t>
+            </a:r>
+          </a:p>
+          <a:p>
+            <a:r>
+              <a:rPr lang="ru-RU" dirty="0"/>
+              <a:t>Важный момент — существующие компоненты остаются неизменными.</a:t>
+            </a:r>
+          </a:p>
+          <a:p>
+            <a:endParaRPr lang="ru-RU" dirty="0"/>
+          </a:p>
+          <a:p>
+            <a:r>
+              <a:rPr lang="ru-RU" dirty="0"/>
+              <a:t>Третий плюс — упрощение тестирования. Стабильные компоненты можно протестировать один раз, а все новые поведения добавляются в изолированных классах, что снижает сложность тестов.</a:t>
+            </a:r>
+          </a:p>
+          <a:p>
             <a:endParaRPr lang="en-US" dirty="0"/>
           </a:p>
         </p:txBody>
@@ -1986,7 +1997,7 @@
           <a:p>
             <a:fld id="{9BF0A773-BC3A-474D-8036-883A816F0F99}" type="slidenum">
               <a:rPr lang="ru-RU" smtClean="0"/>
-              <a:t>19</a:t>
+              <a:t>17</a:t>
             </a:fld>
             <a:endParaRPr lang="ru-RU"/>
           </a:p>
@@ -1995,7 +2006,7 @@
     </p:spTree>
     <p:extLst>
       <p:ext uri="{BB962C8B-B14F-4D97-AF65-F5344CB8AC3E}">
-        <p14:creationId xmlns:p14="http://schemas.microsoft.com/office/powerpoint/2010/main" val="2380193591"/>
+        <p14:creationId xmlns:p14="http://schemas.microsoft.com/office/powerpoint/2010/main" val="1763525319"/>
       </p:ext>
     </p:extLst>
   </p:cSld>
@@ -2024,7 +2035,7 @@
       </p:grpSpPr>
       <p:sp>
         <p:nvSpPr>
-          <p:cNvPr id="2" name="Образ слайда 1"/>
+          <p:cNvPr id="2" name="Slide Image Placeholder 1"/>
           <p:cNvSpPr>
             <a:spLocks noGrp="1" noRot="1" noChangeAspect="1"/>
           </p:cNvSpPr>
@@ -2036,7 +2047,7 @@
       </p:sp>
       <p:sp>
         <p:nvSpPr>
-          <p:cNvPr id="3" name="Заметки 2"/>
+          <p:cNvPr id="3" name="Notes Placeholder 2"/>
           <p:cNvSpPr>
             <a:spLocks noGrp="1"/>
           </p:cNvSpPr>
@@ -2051,20 +2062,15 @@
           <a:p>
             <a:r>
               <a:rPr lang="ru-RU" dirty="0"/>
-              <a:t>Следующий принцип — принцип подстановки Барбары Лисков, или LSP.</a:t>
-            </a:r>
-            <a:br>
-              <a:rPr lang="ru-RU" dirty="0"/>
-            </a:br>
-            <a:r>
-              <a:rPr lang="ru-RU" dirty="0"/>
-              <a:t>Он звучит очень просто: любой объект подкласса должен корректно работать там, где ожидается объект базового класса.</a:t>
-            </a:r>
-          </a:p>
-          <a:p>
-            <a:r>
-              <a:rPr lang="ru-RU" dirty="0"/>
-              <a:t>На практике это значит, что если у нас есть функция, принимающая базовый тип, мы должны иметь возможность подставить туда любой наследник — и поведение функции не должно неожиданно измениться.</a:t>
+              <a:t>Теперь про недостатки. За гибкость мы платим усложнением структуры. OCP приводит к появлению </a:t>
+            </a:r>
+            <a:r>
+              <a:rPr lang="ru-RU" i="1" dirty="0"/>
+              <a:t>большего количества абстракций, интерфейсов и классов</a:t>
+            </a:r>
+            <a:r>
+              <a:rPr lang="ru-RU" dirty="0"/>
+              <a:t>. Это нормально, но требует дисциплины в проекте.</a:t>
             </a:r>
           </a:p>
           <a:p>
@@ -2073,15 +2079,15 @@
           <a:p>
             <a:r>
               <a:rPr lang="ru-RU" dirty="0"/>
-              <a:t>Почему это важно? Потому что наследование — это один из самых сильных инструментов расширяемости. Если подкласс нарушает ожидания, заложенные в базовом классе, код начинает вести себя непредсказуемо, хотя на уровне типов всё выглядит корректно. Это одна из самых опасных категорий ошибок: </a:t>
-            </a:r>
-            <a:r>
-              <a:rPr lang="ru-RU" i="1" dirty="0"/>
-              <a:t>ошибка не компилируется, но выбирается неверный путь исполнения</a:t>
-            </a:r>
-            <a:r>
-              <a:rPr lang="ru-RU" dirty="0"/>
-              <a:t>.</a:t>
+              <a:t>Второй минус — ухудшение </a:t>
+            </a:r>
+            <a:r>
+              <a:rPr lang="ru-RU" dirty="0" err="1"/>
+              <a:t>discoverability</a:t>
+            </a:r>
+            <a:r>
+              <a:rPr lang="ru-RU" dirty="0"/>
+              <a:t>. Чтобы понять, как работает система, нужно пройтись по нескольким классам и абстракциям, а не по одному большому классу.</a:t>
             </a:r>
           </a:p>
           <a:p>
@@ -2090,7 +2096,15 @@
           <a:p>
             <a:r>
               <a:rPr lang="ru-RU" dirty="0"/>
-              <a:t>Барбара Лисков предложила формализованный способ понять, корректно ли устроено наследование: через анализ предусловий, постусловий и инвариантов.</a:t>
+              <a:t>И, наконец, существует опасность </a:t>
+            </a:r>
+            <a:r>
+              <a:rPr lang="ru-RU" b="1" dirty="0"/>
+              <a:t>преждевременной абстракции</a:t>
+            </a:r>
+            <a:r>
+              <a:rPr lang="ru-RU" dirty="0"/>
+              <a:t>. Если принципом злоупотреблять, можно создать слишком сложную архитектуру для задач, которые не требуют такой гибкости.</a:t>
             </a:r>
           </a:p>
           <a:p>
@@ -2099,69 +2113,22 @@
           <a:p>
             <a:r>
               <a:rPr lang="ru-RU" dirty="0"/>
-              <a:t>— Подкласс </a:t>
-            </a:r>
-            <a:r>
-              <a:rPr lang="ru-RU" b="1" dirty="0"/>
-              <a:t>не должен усиливать предусловия</a:t>
-            </a:r>
-            <a:r>
-              <a:rPr lang="ru-RU" dirty="0"/>
-              <a:t>. То есть он должен принимать как минимум те же входные данные, что и базовый класс.</a:t>
-            </a:r>
-            <a:br>
-              <a:rPr lang="ru-RU" dirty="0"/>
-            </a:br>
-            <a:r>
-              <a:rPr lang="ru-RU" dirty="0"/>
-              <a:t>— Он должен </a:t>
-            </a:r>
-            <a:r>
-              <a:rPr lang="ru-RU" b="1" dirty="0"/>
-              <a:t>усиливать или сохранять постусловия</a:t>
-            </a:r>
-            <a:r>
-              <a:rPr lang="ru-RU" dirty="0"/>
-              <a:t>: гарантии после выполнения метода не должны становиться слабее.</a:t>
-            </a:r>
-            <a:br>
-              <a:rPr lang="ru-RU" dirty="0"/>
-            </a:br>
-            <a:r>
-              <a:rPr lang="ru-RU" dirty="0"/>
-              <a:t>— И он не должен нарушать инварианты — правила, которые всегда должны быть верны для базового типа</a:t>
-            </a:r>
-          </a:p>
-          <a:p>
-            <a:pPr marL="0" marR="0" indent="0" algn="l" defTabSz="914400" rtl="0" eaLnBrk="1" fontAlgn="auto" latinLnBrk="0" hangingPunct="1">
-              <a:lnSpc>
-                <a:spcPct val="100000"/>
-              </a:lnSpc>
-              <a:spcBef>
-                <a:spcPts val="0"/>
-              </a:spcBef>
-              <a:spcAft>
-                <a:spcPts val="0"/>
-              </a:spcAft>
-              <a:buClrTx/>
-              <a:buSzTx/>
-              <a:buFontTx/>
-              <a:buNone/>
-              <a:tabLst/>
-              <a:defRPr/>
-            </a:pPr>
+              <a:t>Поэтому OCP — это не догма, а инструмент. Он приносит огромную пользу там, где изменения происходят часто или заранее известна вариативность поведения. В остальных случаях важно сохранять баланс и применять абстракции ровно там, где они действительно помогают.</a:t>
+            </a:r>
+          </a:p>
+          <a:p>
             <a:endParaRPr lang="en-US" dirty="0"/>
           </a:p>
         </p:txBody>
       </p:sp>
       <p:sp>
         <p:nvSpPr>
-          <p:cNvPr id="4" name="Номер слайда 3"/>
+          <p:cNvPr id="4" name="Slide Number Placeholder 3"/>
           <p:cNvSpPr>
             <a:spLocks noGrp="1"/>
           </p:cNvSpPr>
           <p:nvPr>
-            <p:ph type="sldNum" sz="quarter" idx="10"/>
+            <p:ph type="sldNum" sz="quarter" idx="5"/>
           </p:nvPr>
         </p:nvSpPr>
         <p:spPr/>
@@ -2171,7 +2138,7 @@
           <a:p>
             <a:fld id="{9BF0A773-BC3A-474D-8036-883A816F0F99}" type="slidenum">
               <a:rPr lang="ru-RU" smtClean="0"/>
-              <a:t>20</a:t>
+              <a:t>18</a:t>
             </a:fld>
             <a:endParaRPr lang="ru-RU"/>
           </a:p>
@@ -2180,7 +2147,7 @@
     </p:spTree>
     <p:extLst>
       <p:ext uri="{BB962C8B-B14F-4D97-AF65-F5344CB8AC3E}">
-        <p14:creationId xmlns:p14="http://schemas.microsoft.com/office/powerpoint/2010/main" val="2507672309"/>
+        <p14:creationId xmlns:p14="http://schemas.microsoft.com/office/powerpoint/2010/main" val="3234432323"/>
       </p:ext>
     </p:extLst>
   </p:cSld>
@@ -2209,7 +2176,7 @@
       </p:grpSpPr>
       <p:sp>
         <p:nvSpPr>
-          <p:cNvPr id="2" name="Образ слайда 1"/>
+          <p:cNvPr id="2" name="Slide Image Placeholder 1"/>
           <p:cNvSpPr>
             <a:spLocks noGrp="1" noRot="1" noChangeAspect="1"/>
           </p:cNvSpPr>
@@ -2221,7 +2188,7 @@
       </p:sp>
       <p:sp>
         <p:nvSpPr>
-          <p:cNvPr id="3" name="Заметки 2"/>
+          <p:cNvPr id="3" name="Notes Placeholder 2"/>
           <p:cNvSpPr>
             <a:spLocks noGrp="1"/>
           </p:cNvSpPr>
@@ -2234,56 +2201,18 @@
           <a:bodyPr/>
           <a:lstStyle/>
           <a:p>
-            <a:r>
-              <a:rPr lang="ru-RU" dirty="0"/>
-              <a:t>Классический пример нарушения LSP — </a:t>
-            </a:r>
-            <a:r>
-              <a:rPr lang="ru-RU" dirty="0" err="1"/>
-              <a:t>Rectangle</a:t>
-            </a:r>
-            <a:r>
-              <a:rPr lang="ru-RU" dirty="0"/>
-              <a:t> и Square. На уровне математики квадрат — частный случай прямоугольника. Но на уровне поведения — нет: квадрат требует, чтобы ширина и высота были равны, а прямоугольник — нет.</a:t>
-            </a:r>
-          </a:p>
-          <a:p>
-            <a:br>
-              <a:rPr lang="ru-RU" dirty="0"/>
-            </a:br>
-            <a:r>
-              <a:rPr lang="ru-RU" dirty="0"/>
-              <a:t>Из-за этого квадрат неизбежно ломает ожидания любого кода, который работает с прямоугольником: если изменить ширину, квадрат внезапно меняет и высоту, что полностью меняет поведение программы. Это и есть нарушение LSP.</a:t>
-            </a:r>
-          </a:p>
-          <a:p>
-            <a:endParaRPr lang="ru-RU" dirty="0"/>
-          </a:p>
-          <a:p>
-            <a:r>
-              <a:rPr lang="ru-RU" dirty="0"/>
-              <a:t>Важно понимать: LSP — это не про математику и не про классификацию сущностей. Это про поведение. Если поведение подкласса противоречит ожиданиям клиентов базового типа — наследование использовать нельзя.</a:t>
-            </a:r>
-          </a:p>
-          <a:p>
-            <a:r>
-              <a:rPr lang="ru-RU" dirty="0"/>
-              <a:t>Соблюдение LSP снижает количество скрытых, труднонаходимых ошибок, делает систему более предсказуемой и облегчает расширяемость. Это фундаментальный принцип правильного использования наследования.</a:t>
-            </a:r>
-          </a:p>
-          <a:p>
-            <a:endParaRPr lang="ru-RU" dirty="0"/>
+            <a:endParaRPr lang="en-US" dirty="0"/>
           </a:p>
         </p:txBody>
       </p:sp>
       <p:sp>
         <p:nvSpPr>
-          <p:cNvPr id="4" name="Номер слайда 3"/>
+          <p:cNvPr id="4" name="Slide Number Placeholder 3"/>
           <p:cNvSpPr>
             <a:spLocks noGrp="1"/>
           </p:cNvSpPr>
           <p:nvPr>
-            <p:ph type="sldNum" sz="quarter" idx="10"/>
+            <p:ph type="sldNum" sz="quarter" idx="5"/>
           </p:nvPr>
         </p:nvSpPr>
         <p:spPr/>
@@ -2293,7 +2222,7 @@
           <a:p>
             <a:fld id="{9BF0A773-BC3A-474D-8036-883A816F0F99}" type="slidenum">
               <a:rPr lang="ru-RU" smtClean="0"/>
-              <a:t>21</a:t>
+              <a:t>19</a:t>
             </a:fld>
             <a:endParaRPr lang="ru-RU"/>
           </a:p>
@@ -2302,7 +2231,7 @@
     </p:spTree>
     <p:extLst>
       <p:ext uri="{BB962C8B-B14F-4D97-AF65-F5344CB8AC3E}">
-        <p14:creationId xmlns:p14="http://schemas.microsoft.com/office/powerpoint/2010/main" val="1469228710"/>
+        <p14:creationId xmlns:p14="http://schemas.microsoft.com/office/powerpoint/2010/main" val="2380193591"/>
       </p:ext>
     </p:extLst>
   </p:cSld>
@@ -2554,7 +2483,7 @@
       </p:grpSpPr>
       <p:sp>
         <p:nvSpPr>
-          <p:cNvPr id="2" name="Slide Image Placeholder 1"/>
+          <p:cNvPr id="2" name="Образ слайда 1"/>
           <p:cNvSpPr>
             <a:spLocks noGrp="1" noRot="1" noChangeAspect="1"/>
           </p:cNvSpPr>
@@ -2566,7 +2495,7 @@
       </p:sp>
       <p:sp>
         <p:nvSpPr>
-          <p:cNvPr id="3" name="Notes Placeholder 2"/>
+          <p:cNvPr id="3" name="Заметки 2"/>
           <p:cNvSpPr>
             <a:spLocks noGrp="1"/>
           </p:cNvSpPr>
@@ -2579,18 +2508,119 @@
           <a:bodyPr/>
           <a:lstStyle/>
           <a:p>
+            <a:r>
+              <a:rPr lang="ru-RU" dirty="0"/>
+              <a:t>Следующий принцип — принцип подстановки Барбары Лисков, или LSP.</a:t>
+            </a:r>
+            <a:br>
+              <a:rPr lang="ru-RU" dirty="0"/>
+            </a:br>
+            <a:r>
+              <a:rPr lang="ru-RU" dirty="0"/>
+              <a:t>Он звучит очень просто: любой объект подкласса должен корректно работать там, где ожидается объект базового класса.</a:t>
+            </a:r>
+          </a:p>
+          <a:p>
+            <a:r>
+              <a:rPr lang="ru-RU" dirty="0"/>
+              <a:t>На практике это значит, что если у нас есть функция, принимающая базовый тип, мы должны иметь возможность подставить туда любой наследник — и поведение функции не должно неожиданно измениться.</a:t>
+            </a:r>
+          </a:p>
+          <a:p>
+            <a:endParaRPr lang="ru-RU" dirty="0"/>
+          </a:p>
+          <a:p>
+            <a:r>
+              <a:rPr lang="ru-RU" dirty="0"/>
+              <a:t>Почему это важно? Потому что наследование — это один из самых сильных инструментов расширяемости. Если подкласс нарушает ожидания, заложенные в базовом классе, код начинает вести себя непредсказуемо, хотя на уровне типов всё выглядит корректно. Это одна из самых опасных категорий ошибок: </a:t>
+            </a:r>
+            <a:r>
+              <a:rPr lang="ru-RU" i="1" dirty="0"/>
+              <a:t>ошибка не компилируется, но выбирается неверный путь исполнения</a:t>
+            </a:r>
+            <a:r>
+              <a:rPr lang="ru-RU" dirty="0"/>
+              <a:t>.</a:t>
+            </a:r>
+          </a:p>
+          <a:p>
+            <a:endParaRPr lang="ru-RU" dirty="0"/>
+          </a:p>
+          <a:p>
+            <a:r>
+              <a:rPr lang="ru-RU" dirty="0"/>
+              <a:t>Барбара Лисков предложила формализованный способ понять, корректно ли устроено наследование: через анализ предусловий, постусловий и инвариантов.</a:t>
+            </a:r>
+          </a:p>
+          <a:p>
+            <a:endParaRPr lang="ru-RU" dirty="0"/>
+          </a:p>
+          <a:p>
+            <a:r>
+              <a:rPr lang="ru-RU" dirty="0"/>
+              <a:t>— Подкласс </a:t>
+            </a:r>
+            <a:r>
+              <a:rPr lang="ru-RU" b="1" dirty="0"/>
+              <a:t>не должен усиливать предусловия</a:t>
+            </a:r>
+            <a:r>
+              <a:rPr lang="ru-RU" dirty="0"/>
+              <a:t>. То есть он должен принимать как минимум те же входные данные, что и базовый класс.</a:t>
+            </a:r>
+            <a:br>
+              <a:rPr lang="ru-RU" dirty="0"/>
+            </a:br>
+            <a:r>
+              <a:rPr lang="ru-RU" dirty="0"/>
+              <a:t>— Он должен </a:t>
+            </a:r>
+            <a:r>
+              <a:rPr lang="ru-RU" b="1" dirty="0"/>
+              <a:t>усиливать или сохранять постусловия</a:t>
+            </a:r>
+            <a:r>
+              <a:rPr lang="ru-RU" dirty="0"/>
+              <a:t>: гарантии после выполнения метода не должны становиться слабее.</a:t>
+            </a:r>
+            <a:br>
+              <a:rPr lang="ru-RU" dirty="0"/>
+            </a:br>
+            <a:r>
+              <a:rPr lang="ru-RU" dirty="0"/>
+              <a:t>— И он не должен нарушать инварианты — правила, которые всегда должны быть верны для базового типа</a:t>
+            </a:r>
+          </a:p>
+          <a:p>
+            <a:pPr marL="0" marR="0" indent="0" algn="l" defTabSz="914400" rtl="0" eaLnBrk="1" fontAlgn="auto" latinLnBrk="0" hangingPunct="1">
+              <a:lnSpc>
+                <a:spcPct val="100000"/>
+              </a:lnSpc>
+              <a:spcBef>
+                <a:spcPts val="0"/>
+              </a:spcBef>
+              <a:spcAft>
+                <a:spcPts val="0"/>
+              </a:spcAft>
+              <a:buClrTx/>
+              <a:buSzTx/>
+              <a:buFontTx/>
+              <a:buNone/>
+              <a:tabLst/>
+              <a:defRPr/>
+            </a:pPr>
             <a:endParaRPr lang="en-US" dirty="0"/>
           </a:p>
         </p:txBody>
       </p:sp>
       <p:sp>
         <p:nvSpPr>
-          <p:cNvPr id="4" name="Slide Number Placeholder 3"/>
+          <p:cNvPr id="4" name="Номер слайда 3"/>
           <p:cNvSpPr>
             <a:spLocks noGrp="1"/>
           </p:cNvSpPr>
           <p:nvPr>
-            <p:ph type="sldNum" sz="quarter" idx="5"/>
+            <p:ph type="sldNum" sz="quarter" idx="10"/>
           </p:nvPr>
         </p:nvSpPr>
         <p:spPr/>
@@ -2600,7 +2630,7 @@
           <a:p>
             <a:fld id="{9BF0A773-BC3A-474D-8036-883A816F0F99}" type="slidenum">
               <a:rPr lang="ru-RU" smtClean="0"/>
-              <a:t>24</a:t>
+              <a:t>20</a:t>
             </a:fld>
             <a:endParaRPr lang="ru-RU"/>
           </a:p>
@@ -2609,7 +2639,7 @@
     </p:spTree>
     <p:extLst>
       <p:ext uri="{BB962C8B-B14F-4D97-AF65-F5344CB8AC3E}">
-        <p14:creationId xmlns:p14="http://schemas.microsoft.com/office/powerpoint/2010/main" val="4167664266"/>
+        <p14:creationId xmlns:p14="http://schemas.microsoft.com/office/powerpoint/2010/main" val="2507672309"/>
       </p:ext>
     </p:extLst>
   </p:cSld>
@@ -2638,7 +2668,7 @@
       </p:grpSpPr>
       <p:sp>
         <p:nvSpPr>
-          <p:cNvPr id="2" name="Slide Image Placeholder 1"/>
+          <p:cNvPr id="2" name="Образ слайда 1"/>
           <p:cNvSpPr>
             <a:spLocks noGrp="1" noRot="1" noChangeAspect="1"/>
           </p:cNvSpPr>
@@ -2650,7 +2680,7 @@
       </p:sp>
       <p:sp>
         <p:nvSpPr>
-          <p:cNvPr id="3" name="Notes Placeholder 2"/>
+          <p:cNvPr id="3" name="Заметки 2"/>
           <p:cNvSpPr>
             <a:spLocks noGrp="1"/>
           </p:cNvSpPr>
@@ -2663,18 +2693,56 @@
           <a:bodyPr/>
           <a:lstStyle/>
           <a:p>
-            <a:endParaRPr lang="en-US" dirty="0"/>
+            <a:r>
+              <a:rPr lang="ru-RU" dirty="0"/>
+              <a:t>Классический пример нарушения LSP — </a:t>
+            </a:r>
+            <a:r>
+              <a:rPr lang="ru-RU" dirty="0" err="1"/>
+              <a:t>Rectangle</a:t>
+            </a:r>
+            <a:r>
+              <a:rPr lang="ru-RU" dirty="0"/>
+              <a:t> и Square. На уровне математики квадрат — частный случай прямоугольника. Но на уровне поведения — нет: квадрат требует, чтобы ширина и высота были равны, а прямоугольник — нет.</a:t>
+            </a:r>
+          </a:p>
+          <a:p>
+            <a:br>
+              <a:rPr lang="ru-RU" dirty="0"/>
+            </a:br>
+            <a:r>
+              <a:rPr lang="ru-RU" dirty="0"/>
+              <a:t>Из-за этого квадрат неизбежно ломает ожидания любого кода, который работает с прямоугольником: если изменить ширину, квадрат внезапно меняет и высоту, что полностью меняет поведение программы. Это и есть нарушение LSP.</a:t>
+            </a:r>
+          </a:p>
+          <a:p>
+            <a:endParaRPr lang="ru-RU" dirty="0"/>
+          </a:p>
+          <a:p>
+            <a:r>
+              <a:rPr lang="ru-RU" dirty="0"/>
+              <a:t>Важно понимать: LSP — это не про математику и не про классификацию сущностей. Это про поведение. Если поведение подкласса противоречит ожиданиям клиентов базового типа — наследование использовать нельзя.</a:t>
+            </a:r>
+          </a:p>
+          <a:p>
+            <a:r>
+              <a:rPr lang="ru-RU" dirty="0"/>
+              <a:t>Соблюдение LSP снижает количество скрытых, труднонаходимых ошибок, делает систему более предсказуемой и облегчает расширяемость. Это фундаментальный принцип правильного использования наследования.</a:t>
+            </a:r>
+          </a:p>
+          <a:p>
+            <a:endParaRPr lang="ru-RU" dirty="0"/>
           </a:p>
         </p:txBody>
       </p:sp>
       <p:sp>
         <p:nvSpPr>
-          <p:cNvPr id="4" name="Slide Number Placeholder 3"/>
+          <p:cNvPr id="4" name="Номер слайда 3"/>
           <p:cNvSpPr>
             <a:spLocks noGrp="1"/>
           </p:cNvSpPr>
           <p:nvPr>
-            <p:ph type="sldNum" sz="quarter" idx="5"/>
+            <p:ph type="sldNum" sz="quarter" idx="10"/>
           </p:nvPr>
         </p:nvSpPr>
         <p:spPr/>
@@ -2684,7 +2752,7 @@
           <a:p>
             <a:fld id="{9BF0A773-BC3A-474D-8036-883A816F0F99}" type="slidenum">
               <a:rPr lang="ru-RU" smtClean="0"/>
-              <a:t>26</a:t>
+              <a:t>21</a:t>
             </a:fld>
             <a:endParaRPr lang="ru-RU"/>
           </a:p>
@@ -2693,7 +2761,7 @@
     </p:spTree>
     <p:extLst>
       <p:ext uri="{BB962C8B-B14F-4D97-AF65-F5344CB8AC3E}">
-        <p14:creationId xmlns:p14="http://schemas.microsoft.com/office/powerpoint/2010/main" val="3674159608"/>
+        <p14:creationId xmlns:p14="http://schemas.microsoft.com/office/powerpoint/2010/main" val="1469228710"/>
       </p:ext>
     </p:extLst>
   </p:cSld>
@@ -2747,45 +2815,7 @@
           <a:bodyPr/>
           <a:lstStyle/>
           <a:p>
-            <a:r>
-              <a:rPr lang="ru-RU" dirty="0"/>
-              <a:t>Подведём итоги принципа подстановки Лисков.</a:t>
-            </a:r>
-          </a:p>
-          <a:p>
-            <a:r>
-              <a:rPr lang="ru-RU" dirty="0"/>
-              <a:t>Основное достоинство LSP — это предсказуемость поведения. Когда подклассы соблюдают контракт базового класса, мы можем безопасно использовать их в существующем коде. Это резко снижает количество скрытых, трудно обнаруживаемых ошибок. В частности, тех ошибок, которые проявляются только в </a:t>
-            </a:r>
-            <a:r>
-              <a:rPr lang="ru-RU" dirty="0" err="1"/>
-              <a:t>рантайме</a:t>
-            </a:r>
-            <a:r>
-              <a:rPr lang="ru-RU" dirty="0"/>
-              <a:t> — когда поведение вдруг оказывается не таким, как ожидалось.</a:t>
-            </a:r>
-          </a:p>
-          <a:p>
-            <a:endParaRPr lang="ru-RU" dirty="0"/>
-          </a:p>
-          <a:p>
-            <a:r>
-              <a:rPr lang="ru-RU" dirty="0"/>
-              <a:t>Второе важное преимущество — это упрощённая расширяемость. Если мы уверены, что новые подклассы корректно реализуют контракт базового типа, значит они действительно взаимозаменяемы. Можно добавлять новое поведение, не переписывая старый код и не опасаясь нарушений.</a:t>
-            </a:r>
-          </a:p>
-          <a:p>
-            <a:endParaRPr lang="ru-RU" dirty="0"/>
-          </a:p>
-          <a:p>
-            <a:r>
-              <a:rPr lang="ru-RU" dirty="0"/>
-              <a:t>Третье — это надёжность повторного использования. Когда интерфейсы и базовые классы спроектированы правильно, их действительно можно безопасно расширять. Наличие LSP делает архитектуру менее хрупкой и более устойчивой к изменениям.</a:t>
-            </a:r>
-          </a:p>
-          <a:p>
-            <a:endParaRPr lang="en-US" dirty="0"/>
+            <a:endParaRPr lang="en-US"/>
           </a:p>
         </p:txBody>
       </p:sp>
@@ -2806,7 +2836,7 @@
           <a:p>
             <a:fld id="{9BF0A773-BC3A-474D-8036-883A816F0F99}" type="slidenum">
               <a:rPr lang="ru-RU" smtClean="0"/>
-              <a:t>27</a:t>
+              <a:t>22</a:t>
             </a:fld>
             <a:endParaRPr lang="ru-RU"/>
           </a:p>
@@ -2815,7 +2845,7 @@
     </p:spTree>
     <p:extLst>
       <p:ext uri="{BB962C8B-B14F-4D97-AF65-F5344CB8AC3E}">
-        <p14:creationId xmlns:p14="http://schemas.microsoft.com/office/powerpoint/2010/main" val="2250227976"/>
+        <p14:creationId xmlns:p14="http://schemas.microsoft.com/office/powerpoint/2010/main" val="881161513"/>
       </p:ext>
     </p:extLst>
   </p:cSld>
@@ -2869,54 +2899,7 @@
           <a:bodyPr/>
           <a:lstStyle/>
           <a:p>
-            <a:r>
-              <a:rPr lang="ru-RU" dirty="0"/>
-              <a:t>Но, как и у любых принципов, у LSP есть свои трудности.</a:t>
-            </a:r>
-          </a:p>
-          <a:p>
-            <a:r>
-              <a:rPr lang="ru-RU" dirty="0"/>
-              <a:t>Первая — необходимость тщательно продумывать интерфейсы. Нужно понимать, какие инварианты и гарантии должен обеспечивать базовый тип, какие условия можно ослаблять, а какие — нет. Это требует определённой зрелости проектирования.</a:t>
-            </a:r>
-          </a:p>
-          <a:p>
-            <a:endParaRPr lang="ru-RU" dirty="0"/>
-          </a:p>
-          <a:p>
-            <a:r>
-              <a:rPr lang="ru-RU" dirty="0"/>
-              <a:t>Вторая трудность — нарушения LSP часто неочевидны. Компилятор спокойно пропускает код, который технически корректен, но логически нарушает ожидания клиентов. То есть ошибка не в типах, а в поведении, а значит она проявляется только в </a:t>
-            </a:r>
-            <a:r>
-              <a:rPr lang="ru-RU" dirty="0" err="1"/>
-              <a:t>рантайме</a:t>
-            </a:r>
-            <a:r>
-              <a:rPr lang="ru-RU" dirty="0"/>
-              <a:t>.</a:t>
-            </a:r>
-          </a:p>
-          <a:p>
-            <a:endParaRPr lang="ru-RU" dirty="0"/>
-          </a:p>
-          <a:p>
-            <a:r>
-              <a:rPr lang="ru-RU" dirty="0"/>
-              <a:t>И третье — неверно выбранная иерархия наследования приводит к серьёзным архитектурным проблемам. В какой-то момент становится понятно, что поведение подкласса не согласуется с базовым, и приходится переделывать модель. Иногда это значит отказаться от наследования вовсе и перейти на композицию.</a:t>
-            </a:r>
-          </a:p>
-          <a:p>
-            <a:endParaRPr lang="ru-RU" dirty="0"/>
-          </a:p>
-          <a:p>
-            <a:r>
-              <a:rPr lang="ru-RU" dirty="0"/>
-              <a:t>Поэтому LSP — это не просто формальный принцип, а инструмент, который помогает выявлять неправильные абстракции. Если соблюдение LSP вызывает сложности — это признак, что в основе лежит неверная модель или неверное отношение наследования</a:t>
-            </a:r>
-          </a:p>
-          <a:p>
-            <a:endParaRPr lang="en-US" dirty="0"/>
+            <a:endParaRPr lang="en-US"/>
           </a:p>
         </p:txBody>
       </p:sp>
@@ -2937,7 +2920,7 @@
           <a:p>
             <a:fld id="{9BF0A773-BC3A-474D-8036-883A816F0F99}" type="slidenum">
               <a:rPr lang="ru-RU" smtClean="0"/>
-              <a:t>28</a:t>
+              <a:t>23</a:t>
             </a:fld>
             <a:endParaRPr lang="ru-RU"/>
           </a:p>
@@ -2946,7 +2929,7 @@
     </p:spTree>
     <p:extLst>
       <p:ext uri="{BB962C8B-B14F-4D97-AF65-F5344CB8AC3E}">
-        <p14:creationId xmlns:p14="http://schemas.microsoft.com/office/powerpoint/2010/main" val="545461388"/>
+        <p14:creationId xmlns:p14="http://schemas.microsoft.com/office/powerpoint/2010/main" val="2573580452"/>
       </p:ext>
     </p:extLst>
   </p:cSld>
@@ -2975,7 +2958,7 @@
       </p:grpSpPr>
       <p:sp>
         <p:nvSpPr>
-          <p:cNvPr id="2" name="Образ слайда 1"/>
+          <p:cNvPr id="2" name="Slide Image Placeholder 1"/>
           <p:cNvSpPr>
             <a:spLocks noGrp="1" noRot="1" noChangeAspect="1"/>
           </p:cNvSpPr>
@@ -2987,7 +2970,7 @@
       </p:sp>
       <p:sp>
         <p:nvSpPr>
-          <p:cNvPr id="3" name="Заметки 2"/>
+          <p:cNvPr id="3" name="Notes Placeholder 2"/>
           <p:cNvSpPr>
             <a:spLocks noGrp="1"/>
           </p:cNvSpPr>
@@ -3000,67 +2983,18 @@
           <a:bodyPr/>
           <a:lstStyle/>
           <a:p>
-            <a:r>
-              <a:rPr lang="ru-RU" dirty="0"/>
-              <a:t>Принцип разделения интерфейса — это принцип о том, что интерфейсы должны быть ровно настолько широкими, насколько это нужно клиенту. Формулируется он просто: клиенты не должны зависеть от методов, которые они не используют.</a:t>
-            </a:r>
-          </a:p>
-          <a:p>
-            <a:endParaRPr lang="ru-RU" dirty="0"/>
-          </a:p>
-          <a:p>
-            <a:r>
-              <a:rPr lang="ru-RU" dirty="0"/>
-              <a:t>Почему это важно? Представьте интерфейс, который включает десять методов, а конкретный клиент использует только один или два. Оставшиеся восемь методов становятся для него лишними зависимостями. Если в интерфейс добавят новый метод, изменят сигнатуру старого или изменится контракт — клиенту, который никогда этот метод не вызывал, всё равно придётся реагировать на изменения. Это создаёт ненужную связанность и заставляет переносить изменения туда, где они не имеют никакого смысла.</a:t>
-            </a:r>
-          </a:p>
-          <a:p>
-            <a:endParaRPr lang="ru-RU" dirty="0"/>
-          </a:p>
-          <a:p>
-            <a:r>
-              <a:rPr lang="ru-RU" dirty="0"/>
-              <a:t>Поэтому ISP говорит: интерфейс должен описывать </a:t>
-            </a:r>
-            <a:r>
-              <a:rPr lang="ru-RU" b="1" dirty="0"/>
-              <a:t>роль</a:t>
-            </a:r>
-            <a:r>
-              <a:rPr lang="ru-RU" dirty="0"/>
-              <a:t>, которую компонент выполняет для клиента, а не всё, что он в принципе умеет делать. Если разные клиенты используют разные наборы операций — значит, и интерфейсы должны быть разными.</a:t>
-            </a:r>
-          </a:p>
-          <a:p>
-            <a:pPr marL="0" marR="0" indent="0" algn="l" defTabSz="914400" rtl="0" eaLnBrk="1" fontAlgn="auto" latinLnBrk="0" hangingPunct="1">
-              <a:lnSpc>
-                <a:spcPct val="100000"/>
-              </a:lnSpc>
-              <a:spcBef>
-                <a:spcPts val="0"/>
-              </a:spcBef>
-              <a:spcAft>
-                <a:spcPts val="0"/>
-              </a:spcAft>
-              <a:buClrTx/>
-              <a:buSzTx/>
-              <a:buFontTx/>
-              <a:buNone/>
-              <a:tabLst/>
-              <a:defRPr/>
-            </a:pPr>
             <a:endParaRPr lang="en-US" dirty="0"/>
           </a:p>
         </p:txBody>
       </p:sp>
       <p:sp>
         <p:nvSpPr>
-          <p:cNvPr id="4" name="Номер слайда 3"/>
+          <p:cNvPr id="4" name="Slide Number Placeholder 3"/>
           <p:cNvSpPr>
             <a:spLocks noGrp="1"/>
           </p:cNvSpPr>
           <p:nvPr>
-            <p:ph type="sldNum" sz="quarter" idx="10"/>
+            <p:ph type="sldNum" sz="quarter" idx="5"/>
           </p:nvPr>
         </p:nvSpPr>
         <p:spPr/>
@@ -3070,7 +3004,7 @@
           <a:p>
             <a:fld id="{9BF0A773-BC3A-474D-8036-883A816F0F99}" type="slidenum">
               <a:rPr lang="ru-RU" smtClean="0"/>
-              <a:t>30</a:t>
+              <a:t>24</a:t>
             </a:fld>
             <a:endParaRPr lang="ru-RU"/>
           </a:p>
@@ -3079,7 +3013,7 @@
     </p:spTree>
     <p:extLst>
       <p:ext uri="{BB962C8B-B14F-4D97-AF65-F5344CB8AC3E}">
-        <p14:creationId xmlns:p14="http://schemas.microsoft.com/office/powerpoint/2010/main" val="2196027662"/>
+        <p14:creationId xmlns:p14="http://schemas.microsoft.com/office/powerpoint/2010/main" val="4167664266"/>
       </p:ext>
     </p:extLst>
   </p:cSld>
@@ -3133,46 +3067,7 @@
           <a:bodyPr/>
           <a:lstStyle/>
           <a:p>
-            <a:r>
-              <a:rPr lang="ru-RU" dirty="0"/>
-              <a:t>На практике это означает несколько вещей.</a:t>
-            </a:r>
-          </a:p>
-          <a:p>
-            <a:r>
-              <a:rPr lang="ru-RU" dirty="0"/>
-              <a:t>Во-первых, не нужно тупо копировать все методы класса в интерфейс. Интерфейс — это не “обёртка вокруг класса”, это контракт для конкретного сценария использования.</a:t>
-            </a:r>
-          </a:p>
-          <a:p>
-            <a:endParaRPr lang="ru-RU" dirty="0"/>
-          </a:p>
-          <a:p>
-            <a:r>
-              <a:rPr lang="ru-RU" dirty="0"/>
-              <a:t>Во-вторых, если у вас есть клиенты, которым нужны разные части функциональности, — интерфейс нужно разделять. Пусть каждый клиент получает ровно ту часть, которая ему действительно нужна. Это снижает связанность и делает код более гибким.</a:t>
-            </a:r>
-          </a:p>
-          <a:p>
-            <a:endParaRPr lang="ru-RU" dirty="0"/>
-          </a:p>
-          <a:p>
-            <a:r>
-              <a:rPr lang="ru-RU" dirty="0"/>
-              <a:t>И, наконец, если исходный класс принадлежит библиотеке или изменить его невозможно, мы всё равно можем применить ISP — с помощью адаптера, который предоставляет узкий интерфейс и закрывает лишнюю функциональность.</a:t>
-            </a:r>
-          </a:p>
-          <a:p>
-            <a:endParaRPr lang="ru-RU" dirty="0"/>
-          </a:p>
-          <a:p>
-            <a:r>
-              <a:rPr lang="ru-RU" dirty="0"/>
-              <a:t>В результате мы получаем систему, где изменения локализованы, клиенты зависимы только от того, что действительно используют, и нет лишних “цепных реакций” при обновлении интерфейсов. Это делает архитектуру гораздо более устойчивой и аккуратной.</a:t>
-            </a:r>
-          </a:p>
-          <a:p>
-            <a:endParaRPr lang="en-US" dirty="0"/>
+            <a:endParaRPr lang="en-US"/>
           </a:p>
         </p:txBody>
       </p:sp>
@@ -3193,7 +3088,7 @@
           <a:p>
             <a:fld id="{9BF0A773-BC3A-474D-8036-883A816F0F99}" type="slidenum">
               <a:rPr lang="ru-RU" smtClean="0"/>
-              <a:t>31</a:t>
+              <a:t>25</a:t>
             </a:fld>
             <a:endParaRPr lang="ru-RU"/>
           </a:p>
@@ -3202,7 +3097,7 @@
     </p:spTree>
     <p:extLst>
       <p:ext uri="{BB962C8B-B14F-4D97-AF65-F5344CB8AC3E}">
-        <p14:creationId xmlns:p14="http://schemas.microsoft.com/office/powerpoint/2010/main" val="1470816610"/>
+        <p14:creationId xmlns:p14="http://schemas.microsoft.com/office/powerpoint/2010/main" val="174982605"/>
       </p:ext>
     </p:extLst>
   </p:cSld>
@@ -3256,180 +3151,6 @@
           <a:bodyPr/>
           <a:lstStyle/>
           <a:p>
-            <a:r>
-              <a:rPr lang="ru-RU" b="1" dirty="0"/>
-              <a:t>В чём проблемы:</a:t>
-            </a:r>
-          </a:p>
-          <a:p>
-            <a:r>
-              <a:rPr lang="ru-RU" b="1" dirty="0"/>
-              <a:t>Нарушен ISP</a:t>
-            </a:r>
-            <a:r>
-              <a:rPr lang="ru-RU" dirty="0"/>
-              <a:t>: клиент </a:t>
-            </a:r>
-            <a:r>
-              <a:rPr lang="ru-RU" sz="1200" kern="1200" dirty="0" err="1">
-                <a:solidFill>
-                  <a:schemeClr val="tx1"/>
-                </a:solidFill>
-                <a:latin typeface="+mn-lt"/>
-                <a:ea typeface="+mn-ea"/>
-                <a:cs typeface="+mn-cs"/>
-              </a:rPr>
-              <a:t>PrintReport</a:t>
-            </a:r>
-            <a:r>
-              <a:rPr lang="ru-RU" dirty="0"/>
-              <a:t> зависит от интерфейса, в котором есть </a:t>
-            </a:r>
-            <a:r>
-              <a:rPr lang="ru-RU" sz="1200" kern="1200" dirty="0" err="1">
-                <a:solidFill>
-                  <a:schemeClr val="tx1"/>
-                </a:solidFill>
-                <a:latin typeface="+mn-lt"/>
-                <a:ea typeface="+mn-ea"/>
-                <a:cs typeface="+mn-cs"/>
-              </a:rPr>
-              <a:t>Scan</a:t>
-            </a:r>
-            <a:r>
-              <a:rPr lang="ru-RU" dirty="0"/>
-              <a:t> и </a:t>
-            </a:r>
-            <a:r>
-              <a:rPr lang="ru-RU" sz="1200" kern="1200" dirty="0" err="1">
-                <a:solidFill>
-                  <a:schemeClr val="tx1"/>
-                </a:solidFill>
-                <a:latin typeface="+mn-lt"/>
-                <a:ea typeface="+mn-ea"/>
-                <a:cs typeface="+mn-cs"/>
-              </a:rPr>
-              <a:t>Fax</a:t>
-            </a:r>
-            <a:r>
-              <a:rPr lang="ru-RU" dirty="0"/>
-              <a:t>, хотя он их никогда не использует.</a:t>
-            </a:r>
-          </a:p>
-          <a:p>
-            <a:r>
-              <a:rPr lang="ru-RU" b="1" dirty="0"/>
-              <a:t>Ложные обязанности</a:t>
-            </a:r>
-            <a:r>
-              <a:rPr lang="ru-RU" dirty="0"/>
-              <a:t>: </a:t>
-            </a:r>
-            <a:r>
-              <a:rPr lang="ru-RU" sz="1200" kern="1200" dirty="0" err="1">
-                <a:solidFill>
-                  <a:schemeClr val="tx1"/>
-                </a:solidFill>
-                <a:latin typeface="+mn-lt"/>
-                <a:ea typeface="+mn-ea"/>
-                <a:cs typeface="+mn-cs"/>
-              </a:rPr>
-              <a:t>SimplePrinter</a:t>
-            </a:r>
-            <a:r>
-              <a:rPr lang="ru-RU" dirty="0"/>
-              <a:t> вынужден «поддерживать» методы, которых у него по сути нет (пустые реализации, исключения и т.п.).</a:t>
-            </a:r>
-          </a:p>
-          <a:p>
-            <a:r>
-              <a:rPr lang="ru-RU" b="1" dirty="0"/>
-              <a:t>Хрупкость</a:t>
-            </a:r>
-            <a:r>
-              <a:rPr lang="ru-RU" dirty="0"/>
-              <a:t>: если мы изменим сигнатуру </a:t>
-            </a:r>
-            <a:r>
-              <a:rPr lang="ru-RU" sz="1200" kern="1200" dirty="0" err="1">
-                <a:solidFill>
-                  <a:schemeClr val="tx1"/>
-                </a:solidFill>
-                <a:latin typeface="+mn-lt"/>
-                <a:ea typeface="+mn-ea"/>
-                <a:cs typeface="+mn-cs"/>
-              </a:rPr>
-              <a:t>Scan</a:t>
-            </a:r>
-            <a:r>
-              <a:rPr lang="ru-RU" dirty="0"/>
-              <a:t> или добавим новый метод в интерфейс, придётся править все реализации, даже те, которые ничего не сканируют и не </a:t>
-            </a:r>
-            <a:r>
-              <a:rPr lang="ru-RU" dirty="0" err="1"/>
-              <a:t>факсят</a:t>
-            </a:r>
-            <a:r>
-              <a:rPr lang="ru-RU" dirty="0"/>
-              <a:t>.</a:t>
-            </a:r>
-          </a:p>
-          <a:p>
-            <a:r>
-              <a:rPr lang="ru-RU" b="1" dirty="0"/>
-              <a:t>Тестируемость</a:t>
-            </a:r>
-            <a:r>
-              <a:rPr lang="ru-RU" dirty="0"/>
-              <a:t>: тесты на </a:t>
-            </a:r>
-            <a:r>
-              <a:rPr lang="ru-RU" sz="1200" kern="1200" dirty="0" err="1">
-                <a:solidFill>
-                  <a:schemeClr val="tx1"/>
-                </a:solidFill>
-                <a:latin typeface="+mn-lt"/>
-                <a:ea typeface="+mn-ea"/>
-                <a:cs typeface="+mn-cs"/>
-              </a:rPr>
-              <a:t>SimplePrinter</a:t>
-            </a:r>
-            <a:r>
-              <a:rPr lang="ru-RU" dirty="0"/>
-              <a:t> формально должны проверять ещё и то, что </a:t>
-            </a:r>
-            <a:r>
-              <a:rPr lang="ru-RU" sz="1200" kern="1200" dirty="0" err="1">
-                <a:solidFill>
-                  <a:schemeClr val="tx1"/>
-                </a:solidFill>
-                <a:latin typeface="+mn-lt"/>
-                <a:ea typeface="+mn-ea"/>
-                <a:cs typeface="+mn-cs"/>
-              </a:rPr>
-              <a:t>Scan</a:t>
-            </a:r>
-            <a:r>
-              <a:rPr lang="ru-RU" dirty="0"/>
-              <a:t> и </a:t>
-            </a:r>
-            <a:r>
-              <a:rPr lang="ru-RU" sz="1200" kern="1200" dirty="0" err="1">
-                <a:solidFill>
-                  <a:schemeClr val="tx1"/>
-                </a:solidFill>
-                <a:latin typeface="+mn-lt"/>
-                <a:ea typeface="+mn-ea"/>
-                <a:cs typeface="+mn-cs"/>
-              </a:rPr>
-              <a:t>Fax</a:t>
-            </a:r>
-            <a:r>
-              <a:rPr lang="ru-RU" dirty="0"/>
-              <a:t> не работают — хотя бизнесу это вообще не нужно.</a:t>
-            </a:r>
-          </a:p>
-          <a:p>
             <a:endParaRPr lang="en-US" dirty="0"/>
           </a:p>
         </p:txBody>
@@ -3451,7 +3172,7 @@
           <a:p>
             <a:fld id="{9BF0A773-BC3A-474D-8036-883A816F0F99}" type="slidenum">
               <a:rPr lang="ru-RU" smtClean="0"/>
-              <a:t>32</a:t>
+              <a:t>26</a:t>
             </a:fld>
             <a:endParaRPr lang="ru-RU"/>
           </a:p>
@@ -3460,7 +3181,7 @@
     </p:spTree>
     <p:extLst>
       <p:ext uri="{BB962C8B-B14F-4D97-AF65-F5344CB8AC3E}">
-        <p14:creationId xmlns:p14="http://schemas.microsoft.com/office/powerpoint/2010/main" val="1816164123"/>
+        <p14:creationId xmlns:p14="http://schemas.microsoft.com/office/powerpoint/2010/main" val="3674159608"/>
       </p:ext>
     </p:extLst>
   </p:cSld>
@@ -3515,176 +3236,40 @@
           <a:lstStyle/>
           <a:p>
             <a:r>
-              <a:rPr lang="ru-RU" b="1" dirty="0"/>
-              <a:t>Что изменилось:</a:t>
-            </a:r>
-          </a:p>
-          <a:p>
-            <a:r>
-              <a:rPr lang="ru-RU" sz="1200" kern="1200" dirty="0" err="1">
-                <a:solidFill>
-                  <a:schemeClr val="tx1"/>
-                </a:solidFill>
-                <a:latin typeface="+mn-lt"/>
-                <a:ea typeface="+mn-ea"/>
-                <a:cs typeface="+mn-cs"/>
-              </a:rPr>
-              <a:t>PrintReport</a:t>
-            </a:r>
-            <a:r>
-              <a:rPr lang="ru-RU" dirty="0"/>
-              <a:t> больше </a:t>
-            </a:r>
-            <a:r>
-              <a:rPr lang="ru-RU" b="1" dirty="0"/>
-              <a:t>не зависит</a:t>
-            </a:r>
-            <a:r>
-              <a:rPr lang="ru-RU" dirty="0"/>
-              <a:t> ни от </a:t>
-            </a:r>
-            <a:r>
-              <a:rPr lang="ru-RU" sz="1200" kern="1200" dirty="0" err="1">
-                <a:solidFill>
-                  <a:schemeClr val="tx1"/>
-                </a:solidFill>
-                <a:latin typeface="+mn-lt"/>
-                <a:ea typeface="+mn-ea"/>
-                <a:cs typeface="+mn-cs"/>
-              </a:rPr>
-              <a:t>Scan</a:t>
-            </a:r>
-            <a:r>
-              <a:rPr lang="ru-RU" dirty="0"/>
-              <a:t>, ни от </a:t>
-            </a:r>
-            <a:r>
-              <a:rPr lang="ru-RU" sz="1200" kern="1200" dirty="0" err="1">
-                <a:solidFill>
-                  <a:schemeClr val="tx1"/>
-                </a:solidFill>
-                <a:latin typeface="+mn-lt"/>
-                <a:ea typeface="+mn-ea"/>
-                <a:cs typeface="+mn-cs"/>
-              </a:rPr>
-              <a:t>Fax</a:t>
-            </a:r>
-            <a:r>
-              <a:rPr lang="ru-RU" dirty="0"/>
-              <a:t> — только от </a:t>
-            </a:r>
-            <a:r>
-              <a:rPr lang="ru-RU" sz="1200" kern="1200" dirty="0" err="1">
-                <a:solidFill>
-                  <a:schemeClr val="tx1"/>
-                </a:solidFill>
-                <a:latin typeface="+mn-lt"/>
-                <a:ea typeface="+mn-ea"/>
-                <a:cs typeface="+mn-cs"/>
-              </a:rPr>
-              <a:t>IPrinter</a:t>
-            </a:r>
-            <a:r>
-              <a:rPr lang="ru-RU" dirty="0"/>
-              <a:t>.</a:t>
-            </a:r>
-          </a:p>
-          <a:p>
-            <a:r>
-              <a:rPr lang="ru-RU" sz="1200" kern="1200" dirty="0" err="1">
-                <a:solidFill>
-                  <a:schemeClr val="tx1"/>
-                </a:solidFill>
-                <a:latin typeface="+mn-lt"/>
-                <a:ea typeface="+mn-ea"/>
-                <a:cs typeface="+mn-cs"/>
-              </a:rPr>
-              <a:t>SimplePrinter</a:t>
-            </a:r>
-            <a:r>
-              <a:rPr lang="ru-RU" dirty="0"/>
-              <a:t> реализует ровно одну роль — </a:t>
-            </a:r>
-            <a:r>
-              <a:rPr lang="ru-RU" b="1" dirty="0"/>
-              <a:t>печать</a:t>
-            </a:r>
-            <a:r>
-              <a:rPr lang="ru-RU" dirty="0"/>
-              <a:t>. Никаких «заглушек» и «не поддерживается».</a:t>
-            </a:r>
-          </a:p>
-          <a:p>
-            <a:r>
-              <a:rPr lang="ru-RU" dirty="0"/>
-              <a:t>Добавление нового метода, скажем, к </a:t>
-            </a:r>
-            <a:r>
-              <a:rPr lang="ru-RU" sz="1200" kern="1200" dirty="0" err="1">
-                <a:solidFill>
-                  <a:schemeClr val="tx1"/>
-                </a:solidFill>
-                <a:latin typeface="+mn-lt"/>
-                <a:ea typeface="+mn-ea"/>
-                <a:cs typeface="+mn-cs"/>
-              </a:rPr>
-              <a:t>IFax</a:t>
-            </a:r>
-            <a:r>
-              <a:rPr lang="ru-RU" dirty="0"/>
-              <a:t>, </a:t>
-            </a:r>
-            <a:r>
-              <a:rPr lang="ru-RU" b="1" dirty="0"/>
-              <a:t>не ломает код</a:t>
-            </a:r>
-            <a:r>
-              <a:rPr lang="ru-RU" dirty="0"/>
-              <a:t>, который работает только с </a:t>
-            </a:r>
-            <a:r>
-              <a:rPr lang="ru-RU" sz="1200" kern="1200" dirty="0" err="1">
-                <a:solidFill>
-                  <a:schemeClr val="tx1"/>
-                </a:solidFill>
-                <a:latin typeface="+mn-lt"/>
-                <a:ea typeface="+mn-ea"/>
-                <a:cs typeface="+mn-cs"/>
-              </a:rPr>
-              <a:t>IPrinter</a:t>
-            </a:r>
-            <a:r>
-              <a:rPr lang="ru-RU" dirty="0"/>
-              <a:t> или </a:t>
-            </a:r>
-            <a:r>
-              <a:rPr lang="ru-RU" sz="1200" kern="1200" dirty="0" err="1">
-                <a:solidFill>
-                  <a:schemeClr val="tx1"/>
-                </a:solidFill>
-                <a:latin typeface="+mn-lt"/>
-                <a:ea typeface="+mn-ea"/>
-                <a:cs typeface="+mn-cs"/>
-              </a:rPr>
-              <a:t>IScanner</a:t>
-            </a:r>
-            <a:r>
-              <a:rPr lang="ru-RU" dirty="0"/>
-              <a:t>.</a:t>
-            </a:r>
-          </a:p>
-          <a:p>
-            <a:r>
-              <a:rPr lang="ru-RU" dirty="0"/>
-              <a:t>Интерфейсы стали </a:t>
-            </a:r>
-            <a:r>
-              <a:rPr lang="ru-RU" b="1" dirty="0"/>
-              <a:t>меньше и специфичнее</a:t>
-            </a:r>
-            <a:r>
-              <a:rPr lang="ru-RU" dirty="0"/>
-              <a:t>, их проще реализовывать и тестировать.</a:t>
+              <a:rPr lang="ru-RU" dirty="0"/>
+              <a:t>Подведём итоги принципа подстановки Лисков.</a:t>
+            </a:r>
+          </a:p>
+          <a:p>
+            <a:r>
+              <a:rPr lang="ru-RU" dirty="0"/>
+              <a:t>Основное достоинство LSP — это предсказуемость поведения. Когда подклассы соблюдают контракт базового класса, мы можем безопасно использовать их в существующем коде. Это резко снижает количество скрытых, трудно обнаруживаемых ошибок. В частности, тех ошибок, которые проявляются только в </a:t>
+            </a:r>
+            <a:r>
+              <a:rPr lang="ru-RU" dirty="0" err="1"/>
+              <a:t>рантайме</a:t>
+            </a:r>
+            <a:r>
+              <a:rPr lang="ru-RU" dirty="0"/>
+              <a:t> — когда поведение вдруг оказывается не таким, как ожидалось.</a:t>
+            </a:r>
+          </a:p>
+          <a:p>
+            <a:endParaRPr lang="ru-RU" dirty="0"/>
+          </a:p>
+          <a:p>
+            <a:r>
+              <a:rPr lang="ru-RU" dirty="0"/>
+              <a:t>Второе важное преимущество — это упрощённая расширяемость. Если мы уверены, что новые подклассы корректно реализуют контракт базового типа, значит они действительно взаимозаменяемы. Можно добавлять новое поведение, не переписывая старый код и не опасаясь нарушений.</a:t>
+            </a:r>
+          </a:p>
+          <a:p>
+            <a:endParaRPr lang="ru-RU" dirty="0"/>
+          </a:p>
+          <a:p>
+            <a:r>
+              <a:rPr lang="ru-RU" dirty="0"/>
+              <a:t>Третье — это надёжность повторного использования. Когда интерфейсы и базовые классы спроектированы правильно, их действительно можно безопасно расширять. Наличие LSP делает архитектуру менее хрупкой и более устойчивой к изменениям.</a:t>
             </a:r>
           </a:p>
           <a:p>
@@ -3709,7 +3294,7 @@
           <a:p>
             <a:fld id="{9BF0A773-BC3A-474D-8036-883A816F0F99}" type="slidenum">
               <a:rPr lang="ru-RU" smtClean="0"/>
-              <a:t>33</a:t>
+              <a:t>27</a:t>
             </a:fld>
             <a:endParaRPr lang="ru-RU"/>
           </a:p>
@@ -3718,7 +3303,7 @@
     </p:spTree>
     <p:extLst>
       <p:ext uri="{BB962C8B-B14F-4D97-AF65-F5344CB8AC3E}">
-        <p14:creationId xmlns:p14="http://schemas.microsoft.com/office/powerpoint/2010/main" val="3676822209"/>
+        <p14:creationId xmlns:p14="http://schemas.microsoft.com/office/powerpoint/2010/main" val="2250227976"/>
       </p:ext>
     </p:extLst>
   </p:cSld>
@@ -3774,7 +3359,13 @@
           <a:p>
             <a:r>
               <a:rPr lang="ru-RU" dirty="0"/>
-              <a:t>Подведём итог принципу разделения интерфейса.</a:t>
+              <a:t>Но, как и у любых принципов, у LSP есть свои трудности.</a:t>
+            </a:r>
+          </a:p>
+          <a:p>
+            <a:r>
+              <a:rPr lang="ru-RU" dirty="0"/>
+              <a:t>Первая — необходимость тщательно продумывать интерфейсы. Нужно понимать, какие инварианты и гарантии должен обеспечивать базовый тип, какие условия можно ослаблять, а какие — нет. Это требует определённой зрелости проектирования.</a:t>
             </a:r>
           </a:p>
           <a:p>
@@ -3783,7 +3374,15 @@
           <a:p>
             <a:r>
               <a:rPr lang="ru-RU" dirty="0"/>
-              <a:t>Его главное достоинство — снижение связности. Клиенты больше не зависят от методов, которые им не нужны. Это означает, что если в интерфейсе изменился какой-то метод, то клиенты, которые его не используют, вообще не почувствуют изменения. И это серьёзно уменьшает количество каскадных правок по коду.</a:t>
+              <a:t>Вторая трудность — нарушения LSP часто неочевидны. Компилятор спокойно пропускает код, который технически корректен, но логически нарушает ожидания клиентов. То есть ошибка не в типах, а в поведении, а значит она проявляется только в </a:t>
+            </a:r>
+            <a:r>
+              <a:rPr lang="ru-RU" dirty="0" err="1"/>
+              <a:t>рантайме</a:t>
+            </a:r>
+            <a:r>
+              <a:rPr lang="ru-RU" dirty="0"/>
+              <a:t>.</a:t>
             </a:r>
           </a:p>
           <a:p>
@@ -3792,7 +3391,7 @@
           <a:p>
             <a:r>
               <a:rPr lang="ru-RU" dirty="0"/>
-              <a:t>Второе преимущество — упрощение реализации. Когда интерфейсы узкие и специализированные, реализовать их намного проще. Не нужно создавать заглушки для методов, которыми устройство или компонент в принципе не обладает. Каждая реализация содержит ровно те методы, которые ей нужны.</a:t>
+              <a:t>И третье — неверно выбранная иерархия наследования приводит к серьёзным архитектурным проблемам. В какой-то момент становится понятно, что поведение подкласса не согласуется с базовым, и приходится переделывать модель. Иногда это значит отказаться от наследования вовсе и перейти на композицию.</a:t>
             </a:r>
           </a:p>
           <a:p>
@@ -3801,7 +3400,7 @@
           <a:p>
             <a:r>
               <a:rPr lang="ru-RU" dirty="0"/>
-              <a:t>Третье — повышенная гибкость архитектуры. Наличие небольших интерфейсов позволяет свободнее комбинировать компоненты в разных сценариях, подменять реализации на тестовые, изолировать части системы.</a:t>
+              <a:t>Поэтому LSP — это не просто формальный принцип, а инструмент, который помогает выявлять неправильные абстракции. Если соблюдение LSP вызывает сложности — это признак, что в основе лежит неверная модель или неверное отношение наследования</a:t>
             </a:r>
           </a:p>
           <a:p>
@@ -3826,7 +3425,7 @@
           <a:p>
             <a:fld id="{9BF0A773-BC3A-474D-8036-883A816F0F99}" type="slidenum">
               <a:rPr lang="ru-RU" smtClean="0"/>
-              <a:t>34</a:t>
+              <a:t>28</a:t>
             </a:fld>
             <a:endParaRPr lang="ru-RU"/>
           </a:p>
@@ -3835,7 +3434,7 @@
     </p:spTree>
     <p:extLst>
       <p:ext uri="{BB962C8B-B14F-4D97-AF65-F5344CB8AC3E}">
-        <p14:creationId xmlns:p14="http://schemas.microsoft.com/office/powerpoint/2010/main" val="215340114"/>
+        <p14:creationId xmlns:p14="http://schemas.microsoft.com/office/powerpoint/2010/main" val="545461388"/>
       </p:ext>
     </p:extLst>
   </p:cSld>
@@ -3889,46 +3488,7 @@
           <a:bodyPr/>
           <a:lstStyle/>
           <a:p>
-            <a:r>
-              <a:rPr lang="ru-RU" dirty="0"/>
-              <a:t>Но у ISP есть и недостатки.</a:t>
-            </a:r>
-          </a:p>
-          <a:p>
-            <a:r>
-              <a:rPr lang="ru-RU" dirty="0"/>
-              <a:t>Первый — неизбежное увеличение количества интерфейсов. Вместо одного большого интерфейса появляются несколько маленьких. Это усложняет архитектуру и может сделать структуру проекта более раздробленной.</a:t>
-            </a:r>
-          </a:p>
-          <a:p>
-            <a:endParaRPr lang="ru-RU" dirty="0"/>
-          </a:p>
-          <a:p>
-            <a:r>
-              <a:rPr lang="ru-RU" dirty="0"/>
-              <a:t>Второй — усложнение навигации. Разработчику нужно понимать, какой интерфейс относится к какой роли. Иногда для новичка это может быть неочевидно, особенно если интерфейсов много.</a:t>
-            </a:r>
-          </a:p>
-          <a:p>
-            <a:endParaRPr lang="ru-RU" dirty="0"/>
-          </a:p>
-          <a:p>
-            <a:r>
-              <a:rPr lang="ru-RU" dirty="0"/>
-              <a:t>И третий момент — важность дисциплины. Разделить интерфейсы нужно правильно: по ролям, по сценариям использования. Слишком мелкие интерфейсы дают путаницу, слишком крупные — снова нарушают ISP. Здесь важно чувствовать баланс.</a:t>
-            </a:r>
-          </a:p>
-          <a:p>
-            <a:endParaRPr lang="ru-RU" dirty="0"/>
-          </a:p>
-          <a:p>
-            <a:r>
-              <a:rPr lang="ru-RU" dirty="0"/>
-              <a:t>В целом, ISP — мощный инструмент снижения связности, но его важно применять осознанно, в тех местах системы, где он действительно даёт выигрыш.</a:t>
-            </a:r>
-          </a:p>
-          <a:p>
-            <a:endParaRPr lang="en-US" dirty="0"/>
+            <a:endParaRPr lang="en-US"/>
           </a:p>
         </p:txBody>
       </p:sp>
@@ -3949,7 +3509,7 @@
           <a:p>
             <a:fld id="{9BF0A773-BC3A-474D-8036-883A816F0F99}" type="slidenum">
               <a:rPr lang="ru-RU" smtClean="0"/>
-              <a:t>35</a:t>
+              <a:t>29</a:t>
             </a:fld>
             <a:endParaRPr lang="ru-RU"/>
           </a:p>
@@ -3958,7 +3518,7 @@
     </p:spTree>
     <p:extLst>
       <p:ext uri="{BB962C8B-B14F-4D97-AF65-F5344CB8AC3E}">
-        <p14:creationId xmlns:p14="http://schemas.microsoft.com/office/powerpoint/2010/main" val="1394632010"/>
+        <p14:creationId xmlns:p14="http://schemas.microsoft.com/office/powerpoint/2010/main" val="1592095209"/>
       </p:ext>
     </p:extLst>
   </p:cSld>
@@ -3987,7 +3547,7 @@
       </p:grpSpPr>
       <p:sp>
         <p:nvSpPr>
-          <p:cNvPr id="2" name="Образ слайда 1"/>
+          <p:cNvPr id="2" name="Slide Image Placeholder 1"/>
           <p:cNvSpPr>
             <a:spLocks noGrp="1" noRot="1" noChangeAspect="1"/>
           </p:cNvSpPr>
@@ -3999,7 +3559,7 @@
       </p:sp>
       <p:sp>
         <p:nvSpPr>
-          <p:cNvPr id="3" name="Заметки 2"/>
+          <p:cNvPr id="3" name="Notes Placeholder 2"/>
           <p:cNvSpPr>
             <a:spLocks noGrp="1"/>
           </p:cNvSpPr>
@@ -4012,106 +3572,18 @@
           <a:bodyPr/>
           <a:lstStyle/>
           <a:p>
-            <a:r>
-              <a:rPr lang="ru-RU" dirty="0"/>
-              <a:t>Начнём с самого первого и, возможно, самого важного принципа — принципа единственной ответственности. Его формулировка звучит так: класс должен иметь только одну причину для изменений.</a:t>
-            </a:r>
-          </a:p>
-          <a:p>
-            <a:r>
-              <a:rPr lang="ru-RU" dirty="0"/>
-              <a:t>Если говорить простыми словами — у класса должна быть </a:t>
-            </a:r>
-            <a:r>
-              <a:rPr lang="ru-RU" b="1" dirty="0"/>
-              <a:t>одна роль</a:t>
-            </a:r>
-            <a:r>
-              <a:rPr lang="ru-RU" dirty="0"/>
-              <a:t>, один источник требований, один “актор”, который диктует, что и как должно меняться.</a:t>
-            </a:r>
-          </a:p>
-          <a:p>
-            <a:r>
-              <a:rPr lang="ru-RU" dirty="0"/>
-              <a:t>Почему это важно? Представьте класс, который и читает файл, и валидирует данные, и преобразует их в объект, и </a:t>
-            </a:r>
-            <a:r>
-              <a:rPr lang="ru-RU" dirty="0" err="1"/>
-              <a:t>логирует</a:t>
-            </a:r>
-            <a:r>
-              <a:rPr lang="ru-RU" dirty="0"/>
-              <a:t> ошибки. Он вроде бы “про файл”, но влияет на него сразу четыре источника изменений: формат файла, правила валидации, структура доменного объекта и требования к логированию. Любое изменение в одном из аспектов может поломать работу другого, и класс становится хрупким.</a:t>
-            </a:r>
-          </a:p>
-          <a:p>
-            <a:endParaRPr lang="ru-RU" dirty="0"/>
-          </a:p>
-          <a:p>
-            <a:r>
-              <a:rPr lang="ru-RU" dirty="0"/>
-              <a:t>SRP помогает избежать этого. Мы стремимся к тому, чтобы каждая часть системы имела ясную, изолированную ответственность. Тогда изменения в одной области не тянут за собой цепочку исправлений по всей системе.</a:t>
-            </a:r>
-          </a:p>
-          <a:p>
-            <a:r>
-              <a:rPr lang="ru-RU" dirty="0"/>
-              <a:t>Есть простой приём, который помогает понять, нарушается ли принцип. Попробуйте описать, что делает класс, одним предложением. Например: “Класс </a:t>
-            </a:r>
-            <a:r>
-              <a:rPr lang="ru-RU" dirty="0" err="1"/>
-              <a:t>Bitmap</a:t>
-            </a:r>
-            <a:r>
-              <a:rPr lang="ru-RU" dirty="0"/>
-              <a:t> хранит пиксели изображения”. Это просто и понятно — ответственность одна.</a:t>
-            </a:r>
-          </a:p>
-          <a:p>
-            <a:br>
-              <a:rPr lang="ru-RU" dirty="0"/>
-            </a:br>
-            <a:r>
-              <a:rPr lang="ru-RU" dirty="0"/>
-              <a:t>А если у вас получается что-то вроде: “Класс </a:t>
-            </a:r>
-            <a:r>
-              <a:rPr lang="ru-RU" dirty="0" err="1"/>
-              <a:t>Bitmap</a:t>
-            </a:r>
-            <a:r>
-              <a:rPr lang="ru-RU" dirty="0"/>
-              <a:t> хранит пиксели, умеет сохранять их в файл и умеет рисовать линии” — вы уже чувствуете, что это три ответственности. И у каждой своя причина для изменений.</a:t>
-            </a:r>
-          </a:p>
-          <a:p>
-            <a:r>
-              <a:rPr lang="ru-RU" dirty="0"/>
-              <a:t>Именно поэтому SRP — основа для модульности, </a:t>
-            </a:r>
-            <a:r>
-              <a:rPr lang="ru-RU" dirty="0" err="1"/>
-              <a:t>переиспользуемости</a:t>
-            </a:r>
-            <a:r>
-              <a:rPr lang="ru-RU" dirty="0"/>
-              <a:t> и тестируемости. Если у класса одна ответственность, тестировать его проще, расширять проще и понимать проще.</a:t>
-            </a:r>
-          </a:p>
-          <a:p>
-            <a:endParaRPr lang="ru-RU" i="1" dirty="0"/>
+            <a:endParaRPr lang="en-US"/>
           </a:p>
         </p:txBody>
       </p:sp>
       <p:sp>
         <p:nvSpPr>
-          <p:cNvPr id="4" name="Номер слайда 3"/>
+          <p:cNvPr id="4" name="Slide Number Placeholder 3"/>
           <p:cNvSpPr>
             <a:spLocks noGrp="1"/>
           </p:cNvSpPr>
           <p:nvPr>
-            <p:ph type="sldNum" sz="quarter" idx="10"/>
+            <p:ph type="sldNum" sz="quarter" idx="5"/>
           </p:nvPr>
         </p:nvSpPr>
         <p:spPr/>
@@ -4119,9 +3591,9 @@
           <a:bodyPr/>
           <a:lstStyle/>
           <a:p>
-            <a:fld id="{A0B28B7E-B000-4596-AC62-77FFB0327B90}" type="slidenum">
+            <a:fld id="{9BF0A773-BC3A-474D-8036-883A816F0F99}" type="slidenum">
               <a:rPr lang="ru-RU" smtClean="0"/>
-              <a:t>4</a:t>
+              <a:t>3</a:t>
             </a:fld>
             <a:endParaRPr lang="ru-RU"/>
           </a:p>
@@ -4130,7 +3602,7 @@
     </p:spTree>
     <p:extLst>
       <p:ext uri="{BB962C8B-B14F-4D97-AF65-F5344CB8AC3E}">
-        <p14:creationId xmlns:p14="http://schemas.microsoft.com/office/powerpoint/2010/main" val="432884594"/>
+        <p14:creationId xmlns:p14="http://schemas.microsoft.com/office/powerpoint/2010/main" val="4148365690"/>
       </p:ext>
     </p:extLst>
   </p:cSld>
@@ -4186,15 +3658,7 @@
           <a:p>
             <a:r>
               <a:rPr lang="ru-RU" dirty="0"/>
-              <a:t>Принцип инверсии зависимостей — один из самых архитектурно важных принципов SOLID. Он говорит, что </a:t>
-            </a:r>
-            <a:r>
-              <a:rPr lang="ru-RU" dirty="0" err="1"/>
-              <a:t>верхнеуровневый</a:t>
-            </a:r>
-            <a:r>
-              <a:rPr lang="ru-RU" dirty="0"/>
-              <a:t> код, который реализует бизнес-правила, не должен зависеть от деталей реализации — таких как базы данных, UI, сетевые библиотеки, файловая система.</a:t>
+              <a:t>Принцип разделения интерфейса — это принцип о том, что интерфейсы должны быть ровно настолько широкими, насколько это нужно клиенту. Формулируется он просто: клиенты не должны зависеть от методов, которые они не используют.</a:t>
             </a:r>
           </a:p>
           <a:p>
@@ -4203,23 +3667,7 @@
           <a:p>
             <a:r>
               <a:rPr lang="ru-RU" dirty="0"/>
-              <a:t>Почему? Потому что именно детали меняются чаще всего. Сегодня мы сохраняем данные в </a:t>
-            </a:r>
-            <a:r>
-              <a:rPr lang="ru-RU" dirty="0" err="1"/>
-              <a:t>SQLite</a:t>
-            </a:r>
-            <a:r>
-              <a:rPr lang="ru-RU" dirty="0"/>
-              <a:t>, завтра — в </a:t>
-            </a:r>
-            <a:r>
-              <a:rPr lang="ru-RU" dirty="0" err="1"/>
-              <a:t>PostgreSQL</a:t>
-            </a:r>
-            <a:r>
-              <a:rPr lang="ru-RU" dirty="0"/>
-              <a:t>, а послезавтра — в облако. Если бизнес-логика напрямую зависит от конкретной библиотеки или API, любое изменение инфраструктуры заставит нас переписывать верхний уровень системы. Это делает архитектуру хрупкой.</a:t>
+              <a:t>Почему это важно? Представьте интерфейс, который включает десять методов, а конкретный клиент использует только один или два. Оставшиеся восемь методов становятся для него лишними зависимостями. Если в интерфейс добавят новый метод, изменят сигнатуру старого или изменится контракт — клиенту, который никогда этот метод не вызывал, всё равно придётся реагировать на изменения. Это создаёт ненужную связанность и заставляет переносить изменения туда, где они не имеют никакого смысла.</a:t>
             </a:r>
           </a:p>
           <a:p>
@@ -4228,58 +3676,15 @@
           <a:p>
             <a:r>
               <a:rPr lang="ru-RU" dirty="0"/>
-              <a:t>DIP предлагает решение: </a:t>
+              <a:t>Поэтому ISP говорит: интерфейс должен описывать </a:t>
             </a:r>
             <a:r>
               <a:rPr lang="ru-RU" b="1" dirty="0"/>
-              <a:t>пусть высокоуровневый код зависит от абстракций</a:t>
-            </a:r>
-            <a:r>
-              <a:rPr lang="ru-RU" dirty="0"/>
-              <a:t> — интерфейсов, определяющих нужное поведение. А уже конкретные реализации этих интерфейсов подключаются извне — через внедрение зависимостей, фабрики, конфигурацию приложения.</a:t>
-            </a:r>
-          </a:p>
-          <a:p>
-            <a:endParaRPr lang="ru-RU" dirty="0"/>
-          </a:p>
-          <a:p>
-            <a:r>
-              <a:rPr lang="ru-RU" dirty="0"/>
-              <a:t>В такой архитектуре бизнес-логика становится стабильной: она не знает, из какой базы приходят данные, какой именно UI их показывает, или в какой формат сохраняется файл. Она работает только с абстракциями.</a:t>
-            </a:r>
-          </a:p>
-          <a:p>
-            <a:endParaRPr lang="ru-RU" dirty="0"/>
-          </a:p>
-          <a:p>
-            <a:r>
-              <a:rPr lang="ru-RU" dirty="0"/>
-              <a:t>Это сильно упрощает тестирование — мы можем подставлять фейковые или мок-реализации. Это упрощает сопровождение — меняется инфраструктура, а верхний уровень не трогаем. И это упрощает расширяемость — можно писать новые реализации интерфейсов, не меняя существующий код.</a:t>
-            </a:r>
-          </a:p>
-          <a:p>
-            <a:endParaRPr lang="ru-RU" dirty="0"/>
-          </a:p>
-          <a:p>
-            <a:r>
-              <a:rPr lang="ru-RU" dirty="0"/>
-              <a:t>Таким образом, принцип инверсии зависимостей делает архитектуру гибкой, устойчивой и удобной для долгосрочного развития. Он лежит в основе большинства современных архитектурных подходов — от </a:t>
-            </a:r>
-            <a:r>
-              <a:rPr lang="ru-RU" dirty="0" err="1"/>
-              <a:t>Clean</a:t>
-            </a:r>
-            <a:r>
-              <a:rPr lang="ru-RU" dirty="0"/>
-              <a:t> Architecture до </a:t>
-            </a:r>
-            <a:r>
-              <a:rPr lang="ru-RU" dirty="0" err="1"/>
-              <a:t>Hexagonal</a:t>
-            </a:r>
-            <a:r>
-              <a:rPr lang="ru-RU" dirty="0"/>
-              <a:t> Architecture.</a:t>
+              <a:t>роль</a:t>
+            </a:r>
+            <a:r>
+              <a:rPr lang="ru-RU" dirty="0"/>
+              <a:t>, которую компонент выполняет для клиента, а не всё, что он в принципе умеет делать. Если разные клиенты используют разные наборы операций — значит, и интерфейсы должны быть разными.</a:t>
             </a:r>
           </a:p>
           <a:p>
@@ -4300,7 +3705,7 @@
               <a:tabLst/>
               <a:defRPr/>
             </a:pPr>
-            <a:endParaRPr lang="ru-RU" dirty="0"/>
+            <a:endParaRPr lang="en-US" dirty="0"/>
           </a:p>
         </p:txBody>
       </p:sp>
@@ -4321,7 +3726,7 @@
           <a:p>
             <a:fld id="{9BF0A773-BC3A-474D-8036-883A816F0F99}" type="slidenum">
               <a:rPr lang="ru-RU" smtClean="0"/>
-              <a:t>37</a:t>
+              <a:t>30</a:t>
             </a:fld>
             <a:endParaRPr lang="ru-RU"/>
           </a:p>
@@ -4330,7 +3735,7 @@
     </p:spTree>
     <p:extLst>
       <p:ext uri="{BB962C8B-B14F-4D97-AF65-F5344CB8AC3E}">
-        <p14:creationId xmlns:p14="http://schemas.microsoft.com/office/powerpoint/2010/main" val="3210621328"/>
+        <p14:creationId xmlns:p14="http://schemas.microsoft.com/office/powerpoint/2010/main" val="2196027662"/>
       </p:ext>
     </p:extLst>
   </p:cSld>
@@ -4386,7 +3791,13 @@
           <a:p>
             <a:r>
               <a:rPr lang="ru-RU" dirty="0"/>
-              <a:t>Когда мы говорим о принципе инверсии зависимостей, важно понять ещё одну ключевую идею — идею стабильных абстракций.</a:t>
+              <a:t>На практике это означает несколько вещей.</a:t>
+            </a:r>
+          </a:p>
+          <a:p>
+            <a:r>
+              <a:rPr lang="ru-RU" dirty="0"/>
+              <a:t>Во-первых, не нужно тупо копировать все методы класса в интерфейс. Интерфейс — это не “обёртка вокруг класса”, это контракт для конкретного сценария использования.</a:t>
             </a:r>
           </a:p>
           <a:p>
@@ -4395,7 +3806,7 @@
           <a:p>
             <a:r>
               <a:rPr lang="ru-RU" dirty="0"/>
-              <a:t>В любой системе есть части, которые меняются часто, и части, которые должны оставаться стабильными. Обычно бизнес-правила, доменная модель, взаимодействие между компонентами — это то, что мы хотим защитить от частых изменений. А вот инфраструктура — файлы, базы данных, сетевые протоколы, UI, библиотеки — меняются куда чаще.</a:t>
+              <a:t>Во-вторых, если у вас есть клиенты, которым нужны разные части функциональности, — интерфейс нужно разделять. Пусть каждый клиент получает ровно ту часть, которая ему действительно нужна. Это снижает связанность и делает код более гибким.</a:t>
             </a:r>
           </a:p>
           <a:p>
@@ -4404,7 +3815,7 @@
           <a:p>
             <a:r>
               <a:rPr lang="ru-RU" dirty="0"/>
-              <a:t>DIP говорит: пусть нестабильные части зависят от стабильных. То есть не бизнес-логика должна зависеть от конкретного драйвера базы данных, а наоборот — драйвер должен адаптироваться к абстрактному интерфейсу, который определяет бизнес-логика.</a:t>
+              <a:t>И, наконец, если исходный класс принадлежит библиотеке или изменить его невозможно, мы всё равно можем применить ISP — с помощью адаптера, который предоставляет узкий интерфейс и закрывает лишнюю функциональность.</a:t>
             </a:r>
           </a:p>
           <a:p>
@@ -4413,35 +3824,11 @@
           <a:p>
             <a:r>
               <a:rPr lang="ru-RU" dirty="0"/>
-              <a:t>Абстракции — интерфейсы, контракты, порты — должны быть максимально стабильными. Мы продумываем их так, чтобы они отражали бизнес-требования, а не ограничения инфраструктуры. При этом реализации, которые адаптируются под конкретные технологии, могут меняться сколько угодно — это никак не повлияет на верхние уровни системы.</a:t>
-            </a:r>
-          </a:p>
-          <a:p>
-            <a:endParaRPr lang="ru-RU" dirty="0"/>
-          </a:p>
-          <a:p>
-            <a:r>
-              <a:rPr lang="ru-RU" dirty="0"/>
-              <a:t>Именно поэтому мы не наследуем изменчивые конкретные классы и не переопределяем их методы. В этом случае мы жёстко привязываемся к детали реализации, которая завтра может измениться. Вместо этого мы наследуемся от абстракций или работаем через интерфейсы.</a:t>
-            </a:r>
-          </a:p>
-          <a:p>
-            <a:endParaRPr lang="ru-RU" dirty="0"/>
-          </a:p>
-          <a:p>
-            <a:r>
-              <a:rPr lang="ru-RU" dirty="0"/>
-              <a:t>Создание объектов также должно быть вынесено в фабрики, в композиционный корень или в DI-контейнер. Это позволяет высокоуровневому коду вообще не знать, какой конкретный класс используется — он видит только абстракцию.</a:t>
-            </a:r>
-          </a:p>
-          <a:p>
-            <a:endParaRPr lang="ru-RU" dirty="0"/>
-          </a:p>
-          <a:p>
-            <a:r>
-              <a:rPr lang="ru-RU" dirty="0"/>
-              <a:t>В итоге мы получаем архитектуру, в которой изменения изолированы. Инфраструктуру можно менять без страха сломать бизнес-логику, а сама система становится намного более предсказуемой и устойчивой к эволюции</a:t>
-            </a:r>
+              <a:t>В результате мы получаем систему, где изменения локализованы, клиенты зависимы только от того, что действительно используют, и нет лишних “цепных реакций” при обновлении интерфейсов. Это делает архитектуру гораздо более устойчивой и аккуратной.</a:t>
+            </a:r>
+          </a:p>
+          <a:p>
+            <a:endParaRPr lang="en-US" dirty="0"/>
           </a:p>
         </p:txBody>
       </p:sp>
@@ -4462,7 +3849,7 @@
           <a:p>
             <a:fld id="{9BF0A773-BC3A-474D-8036-883A816F0F99}" type="slidenum">
               <a:rPr lang="ru-RU" smtClean="0"/>
-              <a:t>38</a:t>
+              <a:t>31</a:t>
             </a:fld>
             <a:endParaRPr lang="ru-RU"/>
           </a:p>
@@ -4471,7 +3858,7 @@
     </p:spTree>
     <p:extLst>
       <p:ext uri="{BB962C8B-B14F-4D97-AF65-F5344CB8AC3E}">
-        <p14:creationId xmlns:p14="http://schemas.microsoft.com/office/powerpoint/2010/main" val="32192336"/>
+        <p14:creationId xmlns:p14="http://schemas.microsoft.com/office/powerpoint/2010/main" val="1470816610"/>
       </p:ext>
     </p:extLst>
   </p:cSld>
@@ -4526,33 +3913,19 @@
           <a:lstStyle/>
           <a:p>
             <a:r>
-              <a:rPr lang="ru-RU" dirty="0"/>
-              <a:t>Представим, что в системе есть </a:t>
-            </a:r>
-            <a:r>
-              <a:rPr lang="ru-RU" dirty="0" err="1"/>
-              <a:t>use</a:t>
-            </a:r>
-            <a:r>
-              <a:rPr lang="ru-RU" dirty="0"/>
-              <a:t> </a:t>
-            </a:r>
-            <a:r>
-              <a:rPr lang="ru-RU" dirty="0" err="1"/>
-              <a:t>case</a:t>
-            </a:r>
-            <a:r>
-              <a:rPr lang="ru-RU" dirty="0"/>
-              <a:t> для добавления пользователя:</a:t>
-            </a:r>
-          </a:p>
-          <a:p>
-            <a:r>
               <a:rPr lang="ru-RU" b="1" dirty="0"/>
-              <a:t>Что здесь плохо:</a:t>
-            </a:r>
-          </a:p>
-          <a:p>
+              <a:t>В чём проблемы:</a:t>
+            </a:r>
+          </a:p>
+          <a:p>
+            <a:r>
+              <a:rPr lang="ru-RU" b="1" dirty="0"/>
+              <a:t>Нарушен ISP</a:t>
+            </a:r>
+            <a:r>
+              <a:rPr lang="ru-RU" dirty="0"/>
+              <a:t>: клиент </a:t>
+            </a:r>
             <a:r>
               <a:rPr lang="ru-RU" sz="1200" kern="1200" dirty="0" err="1">
                 <a:solidFill>
@@ -4562,19 +3935,11 @@
                 <a:ea typeface="+mn-ea"/>
                 <a:cs typeface="+mn-cs"/>
               </a:rPr>
-              <a:t>AddUserUseCase</a:t>
-            </a:r>
-            <a:r>
-              <a:rPr lang="ru-RU" dirty="0"/>
-              <a:t> </a:t>
-            </a:r>
-            <a:r>
-              <a:rPr lang="ru-RU" b="1" dirty="0"/>
-              <a:t>жёстко зависит от конкретного класса</a:t>
-            </a:r>
-            <a:r>
-              <a:rPr lang="ru-RU" dirty="0"/>
-              <a:t> </a:t>
+              <a:t>PrintReport</a:t>
+            </a:r>
+            <a:r>
+              <a:rPr lang="ru-RU" dirty="0"/>
+              <a:t> зависит от интерфейса, в котором есть </a:t>
             </a:r>
             <a:r>
               <a:rPr lang="ru-RU" sz="1200" kern="1200" dirty="0" err="1">
@@ -4585,67 +3950,14 @@
                 <a:ea typeface="+mn-ea"/>
                 <a:cs typeface="+mn-cs"/>
               </a:rPr>
-              <a:t>SqlUserRepository</a:t>
-            </a:r>
-            <a:r>
-              <a:rPr lang="ru-RU" dirty="0"/>
-              <a:t>.</a:t>
-            </a:r>
-            <a:br>
-              <a:rPr lang="ru-RU" dirty="0"/>
-            </a:br>
-            <a:r>
-              <a:rPr lang="ru-RU" dirty="0"/>
-              <a:t>Если мы решим перейти с SQL на </a:t>
-            </a:r>
-            <a:r>
-              <a:rPr lang="ru-RU" dirty="0" err="1"/>
-              <a:t>MongoDB</a:t>
-            </a:r>
-            <a:r>
-              <a:rPr lang="ru-RU" dirty="0"/>
-              <a:t>, файл, сервис, REST-API или </a:t>
-            </a:r>
-            <a:r>
-              <a:rPr lang="ru-RU" dirty="0" err="1"/>
-              <a:t>in-memory</a:t>
-            </a:r>
-            <a:r>
-              <a:rPr lang="ru-RU" dirty="0"/>
-              <a:t> </a:t>
-            </a:r>
-            <a:r>
-              <a:rPr lang="ru-RU" dirty="0" err="1"/>
-              <a:t>storage</a:t>
-            </a:r>
-            <a:r>
-              <a:rPr lang="ru-RU" dirty="0"/>
-              <a:t> — придётся менять код </a:t>
-            </a:r>
-            <a:r>
-              <a:rPr lang="ru-RU" dirty="0" err="1"/>
-              <a:t>use</a:t>
-            </a:r>
-            <a:r>
-              <a:rPr lang="ru-RU" dirty="0"/>
-              <a:t> </a:t>
-            </a:r>
-            <a:r>
-              <a:rPr lang="ru-RU" dirty="0" err="1"/>
-              <a:t>case</a:t>
-            </a:r>
-            <a:r>
-              <a:rPr lang="ru-RU" dirty="0"/>
-              <a:t>.</a:t>
-            </a:r>
-          </a:p>
-          <a:p>
-            <a:r>
-              <a:rPr lang="ru-RU" dirty="0"/>
-              <a:t>Репозиторий требует </a:t>
-            </a:r>
-            <a:r>
-              <a:rPr lang="ru-RU" sz="1200" kern="1200" dirty="0">
+              <a:t>Scan</a:t>
+            </a:r>
+            <a:r>
+              <a:rPr lang="ru-RU" dirty="0"/>
+              <a:t> и </a:t>
+            </a:r>
+            <a:r>
+              <a:rPr lang="ru-RU" sz="1200" kern="1200" dirty="0" err="1">
                 <a:solidFill>
                   <a:schemeClr val="tx1"/>
                 </a:solidFill>
@@ -4653,73 +3965,124 @@
                 <a:ea typeface="+mn-ea"/>
                 <a:cs typeface="+mn-cs"/>
               </a:rPr>
-              <a:t>Connect()</a:t>
-            </a:r>
-            <a:r>
-              <a:rPr lang="ru-RU" dirty="0"/>
-              <a:t>, а </a:t>
+              <a:t>Fax</a:t>
+            </a:r>
+            <a:r>
+              <a:rPr lang="ru-RU" dirty="0"/>
+              <a:t>, хотя он их никогда не использует.</a:t>
+            </a:r>
+          </a:p>
+          <a:p>
+            <a:r>
+              <a:rPr lang="ru-RU" b="1" dirty="0"/>
+              <a:t>Ложные обязанности</a:t>
+            </a:r>
+            <a:r>
+              <a:rPr lang="ru-RU" dirty="0"/>
+              <a:t>: </a:t>
+            </a:r>
+            <a:r>
+              <a:rPr lang="ru-RU" sz="1200" kern="1200" dirty="0" err="1">
+                <a:solidFill>
+                  <a:schemeClr val="tx1"/>
+                </a:solidFill>
+                <a:latin typeface="+mn-lt"/>
+                <a:ea typeface="+mn-ea"/>
+                <a:cs typeface="+mn-cs"/>
+              </a:rPr>
+              <a:t>SimplePrinter</a:t>
+            </a:r>
+            <a:r>
+              <a:rPr lang="ru-RU" dirty="0"/>
+              <a:t> вынужден «поддерживать» методы, которых у него по сути нет (пустые реализации, исключения и т.п.).</a:t>
+            </a:r>
+          </a:p>
+          <a:p>
+            <a:r>
+              <a:rPr lang="ru-RU" b="1" dirty="0"/>
+              <a:t>Хрупкость</a:t>
+            </a:r>
+            <a:r>
+              <a:rPr lang="ru-RU" dirty="0"/>
+              <a:t>: если мы изменим сигнатуру </a:t>
+            </a:r>
+            <a:r>
+              <a:rPr lang="ru-RU" sz="1200" kern="1200" dirty="0" err="1">
+                <a:solidFill>
+                  <a:schemeClr val="tx1"/>
+                </a:solidFill>
+                <a:latin typeface="+mn-lt"/>
+                <a:ea typeface="+mn-ea"/>
+                <a:cs typeface="+mn-cs"/>
+              </a:rPr>
+              <a:t>Scan</a:t>
+            </a:r>
+            <a:r>
+              <a:rPr lang="ru-RU" dirty="0"/>
+              <a:t> или добавим новый метод в интерфейс, придётся править все реализации, даже те, которые ничего не сканируют и не </a:t>
             </a:r>
             <a:r>
               <a:rPr lang="ru-RU" dirty="0" err="1"/>
-              <a:t>use</a:t>
-            </a:r>
-            <a:r>
-              <a:rPr lang="ru-RU" dirty="0"/>
-              <a:t> </a:t>
-            </a:r>
-            <a:r>
-              <a:rPr lang="ru-RU" dirty="0" err="1"/>
-              <a:t>case</a:t>
-            </a:r>
-            <a:r>
-              <a:rPr lang="ru-RU" dirty="0"/>
-              <a:t> вынужден знать, </a:t>
-            </a:r>
+              <a:t>факсят</a:t>
+            </a:r>
+            <a:r>
+              <a:rPr lang="ru-RU" dirty="0"/>
+              <a:t>.</a:t>
+            </a:r>
+          </a:p>
+          <a:p>
             <a:r>
               <a:rPr lang="ru-RU" b="1" dirty="0"/>
-              <a:t>как конкретно работает SQL-библиотека</a:t>
-            </a:r>
-            <a:r>
-              <a:rPr lang="ru-RU" dirty="0"/>
-              <a:t>.</a:t>
-            </a:r>
-          </a:p>
-          <a:p>
-            <a:r>
-              <a:rPr lang="ru-RU" dirty="0"/>
-              <a:t>Код почти невозможно протестировать без реальной БД → низкая тестируемость.</a:t>
-            </a:r>
-          </a:p>
-          <a:p>
-            <a:r>
-              <a:rPr lang="ru-RU" dirty="0" err="1"/>
-              <a:t>Верхнеуровневая</a:t>
-            </a:r>
-            <a:r>
-              <a:rPr lang="ru-RU" dirty="0"/>
-              <a:t> бизнес-логика становится </a:t>
-            </a:r>
-            <a:r>
-              <a:rPr lang="ru-RU" b="1" dirty="0"/>
-              <a:t>хрупкой</a:t>
-            </a:r>
-            <a:r>
-              <a:rPr lang="ru-RU" dirty="0"/>
-              <a:t>, поскольку зависит от нестабильной инфраструктуры.</a:t>
-            </a:r>
-          </a:p>
-          <a:p>
-            <a:r>
-              <a:rPr lang="ru-RU" dirty="0"/>
-              <a:t>Это прямое нарушение принципа: </a:t>
-            </a:r>
-            <a:r>
-              <a:rPr lang="ru-RU" b="1" dirty="0"/>
-              <a:t>нестабильная инфраструктура не должна влиять на стабильные абстракции и бизнес-логику</a:t>
-            </a:r>
-            <a:r>
-              <a:rPr lang="ru-RU" dirty="0"/>
-              <a:t>.</a:t>
+              <a:t>Тестируемость</a:t>
+            </a:r>
+            <a:r>
+              <a:rPr lang="ru-RU" dirty="0"/>
+              <a:t>: тесты на </a:t>
+            </a:r>
+            <a:r>
+              <a:rPr lang="ru-RU" sz="1200" kern="1200" dirty="0" err="1">
+                <a:solidFill>
+                  <a:schemeClr val="tx1"/>
+                </a:solidFill>
+                <a:latin typeface="+mn-lt"/>
+                <a:ea typeface="+mn-ea"/>
+                <a:cs typeface="+mn-cs"/>
+              </a:rPr>
+              <a:t>SimplePrinter</a:t>
+            </a:r>
+            <a:r>
+              <a:rPr lang="ru-RU" dirty="0"/>
+              <a:t> формально должны проверять ещё и то, что </a:t>
+            </a:r>
+            <a:r>
+              <a:rPr lang="ru-RU" sz="1200" kern="1200" dirty="0" err="1">
+                <a:solidFill>
+                  <a:schemeClr val="tx1"/>
+                </a:solidFill>
+                <a:latin typeface="+mn-lt"/>
+                <a:ea typeface="+mn-ea"/>
+                <a:cs typeface="+mn-cs"/>
+              </a:rPr>
+              <a:t>Scan</a:t>
+            </a:r>
+            <a:r>
+              <a:rPr lang="ru-RU" dirty="0"/>
+              <a:t> и </a:t>
+            </a:r>
+            <a:r>
+              <a:rPr lang="ru-RU" sz="1200" kern="1200" dirty="0" err="1">
+                <a:solidFill>
+                  <a:schemeClr val="tx1"/>
+                </a:solidFill>
+                <a:latin typeface="+mn-lt"/>
+                <a:ea typeface="+mn-ea"/>
+                <a:cs typeface="+mn-cs"/>
+              </a:rPr>
+              <a:t>Fax</a:t>
+            </a:r>
+            <a:r>
+              <a:rPr lang="ru-RU" dirty="0"/>
+              <a:t> не работают — хотя бизнесу это вообще не нужно.</a:t>
             </a:r>
           </a:p>
           <a:p>
@@ -4744,7 +4107,7 @@
           <a:p>
             <a:fld id="{9BF0A773-BC3A-474D-8036-883A816F0F99}" type="slidenum">
               <a:rPr lang="ru-RU" smtClean="0"/>
-              <a:t>39</a:t>
+              <a:t>32</a:t>
             </a:fld>
             <a:endParaRPr lang="ru-RU"/>
           </a:p>
@@ -4753,7 +4116,7 @@
     </p:spTree>
     <p:extLst>
       <p:ext uri="{BB962C8B-B14F-4D97-AF65-F5344CB8AC3E}">
-        <p14:creationId xmlns:p14="http://schemas.microsoft.com/office/powerpoint/2010/main" val="4179902188"/>
+        <p14:creationId xmlns:p14="http://schemas.microsoft.com/office/powerpoint/2010/main" val="1816164123"/>
       </p:ext>
     </p:extLst>
   </p:cSld>
@@ -4808,35 +4171,13 @@
           <a:lstStyle/>
           <a:p>
             <a:r>
-              <a:rPr lang="ru-RU" b="0" dirty="0"/>
-              <a:t>Почему это соблюдение принципа «Стабильные абстракции»</a:t>
-            </a:r>
-          </a:p>
-          <a:p>
-            <a:r>
-              <a:rPr lang="ru-RU" b="0" dirty="0"/>
-              <a:t>В новой версии:</a:t>
-            </a:r>
-          </a:p>
-          <a:p>
-            <a:r>
-              <a:rPr lang="ru-RU" b="0" dirty="0" err="1"/>
-              <a:t>Use</a:t>
-            </a:r>
-            <a:r>
-              <a:rPr lang="ru-RU" b="0" dirty="0"/>
-              <a:t> </a:t>
-            </a:r>
-            <a:r>
-              <a:rPr lang="ru-RU" b="0" dirty="0" err="1"/>
-              <a:t>case</a:t>
-            </a:r>
-            <a:r>
-              <a:rPr lang="ru-RU" b="0" dirty="0"/>
-              <a:t> зависит от стабильной абстракции </a:t>
-            </a:r>
-            <a:r>
-              <a:rPr lang="ru-RU" sz="1200" b="0" kern="1200" dirty="0" err="1">
+              <a:rPr lang="ru-RU" b="1" dirty="0"/>
+              <a:t>Что изменилось:</a:t>
+            </a:r>
+          </a:p>
+          <a:p>
+            <a:r>
+              <a:rPr lang="ru-RU" sz="1200" kern="1200" dirty="0" err="1">
                 <a:solidFill>
                   <a:schemeClr val="tx1"/>
                 </a:solidFill>
@@ -4844,20 +4185,22 @@
                 <a:ea typeface="+mn-ea"/>
                 <a:cs typeface="+mn-cs"/>
               </a:rPr>
-              <a:t>IUserRepository</a:t>
-            </a:r>
-            <a:r>
-              <a:rPr lang="ru-RU" b="0" dirty="0"/>
-              <a:t>.</a:t>
-            </a:r>
-          </a:p>
-          <a:p>
-            <a:r>
-              <a:rPr lang="ru-RU" b="0" dirty="0"/>
-              <a:t>Реализация (</a:t>
-            </a:r>
-            <a:r>
-              <a:rPr lang="ru-RU" sz="1200" b="0" kern="1200" dirty="0" err="1">
+              <a:t>PrintReport</a:t>
+            </a:r>
+            <a:r>
+              <a:rPr lang="ru-RU" dirty="0"/>
+              <a:t> больше </a:t>
+            </a:r>
+            <a:r>
+              <a:rPr lang="ru-RU" b="1" dirty="0"/>
+              <a:t>не зависит</a:t>
+            </a:r>
+            <a:r>
+              <a:rPr lang="ru-RU" dirty="0"/>
+              <a:t> ни от </a:t>
+            </a:r>
+            <a:r>
+              <a:rPr lang="ru-RU" sz="1200" kern="1200" dirty="0" err="1">
                 <a:solidFill>
                   <a:schemeClr val="tx1"/>
                 </a:solidFill>
@@ -4865,119 +4208,143 @@
                 <a:ea typeface="+mn-ea"/>
                 <a:cs typeface="+mn-cs"/>
               </a:rPr>
-              <a:t>SqlUserRepository</a:t>
-            </a:r>
-            <a:r>
-              <a:rPr lang="ru-RU" b="0" dirty="0"/>
-              <a:t>) зависит от абстракции, а не наоборот.</a:t>
-            </a:r>
-          </a:p>
-          <a:p>
-            <a:r>
-              <a:rPr lang="ru-RU" b="0" dirty="0"/>
-              <a:t>Изменчивые детали (SQL, драйверы, формат хранения) изолированы.</a:t>
-            </a:r>
-          </a:p>
-          <a:p>
-            <a:endParaRPr lang="ru-RU" b="0" dirty="0"/>
-          </a:p>
-          <a:p>
-            <a:r>
-              <a:rPr lang="ru-RU" b="0" dirty="0"/>
-              <a:t>Бизнес-логика не знает:</a:t>
-            </a:r>
-          </a:p>
-          <a:p>
-            <a:pPr marL="171450" lvl="0" indent="-171450">
-              <a:buFont typeface="Arial" panose="020B0604020202020204" pitchFamily="34" charset="0"/>
-              <a:buChar char="•"/>
-            </a:pPr>
-            <a:r>
-              <a:rPr lang="ru-RU" b="0" dirty="0"/>
-              <a:t>какая база используется,</a:t>
-            </a:r>
-          </a:p>
-          <a:p>
-            <a:pPr marL="171450" lvl="0" indent="-171450">
-              <a:buFont typeface="Arial" panose="020B0604020202020204" pitchFamily="34" charset="0"/>
-              <a:buChar char="•"/>
-            </a:pPr>
-            <a:r>
-              <a:rPr lang="ru-RU" b="0" dirty="0"/>
-              <a:t>как происходит подключение,</a:t>
-            </a:r>
-          </a:p>
-          <a:p>
-            <a:pPr marL="171450" lvl="0" indent="-171450">
-              <a:buFont typeface="Arial" panose="020B0604020202020204" pitchFamily="34" charset="0"/>
-              <a:buChar char="•"/>
-            </a:pPr>
-            <a:r>
-              <a:rPr lang="ru-RU" b="0" dirty="0"/>
-              <a:t>в каком формате хранятся данные.</a:t>
-            </a:r>
-          </a:p>
-          <a:p>
-            <a:pPr marL="171450" lvl="0" indent="-171450">
-              <a:buFont typeface="Arial" panose="020B0604020202020204" pitchFamily="34" charset="0"/>
-              <a:buChar char="•"/>
-            </a:pPr>
-            <a:endParaRPr lang="ru-RU" b="0" dirty="0"/>
-          </a:p>
-          <a:p>
-            <a:r>
-              <a:rPr lang="ru-RU" b="0" dirty="0"/>
-              <a:t>И самое главное:</a:t>
-            </a:r>
-          </a:p>
-          <a:p>
-            <a:pPr marL="171450" indent="-171450">
-              <a:buFont typeface="Arial" panose="020B0604020202020204" pitchFamily="34" charset="0"/>
-              <a:buChar char="•"/>
-            </a:pPr>
-            <a:r>
-              <a:rPr lang="ru-RU" b="0" dirty="0"/>
-              <a:t>Добавление новой реализации не требует менять существующий код.</a:t>
-            </a:r>
-          </a:p>
-          <a:p>
-            <a:pPr marL="171450" indent="-171450">
-              <a:buFont typeface="Arial" panose="020B0604020202020204" pitchFamily="34" charset="0"/>
-              <a:buChar char="•"/>
-            </a:pPr>
-            <a:r>
-              <a:rPr lang="ru-RU" b="0" dirty="0"/>
-              <a:t>Бизнес-логика тестируется без инфраструктуры.</a:t>
-            </a:r>
-          </a:p>
-          <a:p>
-            <a:pPr marL="171450" indent="-171450">
-              <a:buFont typeface="Arial" panose="020B0604020202020204" pitchFamily="34" charset="0"/>
-              <a:buChar char="•"/>
-            </a:pPr>
-            <a:r>
-              <a:rPr lang="ru-RU" b="0" dirty="0"/>
-              <a:t>Инфраструктуры можно менять хоть каждый день — </a:t>
-            </a:r>
-            <a:r>
-              <a:rPr lang="ru-RU" b="0" dirty="0" err="1"/>
-              <a:t>use</a:t>
-            </a:r>
-            <a:r>
-              <a:rPr lang="ru-RU" b="0" dirty="0"/>
-              <a:t> </a:t>
-            </a:r>
-            <a:r>
-              <a:rPr lang="ru-RU" b="0" dirty="0" err="1"/>
-              <a:t>case</a:t>
-            </a:r>
-            <a:r>
-              <a:rPr lang="ru-RU" b="0" dirty="0"/>
-              <a:t> не заметит.</a:t>
-            </a:r>
-          </a:p>
-          <a:p>
-            <a:endParaRPr lang="en-US" b="0" dirty="0"/>
+              <a:t>Scan</a:t>
+            </a:r>
+            <a:r>
+              <a:rPr lang="ru-RU" dirty="0"/>
+              <a:t>, ни от </a:t>
+            </a:r>
+            <a:r>
+              <a:rPr lang="ru-RU" sz="1200" kern="1200" dirty="0" err="1">
+                <a:solidFill>
+                  <a:schemeClr val="tx1"/>
+                </a:solidFill>
+                <a:latin typeface="+mn-lt"/>
+                <a:ea typeface="+mn-ea"/>
+                <a:cs typeface="+mn-cs"/>
+              </a:rPr>
+              <a:t>Fax</a:t>
+            </a:r>
+            <a:r>
+              <a:rPr lang="ru-RU" dirty="0"/>
+              <a:t> — только от </a:t>
+            </a:r>
+            <a:r>
+              <a:rPr lang="ru-RU" sz="1200" kern="1200" dirty="0" err="1">
+                <a:solidFill>
+                  <a:schemeClr val="tx1"/>
+                </a:solidFill>
+                <a:latin typeface="+mn-lt"/>
+                <a:ea typeface="+mn-ea"/>
+                <a:cs typeface="+mn-cs"/>
+              </a:rPr>
+              <a:t>IPrinter</a:t>
+            </a:r>
+            <a:r>
+              <a:rPr lang="ru-RU" dirty="0"/>
+              <a:t>.</a:t>
+            </a:r>
+          </a:p>
+          <a:p>
+            <a:r>
+              <a:rPr lang="ru-RU" sz="1200" kern="1200" dirty="0" err="1">
+                <a:solidFill>
+                  <a:schemeClr val="tx1"/>
+                </a:solidFill>
+                <a:latin typeface="+mn-lt"/>
+                <a:ea typeface="+mn-ea"/>
+                <a:cs typeface="+mn-cs"/>
+              </a:rPr>
+              <a:t>SimplePrinter</a:t>
+            </a:r>
+            <a:r>
+              <a:rPr lang="ru-RU" dirty="0"/>
+              <a:t> реализует ровно одну роль — </a:t>
+            </a:r>
+            <a:r>
+              <a:rPr lang="ru-RU" b="1" dirty="0"/>
+              <a:t>печать</a:t>
+            </a:r>
+            <a:r>
+              <a:rPr lang="ru-RU" dirty="0"/>
+              <a:t>. Никаких «заглушек» и «не поддерживается».</a:t>
+            </a:r>
+          </a:p>
+          <a:p>
+            <a:r>
+              <a:rPr lang="ru-RU" dirty="0"/>
+              <a:t>Добавление нового метода, скажем, к </a:t>
+            </a:r>
+            <a:r>
+              <a:rPr lang="ru-RU" sz="1200" kern="1200" dirty="0" err="1">
+                <a:solidFill>
+                  <a:schemeClr val="tx1"/>
+                </a:solidFill>
+                <a:latin typeface="+mn-lt"/>
+                <a:ea typeface="+mn-ea"/>
+                <a:cs typeface="+mn-cs"/>
+              </a:rPr>
+              <a:t>IFax</a:t>
+            </a:r>
+            <a:r>
+              <a:rPr lang="ru-RU" dirty="0"/>
+              <a:t>, </a:t>
+            </a:r>
+            <a:r>
+              <a:rPr lang="ru-RU" b="1" dirty="0"/>
+              <a:t>не ломает код</a:t>
+            </a:r>
+            <a:r>
+              <a:rPr lang="ru-RU" dirty="0"/>
+              <a:t>, который работает только с </a:t>
+            </a:r>
+            <a:r>
+              <a:rPr lang="ru-RU" sz="1200" kern="1200" dirty="0" err="1">
+                <a:solidFill>
+                  <a:schemeClr val="tx1"/>
+                </a:solidFill>
+                <a:latin typeface="+mn-lt"/>
+                <a:ea typeface="+mn-ea"/>
+                <a:cs typeface="+mn-cs"/>
+              </a:rPr>
+              <a:t>IPrinter</a:t>
+            </a:r>
+            <a:r>
+              <a:rPr lang="ru-RU" dirty="0"/>
+              <a:t> или </a:t>
+            </a:r>
+            <a:r>
+              <a:rPr lang="ru-RU" sz="1200" kern="1200" dirty="0" err="1">
+                <a:solidFill>
+                  <a:schemeClr val="tx1"/>
+                </a:solidFill>
+                <a:latin typeface="+mn-lt"/>
+                <a:ea typeface="+mn-ea"/>
+                <a:cs typeface="+mn-cs"/>
+              </a:rPr>
+              <a:t>IScanner</a:t>
+            </a:r>
+            <a:r>
+              <a:rPr lang="ru-RU" dirty="0"/>
+              <a:t>.</a:t>
+            </a:r>
+          </a:p>
+          <a:p>
+            <a:r>
+              <a:rPr lang="ru-RU" dirty="0"/>
+              <a:t>Интерфейсы стали </a:t>
+            </a:r>
+            <a:r>
+              <a:rPr lang="ru-RU" b="1" dirty="0"/>
+              <a:t>меньше и специфичнее</a:t>
+            </a:r>
+            <a:r>
+              <a:rPr lang="ru-RU" dirty="0"/>
+              <a:t>, их проще реализовывать и тестировать.</a:t>
+            </a:r>
+          </a:p>
+          <a:p>
+            <a:endParaRPr lang="en-US" dirty="0"/>
           </a:p>
         </p:txBody>
       </p:sp>
@@ -4998,7 +4365,7 @@
           <a:p>
             <a:fld id="{9BF0A773-BC3A-474D-8036-883A816F0F99}" type="slidenum">
               <a:rPr lang="ru-RU" smtClean="0"/>
-              <a:t>40</a:t>
+              <a:t>33</a:t>
             </a:fld>
             <a:endParaRPr lang="ru-RU"/>
           </a:p>
@@ -5007,7 +4374,7 @@
     </p:spTree>
     <p:extLst>
       <p:ext uri="{BB962C8B-B14F-4D97-AF65-F5344CB8AC3E}">
-        <p14:creationId xmlns:p14="http://schemas.microsoft.com/office/powerpoint/2010/main" val="4064014292"/>
+        <p14:creationId xmlns:p14="http://schemas.microsoft.com/office/powerpoint/2010/main" val="3676822209"/>
       </p:ext>
     </p:extLst>
   </p:cSld>
@@ -5063,7 +4430,7 @@
           <a:p>
             <a:r>
               <a:rPr lang="ru-RU" dirty="0"/>
-              <a:t>Принцип инверсии зависимостей — один из тех принципов, которые действительно меняют архитектуру системы. Давайте посмотрим на его достоинства и трудности.</a:t>
+              <a:t>Подведём итог принципу разделения интерфейса.</a:t>
             </a:r>
           </a:p>
           <a:p>
@@ -5072,7 +4439,7 @@
           <a:p>
             <a:r>
               <a:rPr lang="ru-RU" dirty="0"/>
-              <a:t>Главное достоинство DIP — он делает систему значительно менее хрупкой. Бизнес-логика перестаёт зависеть от инфраструктуры: от конкретной базы данных, пользовательского интерфейса, библиотеки логирования или сетевого протокола. Эти вещи меняются чаще всего, и DIP позволяет защитить верхний уровень от их нестабильности.</a:t>
+              <a:t>Его главное достоинство — снижение связности. Клиенты больше не зависят от методов, которые им не нужны. Это означает, что если в интерфейсе изменился какой-то метод, то клиенты, которые его не используют, вообще не почувствуют изменения. И это серьёзно уменьшает количество каскадных правок по коду.</a:t>
             </a:r>
           </a:p>
           <a:p>
@@ -5081,31 +4448,7 @@
           <a:p>
             <a:r>
               <a:rPr lang="ru-RU" dirty="0"/>
-              <a:t>Второе важное преимущество — тестируемость. Когда верхний уровень зависит от абстракций, мы можем подменять реализации простыми </a:t>
-            </a:r>
-            <a:r>
-              <a:rPr lang="ru-RU" dirty="0" err="1"/>
-              <a:t>mock</a:t>
-            </a:r>
-            <a:r>
-              <a:rPr lang="ru-RU" dirty="0"/>
-              <a:t>- или </a:t>
-            </a:r>
-            <a:r>
-              <a:rPr lang="ru-RU" dirty="0" err="1"/>
-              <a:t>fake</a:t>
-            </a:r>
-            <a:r>
-              <a:rPr lang="ru-RU" dirty="0"/>
-              <a:t>-объектами. Так мы можем тестировать бизнес-логику изолированно, без настройки окружения, </a:t>
-            </a:r>
-            <a:r>
-              <a:rPr lang="ru-RU" dirty="0" err="1"/>
-              <a:t>мокая</a:t>
-            </a:r>
-            <a:r>
-              <a:rPr lang="ru-RU" dirty="0"/>
-              <a:t> базу, сеть или файловую систему.</a:t>
+              <a:t>Второе преимущество — упрощение реализации. Когда интерфейсы узкие и специализированные, реализовать их намного проще. Не нужно создавать заглушки для методов, которыми устройство или компонент в принципе не обладает. Каждая реализация содержит ровно те методы, которые ей нужны.</a:t>
             </a:r>
           </a:p>
           <a:p>
@@ -5114,15 +4457,7 @@
           <a:p>
             <a:r>
               <a:rPr lang="ru-RU" dirty="0"/>
-              <a:t>Третье — лёгкость замены технологий. Если завтра у нас вместо SQL появится </a:t>
-            </a:r>
-            <a:r>
-              <a:rPr lang="ru-RU" dirty="0" err="1"/>
-              <a:t>NoSQL</a:t>
-            </a:r>
-            <a:r>
-              <a:rPr lang="ru-RU" dirty="0"/>
-              <a:t>, или мы захотим отправлять данные не в файл, а в облако — мы просто реализуем новый адаптер. Верхний уровень при этом вообще не трогаем. Это огромный выигрыш в долгосрочных проектах.</a:t>
+              <a:t>Третье — повышенная гибкость архитектуры. Наличие небольших интерфейсов позволяет свободнее комбинировать компоненты в разных сценариях, подменять реализации на тестовые, изолировать части системы.</a:t>
             </a:r>
           </a:p>
           <a:p>
@@ -5147,7 +4482,7 @@
           <a:p>
             <a:fld id="{9BF0A773-BC3A-474D-8036-883A816F0F99}" type="slidenum">
               <a:rPr lang="ru-RU" smtClean="0"/>
-              <a:t>41</a:t>
+              <a:t>34</a:t>
             </a:fld>
             <a:endParaRPr lang="ru-RU"/>
           </a:p>
@@ -5156,7 +4491,7 @@
     </p:spTree>
     <p:extLst>
       <p:ext uri="{BB962C8B-B14F-4D97-AF65-F5344CB8AC3E}">
-        <p14:creationId xmlns:p14="http://schemas.microsoft.com/office/powerpoint/2010/main" val="865206711"/>
+        <p14:creationId xmlns:p14="http://schemas.microsoft.com/office/powerpoint/2010/main" val="215340114"/>
       </p:ext>
     </p:extLst>
   </p:cSld>
@@ -5212,13 +4547,13 @@
           <a:p>
             <a:r>
               <a:rPr lang="ru-RU" dirty="0"/>
-              <a:t>Но у DIP есть и свои недостатки.</a:t>
-            </a:r>
-          </a:p>
-          <a:p>
-            <a:r>
-              <a:rPr lang="ru-RU" dirty="0"/>
-              <a:t>Во-первых, он добавляет уровни абстракций. Интерфейсов становится больше, архитектура — сложнее. Это нормальная цена за гибкость, но к ней нужно быть готовым.</a:t>
+              <a:t>Но у ISP есть и недостатки.</a:t>
+            </a:r>
+          </a:p>
+          <a:p>
+            <a:r>
+              <a:rPr lang="ru-RU" dirty="0"/>
+              <a:t>Первый — неизбежное увеличение количества интерфейсов. Вместо одного большого интерфейса появляются несколько маленьких. Это усложняет архитектуру и может сделать структуру проекта более раздробленной.</a:t>
             </a:r>
           </a:p>
           <a:p>
@@ -5227,7 +4562,7 @@
           <a:p>
             <a:r>
               <a:rPr lang="ru-RU" dirty="0"/>
-              <a:t>Во-вторых, появляется проблема создания объектов. Когда верхний уровень не знает о конкретных реализациях, их нужно где-то связывать: в композиционном корне, через фабрики или DI-контейнер. Это требует дисциплины и архитектурных решений.</a:t>
+              <a:t>Второй — усложнение навигации. Разработчику нужно понимать, какой интерфейс относится к какой роли. Иногда для новичка это может быть неочевидно, особенно если интерфейсов много.</a:t>
             </a:r>
           </a:p>
           <a:p>
@@ -5236,15 +4571,7 @@
           <a:p>
             <a:r>
               <a:rPr lang="ru-RU" dirty="0"/>
-              <a:t>В-третьих, DIP не всегда нужен. Для простых </a:t>
-            </a:r>
-            <a:r>
-              <a:rPr lang="ru-RU" dirty="0" err="1"/>
-              <a:t>однофайловых</a:t>
-            </a:r>
-            <a:r>
-              <a:rPr lang="ru-RU" dirty="0"/>
-              <a:t> утилит или маленьких скриптов строгие абстракции могут оказаться избыточными. DIP имеет смысл там, где ожидается развитие системы или заменяемость частей.</a:t>
+              <a:t>И третий момент — важность дисциплины. Разделить интерфейсы нужно правильно: по ролям, по сценариям использования. Слишком мелкие интерфейсы дают путаницу, слишком крупные — снова нарушают ISP. Здесь важно чувствовать баланс.</a:t>
             </a:r>
           </a:p>
           <a:p>
@@ -5253,16 +4580,7 @@
           <a:p>
             <a:r>
               <a:rPr lang="ru-RU" dirty="0"/>
-              <a:t>И наконец, соблюдение DIP требует правильного выделения интерфейсов. Если абстракции выделены неправильно, их становится слишком много или они слишком широкие — архитектура начинает путаться.</a:t>
-            </a:r>
-          </a:p>
-          <a:p>
-            <a:endParaRPr lang="ru-RU" dirty="0"/>
-          </a:p>
-          <a:p>
-            <a:r>
-              <a:rPr lang="ru-RU" dirty="0"/>
-              <a:t>Поэтому DIP — это мощный инструмент, но применять его нужно осознанно. В правильно спроектированную систему он привносит гибкость, устойчивость и долгосрочную надёжность.</a:t>
+              <a:t>В целом, ISP — мощный инструмент снижения связности, но его важно применять осознанно, в тех местах системы, где он действительно даёт выигрыш.</a:t>
             </a:r>
           </a:p>
           <a:p>
@@ -5287,7 +4605,7 @@
           <a:p>
             <a:fld id="{9BF0A773-BC3A-474D-8036-883A816F0F99}" type="slidenum">
               <a:rPr lang="ru-RU" smtClean="0"/>
-              <a:t>42</a:t>
+              <a:t>35</a:t>
             </a:fld>
             <a:endParaRPr lang="ru-RU"/>
           </a:p>
@@ -5296,7 +4614,7 @@
     </p:spTree>
     <p:extLst>
       <p:ext uri="{BB962C8B-B14F-4D97-AF65-F5344CB8AC3E}">
-        <p14:creationId xmlns:p14="http://schemas.microsoft.com/office/powerpoint/2010/main" val="746455381"/>
+        <p14:creationId xmlns:p14="http://schemas.microsoft.com/office/powerpoint/2010/main" val="1394632010"/>
       </p:ext>
     </p:extLst>
   </p:cSld>
@@ -5350,22 +4668,7 @@
           <a:bodyPr/>
           <a:lstStyle/>
           <a:p>
-            <a:r>
-              <a:rPr lang="ru-RU" dirty="0"/>
-              <a:t>Итак, подведём итоги. Принципы SOLID — это не набор жёстких правил, а инструменты, которые помогают нам снижать связность, улучшать читаемость и предсказуемость кода, повышать тестируемость и упрощать развитие проекта.</a:t>
-            </a:r>
-          </a:p>
-          <a:p>
-            <a:endParaRPr lang="ru-RU" dirty="0"/>
-          </a:p>
-          <a:p>
-            <a:r>
-              <a:rPr lang="ru-RU" dirty="0"/>
-              <a:t>Они позволяют нам проектировать систему так, чтобы новые требования вносили минимум изменений, чтобы мы могли безопасно добавлять функциональность и меньше боялись непредсказуемых побочных эффектов.</a:t>
-            </a:r>
-          </a:p>
-          <a:p>
-            <a:endParaRPr lang="en-US" dirty="0"/>
+            <a:endParaRPr lang="en-US"/>
           </a:p>
         </p:txBody>
       </p:sp>
@@ -5386,7 +4689,7 @@
           <a:p>
             <a:fld id="{9BF0A773-BC3A-474D-8036-883A816F0F99}" type="slidenum">
               <a:rPr lang="ru-RU" smtClean="0"/>
-              <a:t>43</a:t>
+              <a:t>36</a:t>
             </a:fld>
             <a:endParaRPr lang="ru-RU"/>
           </a:p>
@@ -5395,7 +4698,7 @@
     </p:spTree>
     <p:extLst>
       <p:ext uri="{BB962C8B-B14F-4D97-AF65-F5344CB8AC3E}">
-        <p14:creationId xmlns:p14="http://schemas.microsoft.com/office/powerpoint/2010/main" val="3891691834"/>
+        <p14:creationId xmlns:p14="http://schemas.microsoft.com/office/powerpoint/2010/main" val="3492959641"/>
       </p:ext>
     </p:extLst>
   </p:cSld>
@@ -5406,6 +4709,206 @@
 </file>
 
 <file path=ppt/notesSlides/notesSlide37.xml><?xml version="1.0" encoding="utf-8"?>
+<p:notes xmlns:a="http://schemas.openxmlformats.org/drawingml/2006/main" xmlns:r="http://schemas.openxmlformats.org/officeDocument/2006/relationships" xmlns:p="http://schemas.openxmlformats.org/presentationml/2006/main">
+  <p:cSld>
+    <p:spTree>
+      <p:nvGrpSpPr>
+        <p:cNvPr id="1" name=""/>
+        <p:cNvGrpSpPr/>
+        <p:nvPr/>
+      </p:nvGrpSpPr>
+      <p:grpSpPr>
+        <a:xfrm>
+          <a:off x="0" y="0"/>
+          <a:ext cx="0" cy="0"/>
+          <a:chOff x="0" y="0"/>
+          <a:chExt cx="0" cy="0"/>
+        </a:xfrm>
+      </p:grpSpPr>
+      <p:sp>
+        <p:nvSpPr>
+          <p:cNvPr id="2" name="Образ слайда 1"/>
+          <p:cNvSpPr>
+            <a:spLocks noGrp="1" noRot="1" noChangeAspect="1"/>
+          </p:cNvSpPr>
+          <p:nvPr>
+            <p:ph type="sldImg"/>
+          </p:nvPr>
+        </p:nvSpPr>
+        <p:spPr/>
+      </p:sp>
+      <p:sp>
+        <p:nvSpPr>
+          <p:cNvPr id="3" name="Заметки 2"/>
+          <p:cNvSpPr>
+            <a:spLocks noGrp="1"/>
+          </p:cNvSpPr>
+          <p:nvPr>
+            <p:ph type="body" idx="1"/>
+          </p:nvPr>
+        </p:nvSpPr>
+        <p:spPr/>
+        <p:txBody>
+          <a:bodyPr/>
+          <a:lstStyle/>
+          <a:p>
+            <a:r>
+              <a:rPr lang="ru-RU" dirty="0"/>
+              <a:t>Принцип инверсии зависимостей — один из самых архитектурно важных принципов SOLID. Он говорит, что </a:t>
+            </a:r>
+            <a:r>
+              <a:rPr lang="ru-RU" dirty="0" err="1"/>
+              <a:t>верхнеуровневый</a:t>
+            </a:r>
+            <a:r>
+              <a:rPr lang="ru-RU" dirty="0"/>
+              <a:t> код, который реализует бизнес-правила, не должен зависеть от деталей реализации — таких как базы данных, UI, сетевые библиотеки, файловая система.</a:t>
+            </a:r>
+          </a:p>
+          <a:p>
+            <a:endParaRPr lang="ru-RU" dirty="0"/>
+          </a:p>
+          <a:p>
+            <a:r>
+              <a:rPr lang="ru-RU" dirty="0"/>
+              <a:t>Почему? Потому что именно детали меняются чаще всего. Сегодня мы сохраняем данные в </a:t>
+            </a:r>
+            <a:r>
+              <a:rPr lang="ru-RU" dirty="0" err="1"/>
+              <a:t>SQLite</a:t>
+            </a:r>
+            <a:r>
+              <a:rPr lang="ru-RU" dirty="0"/>
+              <a:t>, завтра — в </a:t>
+            </a:r>
+            <a:r>
+              <a:rPr lang="ru-RU" dirty="0" err="1"/>
+              <a:t>PostgreSQL</a:t>
+            </a:r>
+            <a:r>
+              <a:rPr lang="ru-RU" dirty="0"/>
+              <a:t>, а послезавтра — в облако. Если бизнес-логика напрямую зависит от конкретной библиотеки или API, любое изменение инфраструктуры заставит нас переписывать верхний уровень системы. Это делает архитектуру хрупкой.</a:t>
+            </a:r>
+          </a:p>
+          <a:p>
+            <a:endParaRPr lang="ru-RU" dirty="0"/>
+          </a:p>
+          <a:p>
+            <a:r>
+              <a:rPr lang="ru-RU" dirty="0"/>
+              <a:t>DIP предлагает решение: </a:t>
+            </a:r>
+            <a:r>
+              <a:rPr lang="ru-RU" b="1" dirty="0"/>
+              <a:t>пусть высокоуровневый код зависит от абстракций</a:t>
+            </a:r>
+            <a:r>
+              <a:rPr lang="ru-RU" dirty="0"/>
+              <a:t> — интерфейсов, определяющих нужное поведение. А уже конкретные реализации этих интерфейсов подключаются извне — через внедрение зависимостей, фабрики, конфигурацию приложения.</a:t>
+            </a:r>
+          </a:p>
+          <a:p>
+            <a:endParaRPr lang="ru-RU" dirty="0"/>
+          </a:p>
+          <a:p>
+            <a:r>
+              <a:rPr lang="ru-RU" dirty="0"/>
+              <a:t>В такой архитектуре бизнес-логика становится стабильной: она не знает, из какой базы приходят данные, какой именно UI их показывает, или в какой формат сохраняется файл. Она работает только с абстракциями.</a:t>
+            </a:r>
+          </a:p>
+          <a:p>
+            <a:endParaRPr lang="ru-RU" dirty="0"/>
+          </a:p>
+          <a:p>
+            <a:r>
+              <a:rPr lang="ru-RU" dirty="0"/>
+              <a:t>Это сильно упрощает тестирование — мы можем подставлять фейковые или мок-реализации. Это упрощает сопровождение — меняется инфраструктура, а верхний уровень не трогаем. И это упрощает расширяемость — можно писать новые реализации интерфейсов, не меняя существующий код.</a:t>
+            </a:r>
+          </a:p>
+          <a:p>
+            <a:endParaRPr lang="ru-RU" dirty="0"/>
+          </a:p>
+          <a:p>
+            <a:r>
+              <a:rPr lang="ru-RU" dirty="0"/>
+              <a:t>Таким образом, принцип инверсии зависимостей делает архитектуру гибкой, устойчивой и удобной для долгосрочного развития. Он лежит в основе большинства современных архитектурных подходов — от </a:t>
+            </a:r>
+            <a:r>
+              <a:rPr lang="ru-RU" dirty="0" err="1"/>
+              <a:t>Clean</a:t>
+            </a:r>
+            <a:r>
+              <a:rPr lang="ru-RU" dirty="0"/>
+              <a:t> Architecture до </a:t>
+            </a:r>
+            <a:r>
+              <a:rPr lang="ru-RU" dirty="0" err="1"/>
+              <a:t>Hexagonal</a:t>
+            </a:r>
+            <a:r>
+              <a:rPr lang="ru-RU" dirty="0"/>
+              <a:t> Architecture.</a:t>
+            </a:r>
+          </a:p>
+          <a:p>
+            <a:pPr marL="0" marR="0" indent="0" algn="l" defTabSz="914400" rtl="0" eaLnBrk="1" fontAlgn="auto" latinLnBrk="0" hangingPunct="1">
+              <a:lnSpc>
+                <a:spcPct val="100000"/>
+              </a:lnSpc>
+              <a:spcBef>
+                <a:spcPts val="0"/>
+              </a:spcBef>
+              <a:spcAft>
+                <a:spcPts val="0"/>
+              </a:spcAft>
+              <a:buClrTx/>
+              <a:buSzTx/>
+              <a:buFontTx/>
+              <a:buNone/>
+              <a:tabLst/>
+              <a:defRPr/>
+            </a:pPr>
+            <a:endParaRPr lang="ru-RU" dirty="0"/>
+          </a:p>
+        </p:txBody>
+      </p:sp>
+      <p:sp>
+        <p:nvSpPr>
+          <p:cNvPr id="4" name="Номер слайда 3"/>
+          <p:cNvSpPr>
+            <a:spLocks noGrp="1"/>
+          </p:cNvSpPr>
+          <p:nvPr>
+            <p:ph type="sldNum" sz="quarter" idx="10"/>
+          </p:nvPr>
+        </p:nvSpPr>
+        <p:spPr/>
+        <p:txBody>
+          <a:bodyPr/>
+          <a:lstStyle/>
+          <a:p>
+            <a:fld id="{9BF0A773-BC3A-474D-8036-883A816F0F99}" type="slidenum">
+              <a:rPr lang="ru-RU" smtClean="0"/>
+              <a:t>37</a:t>
+            </a:fld>
+            <a:endParaRPr lang="ru-RU"/>
+          </a:p>
+        </p:txBody>
+      </p:sp>
+    </p:spTree>
+    <p:extLst>
+      <p:ext uri="{BB962C8B-B14F-4D97-AF65-F5344CB8AC3E}">
+        <p14:creationId xmlns:p14="http://schemas.microsoft.com/office/powerpoint/2010/main" val="3210621328"/>
+      </p:ext>
+    </p:extLst>
+  </p:cSld>
+  <p:clrMapOvr>
+    <a:masterClrMapping/>
+  </p:clrMapOvr>
+</p:notes>
+</file>
+
+<file path=ppt/notesSlides/notesSlide38.xml><?xml version="1.0" encoding="utf-8"?>
 <p:notes xmlns:a="http://schemas.openxmlformats.org/drawingml/2006/main" xmlns:r="http://schemas.openxmlformats.org/officeDocument/2006/relationships" xmlns:p="http://schemas.openxmlformats.org/presentationml/2006/main">
   <p:cSld>
     <p:spTree>
@@ -5451,7 +4954,7 @@
           <a:p>
             <a:r>
               <a:rPr lang="ru-RU" dirty="0"/>
-              <a:t>Однако очень важно понимать, что SOLID — это не религия. Не нужно применять принципы фанатично и везде. Иногда простой монолитный класс решает задачу лучше, чем десяток абстракций. Иногда SRP или DIP не дают практической выгоды.</a:t>
+              <a:t>Когда мы говорим о принципе инверсии зависимостей, важно понять ещё одну ключевую идею — идею стабильных абстракций.</a:t>
             </a:r>
           </a:p>
           <a:p>
@@ -5460,13 +4963,7 @@
           <a:p>
             <a:r>
               <a:rPr lang="ru-RU" dirty="0"/>
-              <a:t>Принципы имеют смысл тогда, когда они делают код проще и устойчивее.</a:t>
-            </a:r>
-          </a:p>
-          <a:p>
-            <a:r>
-              <a:rPr lang="ru-RU" dirty="0"/>
-              <a:t>В конечном итоге цель у нас одна — создавать системы, которые легко понимать, удобно развивать и безопасно изменять. Если SOLID помогает в этом — применяйте. Если мешает — ищите баланс.</a:t>
+              <a:t>В любой системе есть части, которые меняются часто, и части, которые должны оставаться стабильными. Обычно бизнес-правила, доменная модель, взаимодействие между компонентами — это то, что мы хотим защитить от частых изменений. А вот инфраструктура — файлы, базы данных, сетевые протоколы, UI, библиотеки — меняются куда чаще.</a:t>
             </a:r>
           </a:p>
           <a:p>
@@ -5475,11 +4972,44 @@
           <a:p>
             <a:r>
               <a:rPr lang="ru-RU" dirty="0"/>
-              <a:t>Принципы — это инструменты, а не кандалы. И важно не просто знать их, но и понимать, когда и зачем их использовать.</a:t>
-            </a:r>
-          </a:p>
-          <a:p>
-            <a:endParaRPr lang="en-US" dirty="0"/>
+              <a:t>DIP говорит: пусть нестабильные части зависят от стабильных. То есть не бизнес-логика должна зависеть от конкретного драйвера базы данных, а наоборот — драйвер должен адаптироваться к абстрактному интерфейсу, который определяет бизнес-логика.</a:t>
+            </a:r>
+          </a:p>
+          <a:p>
+            <a:endParaRPr lang="ru-RU" dirty="0"/>
+          </a:p>
+          <a:p>
+            <a:r>
+              <a:rPr lang="ru-RU" dirty="0"/>
+              <a:t>Абстракции — интерфейсы, контракты, порты — должны быть максимально стабильными. Мы продумываем их так, чтобы они отражали бизнес-требования, а не ограничения инфраструктуры. При этом реализации, которые адаптируются под конкретные технологии, могут меняться сколько угодно — это никак не повлияет на верхние уровни системы.</a:t>
+            </a:r>
+          </a:p>
+          <a:p>
+            <a:endParaRPr lang="ru-RU" dirty="0"/>
+          </a:p>
+          <a:p>
+            <a:r>
+              <a:rPr lang="ru-RU" dirty="0"/>
+              <a:t>Именно поэтому мы не наследуем изменчивые конкретные классы и не переопределяем их методы. В этом случае мы жёстко привязываемся к детали реализации, которая завтра может измениться. Вместо этого мы наследуемся от абстракций или работаем через интерфейсы.</a:t>
+            </a:r>
+          </a:p>
+          <a:p>
+            <a:endParaRPr lang="ru-RU" dirty="0"/>
+          </a:p>
+          <a:p>
+            <a:r>
+              <a:rPr lang="ru-RU" dirty="0"/>
+              <a:t>Создание объектов также должно быть вынесено в фабрики, в композиционный корень или в DI-контейнер. Это позволяет высокоуровневому коду вообще не знать, какой конкретный класс используется — он видит только абстракцию.</a:t>
+            </a:r>
+          </a:p>
+          <a:p>
+            <a:endParaRPr lang="ru-RU" dirty="0"/>
+          </a:p>
+          <a:p>
+            <a:r>
+              <a:rPr lang="ru-RU" dirty="0"/>
+              <a:t>В итоге мы получаем архитектуру, в которой изменения изолированы. Инфраструктуру можно менять без страха сломать бизнес-логику, а сама система становится намного более предсказуемой и устойчивой к эволюции</a:t>
+            </a:r>
           </a:p>
         </p:txBody>
       </p:sp>
@@ -5500,7 +5030,7 @@
           <a:p>
             <a:fld id="{9BF0A773-BC3A-474D-8036-883A816F0F99}" type="slidenum">
               <a:rPr lang="ru-RU" smtClean="0"/>
-              <a:t>44</a:t>
+              <a:t>38</a:t>
             </a:fld>
             <a:endParaRPr lang="ru-RU"/>
           </a:p>
@@ -5509,7 +5039,7 @@
     </p:spTree>
     <p:extLst>
       <p:ext uri="{BB962C8B-B14F-4D97-AF65-F5344CB8AC3E}">
-        <p14:creationId xmlns:p14="http://schemas.microsoft.com/office/powerpoint/2010/main" val="355290894"/>
+        <p14:creationId xmlns:p14="http://schemas.microsoft.com/office/powerpoint/2010/main" val="32192336"/>
       </p:ext>
     </p:extLst>
   </p:cSld>
@@ -5519,7 +5049,7 @@
 </p:notes>
 </file>
 
-<file path=ppt/notesSlides/notesSlide38.xml><?xml version="1.0" encoding="utf-8"?>
+<file path=ppt/notesSlides/notesSlide39.xml><?xml version="1.0" encoding="utf-8"?>
 <p:notes xmlns:a="http://schemas.openxmlformats.org/drawingml/2006/main" xmlns:r="http://schemas.openxmlformats.org/officeDocument/2006/relationships" xmlns:p="http://schemas.openxmlformats.org/presentationml/2006/main">
   <p:cSld>
     <p:spTree>
@@ -5538,7 +5068,7 @@
       </p:grpSpPr>
       <p:sp>
         <p:nvSpPr>
-          <p:cNvPr id="2" name="Образ слайда 1"/>
+          <p:cNvPr id="2" name="Slide Image Placeholder 1"/>
           <p:cNvSpPr>
             <a:spLocks noGrp="1" noRot="1" noChangeAspect="1"/>
           </p:cNvSpPr>
@@ -5550,7 +5080,7 @@
       </p:sp>
       <p:sp>
         <p:nvSpPr>
-          <p:cNvPr id="3" name="Заметки 2"/>
+          <p:cNvPr id="3" name="Notes Placeholder 2"/>
           <p:cNvSpPr>
             <a:spLocks noGrp="1"/>
           </p:cNvSpPr>
@@ -5563,18 +5093,216 @@
           <a:bodyPr/>
           <a:lstStyle/>
           <a:p>
-            <a:endParaRPr lang="ru-RU" dirty="0"/>
+            <a:r>
+              <a:rPr lang="ru-RU" dirty="0"/>
+              <a:t>Представим, что в системе есть </a:t>
+            </a:r>
+            <a:r>
+              <a:rPr lang="ru-RU" dirty="0" err="1"/>
+              <a:t>use</a:t>
+            </a:r>
+            <a:r>
+              <a:rPr lang="ru-RU" dirty="0"/>
+              <a:t> </a:t>
+            </a:r>
+            <a:r>
+              <a:rPr lang="ru-RU" dirty="0" err="1"/>
+              <a:t>case</a:t>
+            </a:r>
+            <a:r>
+              <a:rPr lang="ru-RU" dirty="0"/>
+              <a:t> для добавления пользователя:</a:t>
+            </a:r>
+          </a:p>
+          <a:p>
+            <a:r>
+              <a:rPr lang="ru-RU" b="1" dirty="0"/>
+              <a:t>Что здесь плохо:</a:t>
+            </a:r>
+          </a:p>
+          <a:p>
+            <a:r>
+              <a:rPr lang="ru-RU" sz="1200" kern="1200" dirty="0" err="1">
+                <a:solidFill>
+                  <a:schemeClr val="tx1"/>
+                </a:solidFill>
+                <a:latin typeface="+mn-lt"/>
+                <a:ea typeface="+mn-ea"/>
+                <a:cs typeface="+mn-cs"/>
+              </a:rPr>
+              <a:t>AddUserUseCase</a:t>
+            </a:r>
+            <a:r>
+              <a:rPr lang="ru-RU" dirty="0"/>
+              <a:t> </a:t>
+            </a:r>
+            <a:r>
+              <a:rPr lang="ru-RU" b="1" dirty="0"/>
+              <a:t>жёстко зависит от конкретного класса</a:t>
+            </a:r>
+            <a:r>
+              <a:rPr lang="ru-RU" dirty="0"/>
+              <a:t> </a:t>
+            </a:r>
+            <a:r>
+              <a:rPr lang="ru-RU" sz="1200" kern="1200" dirty="0" err="1">
+                <a:solidFill>
+                  <a:schemeClr val="tx1"/>
+                </a:solidFill>
+                <a:latin typeface="+mn-lt"/>
+                <a:ea typeface="+mn-ea"/>
+                <a:cs typeface="+mn-cs"/>
+              </a:rPr>
+              <a:t>SqlUserRepository</a:t>
+            </a:r>
+            <a:r>
+              <a:rPr lang="ru-RU" dirty="0"/>
+              <a:t>.</a:t>
+            </a:r>
+            <a:br>
+              <a:rPr lang="ru-RU" dirty="0"/>
+            </a:br>
+            <a:r>
+              <a:rPr lang="ru-RU" dirty="0"/>
+              <a:t>Если мы решим перейти с SQL на </a:t>
+            </a:r>
+            <a:r>
+              <a:rPr lang="ru-RU" dirty="0" err="1"/>
+              <a:t>MongoDB</a:t>
+            </a:r>
+            <a:r>
+              <a:rPr lang="ru-RU" dirty="0"/>
+              <a:t>, файл, сервис, REST-API или </a:t>
+            </a:r>
+            <a:r>
+              <a:rPr lang="ru-RU" dirty="0" err="1"/>
+              <a:t>in-memory</a:t>
+            </a:r>
+            <a:r>
+              <a:rPr lang="ru-RU" dirty="0"/>
+              <a:t> </a:t>
+            </a:r>
+            <a:r>
+              <a:rPr lang="ru-RU" dirty="0" err="1"/>
+              <a:t>storage</a:t>
+            </a:r>
+            <a:r>
+              <a:rPr lang="ru-RU" dirty="0"/>
+              <a:t> — придётся менять код </a:t>
+            </a:r>
+            <a:r>
+              <a:rPr lang="ru-RU" dirty="0" err="1"/>
+              <a:t>use</a:t>
+            </a:r>
+            <a:r>
+              <a:rPr lang="ru-RU" dirty="0"/>
+              <a:t> </a:t>
+            </a:r>
+            <a:r>
+              <a:rPr lang="ru-RU" dirty="0" err="1"/>
+              <a:t>case</a:t>
+            </a:r>
+            <a:r>
+              <a:rPr lang="ru-RU" dirty="0"/>
+              <a:t>.</a:t>
+            </a:r>
+          </a:p>
+          <a:p>
+            <a:r>
+              <a:rPr lang="ru-RU" dirty="0"/>
+              <a:t>Репозиторий требует </a:t>
+            </a:r>
+            <a:r>
+              <a:rPr lang="ru-RU" sz="1200" kern="1200" dirty="0">
+                <a:solidFill>
+                  <a:schemeClr val="tx1"/>
+                </a:solidFill>
+                <a:latin typeface="+mn-lt"/>
+                <a:ea typeface="+mn-ea"/>
+                <a:cs typeface="+mn-cs"/>
+              </a:rPr>
+              <a:t>Connect()</a:t>
+            </a:r>
+            <a:r>
+              <a:rPr lang="ru-RU" dirty="0"/>
+              <a:t>, а </a:t>
+            </a:r>
+            <a:r>
+              <a:rPr lang="ru-RU" dirty="0" err="1"/>
+              <a:t>use</a:t>
+            </a:r>
+            <a:r>
+              <a:rPr lang="ru-RU" dirty="0"/>
+              <a:t> </a:t>
+            </a:r>
+            <a:r>
+              <a:rPr lang="ru-RU" dirty="0" err="1"/>
+              <a:t>case</a:t>
+            </a:r>
+            <a:r>
+              <a:rPr lang="ru-RU" dirty="0"/>
+              <a:t> вынужден знать, </a:t>
+            </a:r>
+            <a:r>
+              <a:rPr lang="ru-RU" b="1" dirty="0"/>
+              <a:t>как конкретно работает SQL-библиотека</a:t>
+            </a:r>
+            <a:r>
+              <a:rPr lang="ru-RU" dirty="0"/>
+              <a:t>.</a:t>
+            </a:r>
+          </a:p>
+          <a:p>
+            <a:r>
+              <a:rPr lang="ru-RU" dirty="0"/>
+              <a:t>Код почти невозможно протестировать без реальной БД → низкая тестируемость.</a:t>
+            </a:r>
+          </a:p>
+          <a:p>
+            <a:r>
+              <a:rPr lang="ru-RU" dirty="0" err="1"/>
+              <a:t>Верхнеуровневая</a:t>
+            </a:r>
+            <a:r>
+              <a:rPr lang="ru-RU" dirty="0"/>
+              <a:t> бизнес-логика становится </a:t>
+            </a:r>
+            <a:r>
+              <a:rPr lang="ru-RU" b="1" dirty="0"/>
+              <a:t>хрупкой</a:t>
+            </a:r>
+            <a:r>
+              <a:rPr lang="ru-RU" dirty="0"/>
+              <a:t>, поскольку зависит от нестабильной инфраструктуры.</a:t>
+            </a:r>
+          </a:p>
+          <a:p>
+            <a:r>
+              <a:rPr lang="ru-RU" dirty="0"/>
+              <a:t>Это прямое нарушение принципа: </a:t>
+            </a:r>
+            <a:r>
+              <a:rPr lang="ru-RU" b="1" dirty="0"/>
+              <a:t>нестабильная инфраструктура не должна влиять на стабильные абстракции и бизнес-логику</a:t>
+            </a:r>
+            <a:r>
+              <a:rPr lang="ru-RU" dirty="0"/>
+              <a:t>.</a:t>
+            </a:r>
+          </a:p>
+          <a:p>
+            <a:endParaRPr lang="en-US" dirty="0"/>
           </a:p>
         </p:txBody>
       </p:sp>
       <p:sp>
         <p:nvSpPr>
-          <p:cNvPr id="4" name="Номер слайда 3"/>
+          <p:cNvPr id="4" name="Slide Number Placeholder 3"/>
           <p:cNvSpPr>
             <a:spLocks noGrp="1"/>
           </p:cNvSpPr>
           <p:nvPr>
-            <p:ph type="sldNum" sz="quarter" idx="10"/>
+            <p:ph type="sldNum" sz="quarter" idx="5"/>
           </p:nvPr>
         </p:nvSpPr>
         <p:spPr/>
@@ -5582,9 +5310,9 @@
           <a:bodyPr/>
           <a:lstStyle/>
           <a:p>
-            <a:fld id="{A0B28B7E-B000-4596-AC62-77FFB0327B90}" type="slidenum">
+            <a:fld id="{9BF0A773-BC3A-474D-8036-883A816F0F99}" type="slidenum">
               <a:rPr lang="ru-RU" smtClean="0"/>
-              <a:t>45</a:t>
+              <a:t>39</a:t>
             </a:fld>
             <a:endParaRPr lang="ru-RU"/>
           </a:p>
@@ -5593,7 +5321,7 @@
     </p:spTree>
     <p:extLst>
       <p:ext uri="{BB962C8B-B14F-4D97-AF65-F5344CB8AC3E}">
-        <p14:creationId xmlns:p14="http://schemas.microsoft.com/office/powerpoint/2010/main" val="945403398"/>
+        <p14:creationId xmlns:p14="http://schemas.microsoft.com/office/powerpoint/2010/main" val="4179902188"/>
       </p:ext>
     </p:extLst>
   </p:cSld>
@@ -5647,92 +5375,95 @@
           <a:bodyPr/>
           <a:lstStyle/>
           <a:p>
-            <a:pPr marL="0" marR="0" indent="0" algn="l" defTabSz="914400" rtl="0" eaLnBrk="1" fontAlgn="auto" latinLnBrk="0" hangingPunct="1">
-              <a:lnSpc>
-                <a:spcPct val="100000"/>
-              </a:lnSpc>
-              <a:spcBef>
-                <a:spcPts val="0"/>
-              </a:spcBef>
-              <a:spcAft>
-                <a:spcPts val="0"/>
-              </a:spcAft>
-              <a:buClrTx/>
-              <a:buSzTx/>
-              <a:buFontTx/>
-              <a:buNone/>
-              <a:tabLst/>
-              <a:defRPr/>
-            </a:pPr>
-            <a:r>
-              <a:rPr lang="ru-RU" baseline="0" dirty="0"/>
-              <a:t>Перед нами класс </a:t>
-            </a:r>
-            <a:r>
-              <a:rPr lang="en-US" baseline="0" dirty="0"/>
+            <a:r>
+              <a:rPr lang="ru-RU" dirty="0"/>
+              <a:t>Начнём с самого первого и, возможно, самого важного принципа — принципа единственной ответственности. Его формулировка звучит так: класс должен иметь только одну причину для изменений.</a:t>
+            </a:r>
+          </a:p>
+          <a:p>
+            <a:r>
+              <a:rPr lang="ru-RU" dirty="0"/>
+              <a:t>Если говорить простыми словами — у класса должна быть </a:t>
+            </a:r>
+            <a:r>
+              <a:rPr lang="ru-RU" b="1" dirty="0"/>
+              <a:t>одна роль</a:t>
+            </a:r>
+            <a:r>
+              <a:rPr lang="ru-RU" dirty="0"/>
+              <a:t>, один источник требований, один “актор”, который диктует, что и как должно меняться.</a:t>
+            </a:r>
+          </a:p>
+          <a:p>
+            <a:r>
+              <a:rPr lang="ru-RU" dirty="0"/>
+              <a:t>Почему это важно? Представьте класс, который и читает файл, и валидирует данные, и преобразует их в объект, и </a:t>
+            </a:r>
+            <a:r>
+              <a:rPr lang="ru-RU" dirty="0" err="1"/>
+              <a:t>логирует</a:t>
+            </a:r>
+            <a:r>
+              <a:rPr lang="ru-RU" dirty="0"/>
+              <a:t> ошибки. Он вроде бы “про файл”, но влияет на него сразу четыре источника изменений: формат файла, правила валидации, структура доменного объекта и требования к логированию. Любое изменение в одном из аспектов может поломать работу другого, и класс становится хрупким.</a:t>
+            </a:r>
+          </a:p>
+          <a:p>
+            <a:endParaRPr lang="ru-RU" dirty="0"/>
+          </a:p>
+          <a:p>
+            <a:r>
+              <a:rPr lang="ru-RU" dirty="0"/>
+              <a:t>SRP помогает избежать этого. Мы стремимся к тому, чтобы каждая часть системы имела ясную, изолированную ответственность. Тогда изменения в одной области не тянут за собой цепочку исправлений по всей системе.</a:t>
+            </a:r>
+          </a:p>
+          <a:p>
+            <a:r>
+              <a:rPr lang="ru-RU" dirty="0"/>
+              <a:t>Есть простой приём, который помогает понять, нарушается ли принцип. Попробуйте описать, что делает класс, одним предложением. Например: “Класс </a:t>
+            </a:r>
+            <a:r>
+              <a:rPr lang="ru-RU" dirty="0" err="1"/>
               <a:t>Bitmap</a:t>
             </a:r>
             <a:r>
-              <a:rPr lang="ru-RU" baseline="0" dirty="0"/>
-              <a:t>, предоставляющий операции над растровым изображением</a:t>
-            </a:r>
-            <a:r>
-              <a:rPr lang="en-US" baseline="0" dirty="0"/>
-              <a:t>.</a:t>
-            </a:r>
-            <a:r>
-              <a:rPr lang="ru-RU" baseline="0" dirty="0"/>
-              <a:t> </a:t>
-            </a:r>
-            <a:endParaRPr lang="en-US" baseline="0" dirty="0"/>
-          </a:p>
-          <a:p>
-            <a:pPr marL="0" marR="0" indent="0" algn="l" defTabSz="914400" rtl="0" eaLnBrk="1" fontAlgn="auto" latinLnBrk="0" hangingPunct="1">
-              <a:lnSpc>
-                <a:spcPct val="100000"/>
-              </a:lnSpc>
-              <a:spcBef>
-                <a:spcPts val="0"/>
-              </a:spcBef>
-              <a:spcAft>
-                <a:spcPts val="0"/>
-              </a:spcAft>
-              <a:buClrTx/>
-              <a:buSzTx/>
-              <a:buFontTx/>
-              <a:buNone/>
-              <a:tabLst/>
-              <a:defRPr/>
-            </a:pPr>
-            <a:r>
-              <a:rPr lang="ru-RU" baseline="0" dirty="0"/>
-              <a:t>Помимо основной ответственности – хранения пикселей – в классе присутствуют сохранение в файл и рисование линии. Каждая из этих функций вносит дополнительную ответственность в класс </a:t>
-            </a:r>
-            <a:r>
-              <a:rPr lang="en-US" baseline="0" dirty="0"/>
+              <a:rPr lang="ru-RU" dirty="0"/>
+              <a:t> хранит пиксели изображения”. Это просто и понятно — ответственность одна.</a:t>
+            </a:r>
+          </a:p>
+          <a:p>
+            <a:br>
+              <a:rPr lang="ru-RU" dirty="0"/>
+            </a:br>
+            <a:r>
+              <a:rPr lang="ru-RU" dirty="0"/>
+              <a:t>А если у вас получается что-то вроде: “Класс </a:t>
+            </a:r>
+            <a:r>
+              <a:rPr lang="ru-RU" dirty="0" err="1"/>
               <a:t>Bitmap</a:t>
             </a:r>
             <a:r>
-              <a:rPr lang="ru-RU" baseline="0" dirty="0"/>
-              <a:t>. Тем самым принцип нарушается.</a:t>
-            </a:r>
-          </a:p>
-          <a:p>
-            <a:r>
-              <a:rPr lang="ru-RU" baseline="0" dirty="0"/>
-              <a:t>Сформулируем ответственность класса в виде предложения: Класс </a:t>
-            </a:r>
-            <a:r>
-              <a:rPr lang="en-US" baseline="0" dirty="0"/>
-              <a:t>Bitmap</a:t>
-            </a:r>
-            <a:r>
-              <a:rPr lang="ru-RU" baseline="0" dirty="0"/>
-              <a:t> хранит в себе пиксели изображения, а также позволяет сохранить изображение в файл и нарисовать линию. Предложение получилось сложным, что может свидетельствовать о нарушении принципа.</a:t>
-            </a:r>
-          </a:p>
-          <a:p>
-            <a:endParaRPr lang="ru-RU" baseline="0" dirty="0"/>
+              <a:rPr lang="ru-RU" dirty="0"/>
+              <a:t> хранит пиксели, умеет сохранять их в файл и умеет рисовать линии” — вы уже чувствуете, что это три ответственности. И у каждой своя причина для изменений.</a:t>
+            </a:r>
+          </a:p>
+          <a:p>
+            <a:r>
+              <a:rPr lang="ru-RU" dirty="0"/>
+              <a:t>Именно поэтому SRP — основа для модульности, </a:t>
+            </a:r>
+            <a:r>
+              <a:rPr lang="ru-RU" dirty="0" err="1"/>
+              <a:t>переиспользуемости</a:t>
+            </a:r>
+            <a:r>
+              <a:rPr lang="ru-RU" dirty="0"/>
+              <a:t> и тестируемости. Если у класса одна ответственность, тестировать его проще, расширять проще и понимать проще.</a:t>
+            </a:r>
+          </a:p>
+          <a:p>
+            <a:endParaRPr lang="ru-RU" i="1" dirty="0"/>
           </a:p>
         </p:txBody>
       </p:sp>
@@ -5751,9 +5482,9 @@
           <a:bodyPr/>
           <a:lstStyle/>
           <a:p>
-            <a:fld id="{9BF0A773-BC3A-474D-8036-883A816F0F99}" type="slidenum">
+            <a:fld id="{A0B28B7E-B000-4596-AC62-77FFB0327B90}" type="slidenum">
               <a:rPr lang="ru-RU" smtClean="0"/>
-              <a:t>5</a:t>
+              <a:t>4</a:t>
             </a:fld>
             <a:endParaRPr lang="ru-RU"/>
           </a:p>
@@ -5762,7 +5493,847 @@
     </p:spTree>
     <p:extLst>
       <p:ext uri="{BB962C8B-B14F-4D97-AF65-F5344CB8AC3E}">
-        <p14:creationId xmlns:p14="http://schemas.microsoft.com/office/powerpoint/2010/main" val="3276207523"/>
+        <p14:creationId xmlns:p14="http://schemas.microsoft.com/office/powerpoint/2010/main" val="432884594"/>
+      </p:ext>
+    </p:extLst>
+  </p:cSld>
+  <p:clrMapOvr>
+    <a:masterClrMapping/>
+  </p:clrMapOvr>
+</p:notes>
+</file>
+
+<file path=ppt/notesSlides/notesSlide40.xml><?xml version="1.0" encoding="utf-8"?>
+<p:notes xmlns:a="http://schemas.openxmlformats.org/drawingml/2006/main" xmlns:r="http://schemas.openxmlformats.org/officeDocument/2006/relationships" xmlns:p="http://schemas.openxmlformats.org/presentationml/2006/main">
+  <p:cSld>
+    <p:spTree>
+      <p:nvGrpSpPr>
+        <p:cNvPr id="1" name=""/>
+        <p:cNvGrpSpPr/>
+        <p:nvPr/>
+      </p:nvGrpSpPr>
+      <p:grpSpPr>
+        <a:xfrm>
+          <a:off x="0" y="0"/>
+          <a:ext cx="0" cy="0"/>
+          <a:chOff x="0" y="0"/>
+          <a:chExt cx="0" cy="0"/>
+        </a:xfrm>
+      </p:grpSpPr>
+      <p:sp>
+        <p:nvSpPr>
+          <p:cNvPr id="2" name="Slide Image Placeholder 1"/>
+          <p:cNvSpPr>
+            <a:spLocks noGrp="1" noRot="1" noChangeAspect="1"/>
+          </p:cNvSpPr>
+          <p:nvPr>
+            <p:ph type="sldImg"/>
+          </p:nvPr>
+        </p:nvSpPr>
+        <p:spPr/>
+      </p:sp>
+      <p:sp>
+        <p:nvSpPr>
+          <p:cNvPr id="3" name="Notes Placeholder 2"/>
+          <p:cNvSpPr>
+            <a:spLocks noGrp="1"/>
+          </p:cNvSpPr>
+          <p:nvPr>
+            <p:ph type="body" idx="1"/>
+          </p:nvPr>
+        </p:nvSpPr>
+        <p:spPr/>
+        <p:txBody>
+          <a:bodyPr/>
+          <a:lstStyle/>
+          <a:p>
+            <a:r>
+              <a:rPr lang="ru-RU" b="0" dirty="0"/>
+              <a:t>Почему это соблюдение принципа «Стабильные абстракции»</a:t>
+            </a:r>
+          </a:p>
+          <a:p>
+            <a:r>
+              <a:rPr lang="ru-RU" b="0" dirty="0"/>
+              <a:t>В новой версии:</a:t>
+            </a:r>
+          </a:p>
+          <a:p>
+            <a:r>
+              <a:rPr lang="ru-RU" b="0" dirty="0" err="1"/>
+              <a:t>Use</a:t>
+            </a:r>
+            <a:r>
+              <a:rPr lang="ru-RU" b="0" dirty="0"/>
+              <a:t> </a:t>
+            </a:r>
+            <a:r>
+              <a:rPr lang="ru-RU" b="0" dirty="0" err="1"/>
+              <a:t>case</a:t>
+            </a:r>
+            <a:r>
+              <a:rPr lang="ru-RU" b="0" dirty="0"/>
+              <a:t> зависит от стабильной абстракции </a:t>
+            </a:r>
+            <a:r>
+              <a:rPr lang="ru-RU" sz="1200" b="0" kern="1200" dirty="0" err="1">
+                <a:solidFill>
+                  <a:schemeClr val="tx1"/>
+                </a:solidFill>
+                <a:latin typeface="+mn-lt"/>
+                <a:ea typeface="+mn-ea"/>
+                <a:cs typeface="+mn-cs"/>
+              </a:rPr>
+              <a:t>IUserRepository</a:t>
+            </a:r>
+            <a:r>
+              <a:rPr lang="ru-RU" b="0" dirty="0"/>
+              <a:t>.</a:t>
+            </a:r>
+          </a:p>
+          <a:p>
+            <a:r>
+              <a:rPr lang="ru-RU" b="0" dirty="0"/>
+              <a:t>Реализация (</a:t>
+            </a:r>
+            <a:r>
+              <a:rPr lang="ru-RU" sz="1200" b="0" kern="1200" dirty="0" err="1">
+                <a:solidFill>
+                  <a:schemeClr val="tx1"/>
+                </a:solidFill>
+                <a:latin typeface="+mn-lt"/>
+                <a:ea typeface="+mn-ea"/>
+                <a:cs typeface="+mn-cs"/>
+              </a:rPr>
+              <a:t>SqlUserRepository</a:t>
+            </a:r>
+            <a:r>
+              <a:rPr lang="ru-RU" b="0" dirty="0"/>
+              <a:t>) зависит от абстракции, а не наоборот.</a:t>
+            </a:r>
+          </a:p>
+          <a:p>
+            <a:r>
+              <a:rPr lang="ru-RU" b="0" dirty="0"/>
+              <a:t>Изменчивые детали (SQL, драйверы, формат хранения) изолированы.</a:t>
+            </a:r>
+          </a:p>
+          <a:p>
+            <a:endParaRPr lang="ru-RU" b="0" dirty="0"/>
+          </a:p>
+          <a:p>
+            <a:r>
+              <a:rPr lang="ru-RU" b="0" dirty="0"/>
+              <a:t>Бизнес-логика не знает:</a:t>
+            </a:r>
+          </a:p>
+          <a:p>
+            <a:pPr marL="171450" lvl="0" indent="-171450">
+              <a:buFont typeface="Arial" panose="020B0604020202020204" pitchFamily="34" charset="0"/>
+              <a:buChar char="•"/>
+            </a:pPr>
+            <a:r>
+              <a:rPr lang="ru-RU" b="0" dirty="0"/>
+              <a:t>какая база используется,</a:t>
+            </a:r>
+          </a:p>
+          <a:p>
+            <a:pPr marL="171450" lvl="0" indent="-171450">
+              <a:buFont typeface="Arial" panose="020B0604020202020204" pitchFamily="34" charset="0"/>
+              <a:buChar char="•"/>
+            </a:pPr>
+            <a:r>
+              <a:rPr lang="ru-RU" b="0" dirty="0"/>
+              <a:t>как происходит подключение,</a:t>
+            </a:r>
+          </a:p>
+          <a:p>
+            <a:pPr marL="171450" lvl="0" indent="-171450">
+              <a:buFont typeface="Arial" panose="020B0604020202020204" pitchFamily="34" charset="0"/>
+              <a:buChar char="•"/>
+            </a:pPr>
+            <a:r>
+              <a:rPr lang="ru-RU" b="0" dirty="0"/>
+              <a:t>в каком формате хранятся данные.</a:t>
+            </a:r>
+          </a:p>
+          <a:p>
+            <a:pPr marL="171450" lvl="0" indent="-171450">
+              <a:buFont typeface="Arial" panose="020B0604020202020204" pitchFamily="34" charset="0"/>
+              <a:buChar char="•"/>
+            </a:pPr>
+            <a:endParaRPr lang="ru-RU" b="0" dirty="0"/>
+          </a:p>
+          <a:p>
+            <a:r>
+              <a:rPr lang="ru-RU" b="0" dirty="0"/>
+              <a:t>И самое главное:</a:t>
+            </a:r>
+          </a:p>
+          <a:p>
+            <a:pPr marL="171450" indent="-171450">
+              <a:buFont typeface="Arial" panose="020B0604020202020204" pitchFamily="34" charset="0"/>
+              <a:buChar char="•"/>
+            </a:pPr>
+            <a:r>
+              <a:rPr lang="ru-RU" b="0" dirty="0"/>
+              <a:t>Добавление новой реализации не требует менять существующий код.</a:t>
+            </a:r>
+          </a:p>
+          <a:p>
+            <a:pPr marL="171450" indent="-171450">
+              <a:buFont typeface="Arial" panose="020B0604020202020204" pitchFamily="34" charset="0"/>
+              <a:buChar char="•"/>
+            </a:pPr>
+            <a:r>
+              <a:rPr lang="ru-RU" b="0" dirty="0"/>
+              <a:t>Бизнес-логика тестируется без инфраструктуры.</a:t>
+            </a:r>
+          </a:p>
+          <a:p>
+            <a:pPr marL="171450" indent="-171450">
+              <a:buFont typeface="Arial" panose="020B0604020202020204" pitchFamily="34" charset="0"/>
+              <a:buChar char="•"/>
+            </a:pPr>
+            <a:r>
+              <a:rPr lang="ru-RU" b="0" dirty="0"/>
+              <a:t>Инфраструктуры можно менять хоть каждый день — </a:t>
+            </a:r>
+            <a:r>
+              <a:rPr lang="ru-RU" b="0" dirty="0" err="1"/>
+              <a:t>use</a:t>
+            </a:r>
+            <a:r>
+              <a:rPr lang="ru-RU" b="0" dirty="0"/>
+              <a:t> </a:t>
+            </a:r>
+            <a:r>
+              <a:rPr lang="ru-RU" b="0" dirty="0" err="1"/>
+              <a:t>case</a:t>
+            </a:r>
+            <a:r>
+              <a:rPr lang="ru-RU" b="0" dirty="0"/>
+              <a:t> не заметит.</a:t>
+            </a:r>
+          </a:p>
+          <a:p>
+            <a:endParaRPr lang="en-US" b="0" dirty="0"/>
+          </a:p>
+        </p:txBody>
+      </p:sp>
+      <p:sp>
+        <p:nvSpPr>
+          <p:cNvPr id="4" name="Slide Number Placeholder 3"/>
+          <p:cNvSpPr>
+            <a:spLocks noGrp="1"/>
+          </p:cNvSpPr>
+          <p:nvPr>
+            <p:ph type="sldNum" sz="quarter" idx="5"/>
+          </p:nvPr>
+        </p:nvSpPr>
+        <p:spPr/>
+        <p:txBody>
+          <a:bodyPr/>
+          <a:lstStyle/>
+          <a:p>
+            <a:fld id="{9BF0A773-BC3A-474D-8036-883A816F0F99}" type="slidenum">
+              <a:rPr lang="ru-RU" smtClean="0"/>
+              <a:t>40</a:t>
+            </a:fld>
+            <a:endParaRPr lang="ru-RU"/>
+          </a:p>
+        </p:txBody>
+      </p:sp>
+    </p:spTree>
+    <p:extLst>
+      <p:ext uri="{BB962C8B-B14F-4D97-AF65-F5344CB8AC3E}">
+        <p14:creationId xmlns:p14="http://schemas.microsoft.com/office/powerpoint/2010/main" val="4064014292"/>
+      </p:ext>
+    </p:extLst>
+  </p:cSld>
+  <p:clrMapOvr>
+    <a:masterClrMapping/>
+  </p:clrMapOvr>
+</p:notes>
+</file>
+
+<file path=ppt/notesSlides/notesSlide41.xml><?xml version="1.0" encoding="utf-8"?>
+<p:notes xmlns:a="http://schemas.openxmlformats.org/drawingml/2006/main" xmlns:r="http://schemas.openxmlformats.org/officeDocument/2006/relationships" xmlns:p="http://schemas.openxmlformats.org/presentationml/2006/main">
+  <p:cSld>
+    <p:spTree>
+      <p:nvGrpSpPr>
+        <p:cNvPr id="1" name=""/>
+        <p:cNvGrpSpPr/>
+        <p:nvPr/>
+      </p:nvGrpSpPr>
+      <p:grpSpPr>
+        <a:xfrm>
+          <a:off x="0" y="0"/>
+          <a:ext cx="0" cy="0"/>
+          <a:chOff x="0" y="0"/>
+          <a:chExt cx="0" cy="0"/>
+        </a:xfrm>
+      </p:grpSpPr>
+      <p:sp>
+        <p:nvSpPr>
+          <p:cNvPr id="2" name="Slide Image Placeholder 1"/>
+          <p:cNvSpPr>
+            <a:spLocks noGrp="1" noRot="1" noChangeAspect="1"/>
+          </p:cNvSpPr>
+          <p:nvPr>
+            <p:ph type="sldImg"/>
+          </p:nvPr>
+        </p:nvSpPr>
+        <p:spPr/>
+      </p:sp>
+      <p:sp>
+        <p:nvSpPr>
+          <p:cNvPr id="3" name="Notes Placeholder 2"/>
+          <p:cNvSpPr>
+            <a:spLocks noGrp="1"/>
+          </p:cNvSpPr>
+          <p:nvPr>
+            <p:ph type="body" idx="1"/>
+          </p:nvPr>
+        </p:nvSpPr>
+        <p:spPr/>
+        <p:txBody>
+          <a:bodyPr/>
+          <a:lstStyle/>
+          <a:p>
+            <a:r>
+              <a:rPr lang="ru-RU" dirty="0"/>
+              <a:t>Принцип инверсии зависимостей — один из тех принципов, которые действительно меняют архитектуру системы. Давайте посмотрим на его достоинства и трудности.</a:t>
+            </a:r>
+          </a:p>
+          <a:p>
+            <a:endParaRPr lang="ru-RU" dirty="0"/>
+          </a:p>
+          <a:p>
+            <a:r>
+              <a:rPr lang="ru-RU" dirty="0"/>
+              <a:t>Главное достоинство DIP — он делает систему значительно менее хрупкой. Бизнес-логика перестаёт зависеть от инфраструктуры: от конкретной базы данных, пользовательского интерфейса, библиотеки логирования или сетевого протокола. Эти вещи меняются чаще всего, и DIP позволяет защитить верхний уровень от их нестабильности.</a:t>
+            </a:r>
+          </a:p>
+          <a:p>
+            <a:endParaRPr lang="ru-RU" dirty="0"/>
+          </a:p>
+          <a:p>
+            <a:r>
+              <a:rPr lang="ru-RU" dirty="0"/>
+              <a:t>Второе важное преимущество — тестируемость. Когда верхний уровень зависит от абстракций, мы можем подменять реализации простыми </a:t>
+            </a:r>
+            <a:r>
+              <a:rPr lang="ru-RU" dirty="0" err="1"/>
+              <a:t>mock</a:t>
+            </a:r>
+            <a:r>
+              <a:rPr lang="ru-RU" dirty="0"/>
+              <a:t>- или </a:t>
+            </a:r>
+            <a:r>
+              <a:rPr lang="ru-RU" dirty="0" err="1"/>
+              <a:t>fake</a:t>
+            </a:r>
+            <a:r>
+              <a:rPr lang="ru-RU" dirty="0"/>
+              <a:t>-объектами. Так мы можем тестировать бизнес-логику изолированно, без настройки окружения, </a:t>
+            </a:r>
+            <a:r>
+              <a:rPr lang="ru-RU" dirty="0" err="1"/>
+              <a:t>мокая</a:t>
+            </a:r>
+            <a:r>
+              <a:rPr lang="ru-RU" dirty="0"/>
+              <a:t> базу, сеть или файловую систему.</a:t>
+            </a:r>
+          </a:p>
+          <a:p>
+            <a:endParaRPr lang="ru-RU" dirty="0"/>
+          </a:p>
+          <a:p>
+            <a:r>
+              <a:rPr lang="ru-RU" dirty="0"/>
+              <a:t>Третье — лёгкость замены технологий. Если завтра у нас вместо SQL появится </a:t>
+            </a:r>
+            <a:r>
+              <a:rPr lang="ru-RU" dirty="0" err="1"/>
+              <a:t>NoSQL</a:t>
+            </a:r>
+            <a:r>
+              <a:rPr lang="ru-RU" dirty="0"/>
+              <a:t>, или мы захотим отправлять данные не в файл, а в облако — мы просто реализуем новый адаптер. Верхний уровень при этом вообще не трогаем. Это огромный выигрыш в долгосрочных проектах.</a:t>
+            </a:r>
+          </a:p>
+          <a:p>
+            <a:endParaRPr lang="en-US" dirty="0"/>
+          </a:p>
+        </p:txBody>
+      </p:sp>
+      <p:sp>
+        <p:nvSpPr>
+          <p:cNvPr id="4" name="Slide Number Placeholder 3"/>
+          <p:cNvSpPr>
+            <a:spLocks noGrp="1"/>
+          </p:cNvSpPr>
+          <p:nvPr>
+            <p:ph type="sldNum" sz="quarter" idx="5"/>
+          </p:nvPr>
+        </p:nvSpPr>
+        <p:spPr/>
+        <p:txBody>
+          <a:bodyPr/>
+          <a:lstStyle/>
+          <a:p>
+            <a:fld id="{9BF0A773-BC3A-474D-8036-883A816F0F99}" type="slidenum">
+              <a:rPr lang="ru-RU" smtClean="0"/>
+              <a:t>41</a:t>
+            </a:fld>
+            <a:endParaRPr lang="ru-RU"/>
+          </a:p>
+        </p:txBody>
+      </p:sp>
+    </p:spTree>
+    <p:extLst>
+      <p:ext uri="{BB962C8B-B14F-4D97-AF65-F5344CB8AC3E}">
+        <p14:creationId xmlns:p14="http://schemas.microsoft.com/office/powerpoint/2010/main" val="865206711"/>
+      </p:ext>
+    </p:extLst>
+  </p:cSld>
+  <p:clrMapOvr>
+    <a:masterClrMapping/>
+  </p:clrMapOvr>
+</p:notes>
+</file>
+
+<file path=ppt/notesSlides/notesSlide42.xml><?xml version="1.0" encoding="utf-8"?>
+<p:notes xmlns:a="http://schemas.openxmlformats.org/drawingml/2006/main" xmlns:r="http://schemas.openxmlformats.org/officeDocument/2006/relationships" xmlns:p="http://schemas.openxmlformats.org/presentationml/2006/main">
+  <p:cSld>
+    <p:spTree>
+      <p:nvGrpSpPr>
+        <p:cNvPr id="1" name=""/>
+        <p:cNvGrpSpPr/>
+        <p:nvPr/>
+      </p:nvGrpSpPr>
+      <p:grpSpPr>
+        <a:xfrm>
+          <a:off x="0" y="0"/>
+          <a:ext cx="0" cy="0"/>
+          <a:chOff x="0" y="0"/>
+          <a:chExt cx="0" cy="0"/>
+        </a:xfrm>
+      </p:grpSpPr>
+      <p:sp>
+        <p:nvSpPr>
+          <p:cNvPr id="2" name="Slide Image Placeholder 1"/>
+          <p:cNvSpPr>
+            <a:spLocks noGrp="1" noRot="1" noChangeAspect="1"/>
+          </p:cNvSpPr>
+          <p:nvPr>
+            <p:ph type="sldImg"/>
+          </p:nvPr>
+        </p:nvSpPr>
+        <p:spPr/>
+      </p:sp>
+      <p:sp>
+        <p:nvSpPr>
+          <p:cNvPr id="3" name="Notes Placeholder 2"/>
+          <p:cNvSpPr>
+            <a:spLocks noGrp="1"/>
+          </p:cNvSpPr>
+          <p:nvPr>
+            <p:ph type="body" idx="1"/>
+          </p:nvPr>
+        </p:nvSpPr>
+        <p:spPr/>
+        <p:txBody>
+          <a:bodyPr/>
+          <a:lstStyle/>
+          <a:p>
+            <a:r>
+              <a:rPr lang="ru-RU" dirty="0"/>
+              <a:t>Но у DIP есть и свои недостатки.</a:t>
+            </a:r>
+          </a:p>
+          <a:p>
+            <a:r>
+              <a:rPr lang="ru-RU" dirty="0"/>
+              <a:t>Во-первых, он добавляет уровни абстракций. Интерфейсов становится больше, архитектура — сложнее. Это нормальная цена за гибкость, но к ней нужно быть готовым.</a:t>
+            </a:r>
+          </a:p>
+          <a:p>
+            <a:endParaRPr lang="ru-RU" dirty="0"/>
+          </a:p>
+          <a:p>
+            <a:r>
+              <a:rPr lang="ru-RU" dirty="0"/>
+              <a:t>Во-вторых, появляется проблема создания объектов. Когда верхний уровень не знает о конкретных реализациях, их нужно где-то связывать: в композиционном корне, через фабрики или DI-контейнер. Это требует дисциплины и архитектурных решений.</a:t>
+            </a:r>
+          </a:p>
+          <a:p>
+            <a:endParaRPr lang="ru-RU" dirty="0"/>
+          </a:p>
+          <a:p>
+            <a:r>
+              <a:rPr lang="ru-RU" dirty="0"/>
+              <a:t>В-третьих, DIP не всегда нужен. Для простых </a:t>
+            </a:r>
+            <a:r>
+              <a:rPr lang="ru-RU" dirty="0" err="1"/>
+              <a:t>однофайловых</a:t>
+            </a:r>
+            <a:r>
+              <a:rPr lang="ru-RU" dirty="0"/>
+              <a:t> утилит или маленьких скриптов строгие абстракции могут оказаться избыточными. DIP имеет смысл там, где ожидается развитие системы или заменяемость частей.</a:t>
+            </a:r>
+          </a:p>
+          <a:p>
+            <a:endParaRPr lang="ru-RU" dirty="0"/>
+          </a:p>
+          <a:p>
+            <a:r>
+              <a:rPr lang="ru-RU" dirty="0"/>
+              <a:t>И наконец, соблюдение DIP требует правильного выделения интерфейсов. Если абстракции выделены неправильно, их становится слишком много или они слишком широкие — архитектура начинает путаться.</a:t>
+            </a:r>
+          </a:p>
+          <a:p>
+            <a:endParaRPr lang="ru-RU" dirty="0"/>
+          </a:p>
+          <a:p>
+            <a:r>
+              <a:rPr lang="ru-RU" dirty="0"/>
+              <a:t>Поэтому DIP — это мощный инструмент, но применять его нужно осознанно. В правильно спроектированную систему он привносит гибкость, устойчивость и долгосрочную надёжность.</a:t>
+            </a:r>
+          </a:p>
+          <a:p>
+            <a:endParaRPr lang="en-US" dirty="0"/>
+          </a:p>
+        </p:txBody>
+      </p:sp>
+      <p:sp>
+        <p:nvSpPr>
+          <p:cNvPr id="4" name="Slide Number Placeholder 3"/>
+          <p:cNvSpPr>
+            <a:spLocks noGrp="1"/>
+          </p:cNvSpPr>
+          <p:nvPr>
+            <p:ph type="sldNum" sz="quarter" idx="5"/>
+          </p:nvPr>
+        </p:nvSpPr>
+        <p:spPr/>
+        <p:txBody>
+          <a:bodyPr/>
+          <a:lstStyle/>
+          <a:p>
+            <a:fld id="{9BF0A773-BC3A-474D-8036-883A816F0F99}" type="slidenum">
+              <a:rPr lang="ru-RU" smtClean="0"/>
+              <a:t>42</a:t>
+            </a:fld>
+            <a:endParaRPr lang="ru-RU"/>
+          </a:p>
+        </p:txBody>
+      </p:sp>
+    </p:spTree>
+    <p:extLst>
+      <p:ext uri="{BB962C8B-B14F-4D97-AF65-F5344CB8AC3E}">
+        <p14:creationId xmlns:p14="http://schemas.microsoft.com/office/powerpoint/2010/main" val="746455381"/>
+      </p:ext>
+    </p:extLst>
+  </p:cSld>
+  <p:clrMapOvr>
+    <a:masterClrMapping/>
+  </p:clrMapOvr>
+</p:notes>
+</file>
+
+<file path=ppt/notesSlides/notesSlide43.xml><?xml version="1.0" encoding="utf-8"?>
+<p:notes xmlns:a="http://schemas.openxmlformats.org/drawingml/2006/main" xmlns:r="http://schemas.openxmlformats.org/officeDocument/2006/relationships" xmlns:p="http://schemas.openxmlformats.org/presentationml/2006/main">
+  <p:cSld>
+    <p:spTree>
+      <p:nvGrpSpPr>
+        <p:cNvPr id="1" name=""/>
+        <p:cNvGrpSpPr/>
+        <p:nvPr/>
+      </p:nvGrpSpPr>
+      <p:grpSpPr>
+        <a:xfrm>
+          <a:off x="0" y="0"/>
+          <a:ext cx="0" cy="0"/>
+          <a:chOff x="0" y="0"/>
+          <a:chExt cx="0" cy="0"/>
+        </a:xfrm>
+      </p:grpSpPr>
+      <p:sp>
+        <p:nvSpPr>
+          <p:cNvPr id="2" name="Slide Image Placeholder 1"/>
+          <p:cNvSpPr>
+            <a:spLocks noGrp="1" noRot="1" noChangeAspect="1"/>
+          </p:cNvSpPr>
+          <p:nvPr>
+            <p:ph type="sldImg"/>
+          </p:nvPr>
+        </p:nvSpPr>
+        <p:spPr/>
+      </p:sp>
+      <p:sp>
+        <p:nvSpPr>
+          <p:cNvPr id="3" name="Notes Placeholder 2"/>
+          <p:cNvSpPr>
+            <a:spLocks noGrp="1"/>
+          </p:cNvSpPr>
+          <p:nvPr>
+            <p:ph type="body" idx="1"/>
+          </p:nvPr>
+        </p:nvSpPr>
+        <p:spPr/>
+        <p:txBody>
+          <a:bodyPr/>
+          <a:lstStyle/>
+          <a:p>
+            <a:r>
+              <a:rPr lang="ru-RU" dirty="0"/>
+              <a:t>Итак, подведём итоги. Принципы SOLID — это не набор жёстких правил, а инструменты, которые помогают нам снижать связность, улучшать читаемость и предсказуемость кода, повышать тестируемость и упрощать развитие проекта.</a:t>
+            </a:r>
+          </a:p>
+          <a:p>
+            <a:endParaRPr lang="ru-RU" dirty="0"/>
+          </a:p>
+          <a:p>
+            <a:r>
+              <a:rPr lang="ru-RU" dirty="0"/>
+              <a:t>Они позволяют нам проектировать систему так, чтобы новые требования вносили минимум изменений, чтобы мы могли безопасно добавлять функциональность и меньше боялись непредсказуемых побочных эффектов.</a:t>
+            </a:r>
+          </a:p>
+          <a:p>
+            <a:endParaRPr lang="en-US" dirty="0"/>
+          </a:p>
+        </p:txBody>
+      </p:sp>
+      <p:sp>
+        <p:nvSpPr>
+          <p:cNvPr id="4" name="Slide Number Placeholder 3"/>
+          <p:cNvSpPr>
+            <a:spLocks noGrp="1"/>
+          </p:cNvSpPr>
+          <p:nvPr>
+            <p:ph type="sldNum" sz="quarter" idx="5"/>
+          </p:nvPr>
+        </p:nvSpPr>
+        <p:spPr/>
+        <p:txBody>
+          <a:bodyPr/>
+          <a:lstStyle/>
+          <a:p>
+            <a:fld id="{9BF0A773-BC3A-474D-8036-883A816F0F99}" type="slidenum">
+              <a:rPr lang="ru-RU" smtClean="0"/>
+              <a:t>43</a:t>
+            </a:fld>
+            <a:endParaRPr lang="ru-RU"/>
+          </a:p>
+        </p:txBody>
+      </p:sp>
+    </p:spTree>
+    <p:extLst>
+      <p:ext uri="{BB962C8B-B14F-4D97-AF65-F5344CB8AC3E}">
+        <p14:creationId xmlns:p14="http://schemas.microsoft.com/office/powerpoint/2010/main" val="3891691834"/>
+      </p:ext>
+    </p:extLst>
+  </p:cSld>
+  <p:clrMapOvr>
+    <a:masterClrMapping/>
+  </p:clrMapOvr>
+</p:notes>
+</file>
+
+<file path=ppt/notesSlides/notesSlide44.xml><?xml version="1.0" encoding="utf-8"?>
+<p:notes xmlns:a="http://schemas.openxmlformats.org/drawingml/2006/main" xmlns:r="http://schemas.openxmlformats.org/officeDocument/2006/relationships" xmlns:p="http://schemas.openxmlformats.org/presentationml/2006/main">
+  <p:cSld>
+    <p:spTree>
+      <p:nvGrpSpPr>
+        <p:cNvPr id="1" name=""/>
+        <p:cNvGrpSpPr/>
+        <p:nvPr/>
+      </p:nvGrpSpPr>
+      <p:grpSpPr>
+        <a:xfrm>
+          <a:off x="0" y="0"/>
+          <a:ext cx="0" cy="0"/>
+          <a:chOff x="0" y="0"/>
+          <a:chExt cx="0" cy="0"/>
+        </a:xfrm>
+      </p:grpSpPr>
+      <p:sp>
+        <p:nvSpPr>
+          <p:cNvPr id="2" name="Slide Image Placeholder 1"/>
+          <p:cNvSpPr>
+            <a:spLocks noGrp="1" noRot="1" noChangeAspect="1"/>
+          </p:cNvSpPr>
+          <p:nvPr>
+            <p:ph type="sldImg"/>
+          </p:nvPr>
+        </p:nvSpPr>
+        <p:spPr/>
+      </p:sp>
+      <p:sp>
+        <p:nvSpPr>
+          <p:cNvPr id="3" name="Notes Placeholder 2"/>
+          <p:cNvSpPr>
+            <a:spLocks noGrp="1"/>
+          </p:cNvSpPr>
+          <p:nvPr>
+            <p:ph type="body" idx="1"/>
+          </p:nvPr>
+        </p:nvSpPr>
+        <p:spPr/>
+        <p:txBody>
+          <a:bodyPr/>
+          <a:lstStyle/>
+          <a:p>
+            <a:r>
+              <a:rPr lang="ru-RU" dirty="0"/>
+              <a:t>Однако очень важно понимать, что SOLID — это не религия. Не нужно применять принципы фанатично и везде. Иногда простой монолитный класс решает задачу лучше, чем десяток абстракций. Иногда SRP или DIP не дают практической выгоды.</a:t>
+            </a:r>
+          </a:p>
+          <a:p>
+            <a:endParaRPr lang="ru-RU" dirty="0"/>
+          </a:p>
+          <a:p>
+            <a:r>
+              <a:rPr lang="ru-RU" dirty="0"/>
+              <a:t>Принципы имеют смысл тогда, когда они делают код проще и устойчивее.</a:t>
+            </a:r>
+          </a:p>
+          <a:p>
+            <a:r>
+              <a:rPr lang="ru-RU" dirty="0"/>
+              <a:t>В конечном итоге цель у нас одна — создавать системы, которые легко понимать, удобно развивать и безопасно изменять. Если SOLID помогает в этом — применяйте. Если мешает — ищите баланс.</a:t>
+            </a:r>
+          </a:p>
+          <a:p>
+            <a:endParaRPr lang="ru-RU" dirty="0"/>
+          </a:p>
+          <a:p>
+            <a:r>
+              <a:rPr lang="ru-RU" dirty="0"/>
+              <a:t>Принципы — это инструменты, а не кандалы. И важно не просто знать их, но и понимать, когда и зачем их использовать.</a:t>
+            </a:r>
+          </a:p>
+          <a:p>
+            <a:endParaRPr lang="en-US" dirty="0"/>
+          </a:p>
+        </p:txBody>
+      </p:sp>
+      <p:sp>
+        <p:nvSpPr>
+          <p:cNvPr id="4" name="Slide Number Placeholder 3"/>
+          <p:cNvSpPr>
+            <a:spLocks noGrp="1"/>
+          </p:cNvSpPr>
+          <p:nvPr>
+            <p:ph type="sldNum" sz="quarter" idx="5"/>
+          </p:nvPr>
+        </p:nvSpPr>
+        <p:spPr/>
+        <p:txBody>
+          <a:bodyPr/>
+          <a:lstStyle/>
+          <a:p>
+            <a:fld id="{9BF0A773-BC3A-474D-8036-883A816F0F99}" type="slidenum">
+              <a:rPr lang="ru-RU" smtClean="0"/>
+              <a:t>44</a:t>
+            </a:fld>
+            <a:endParaRPr lang="ru-RU"/>
+          </a:p>
+        </p:txBody>
+      </p:sp>
+    </p:spTree>
+    <p:extLst>
+      <p:ext uri="{BB962C8B-B14F-4D97-AF65-F5344CB8AC3E}">
+        <p14:creationId xmlns:p14="http://schemas.microsoft.com/office/powerpoint/2010/main" val="355290894"/>
+      </p:ext>
+    </p:extLst>
+  </p:cSld>
+  <p:clrMapOvr>
+    <a:masterClrMapping/>
+  </p:clrMapOvr>
+</p:notes>
+</file>
+
+<file path=ppt/notesSlides/notesSlide45.xml><?xml version="1.0" encoding="utf-8"?>
+<p:notes xmlns:a="http://schemas.openxmlformats.org/drawingml/2006/main" xmlns:r="http://schemas.openxmlformats.org/officeDocument/2006/relationships" xmlns:p="http://schemas.openxmlformats.org/presentationml/2006/main">
+  <p:cSld>
+    <p:spTree>
+      <p:nvGrpSpPr>
+        <p:cNvPr id="1" name=""/>
+        <p:cNvGrpSpPr/>
+        <p:nvPr/>
+      </p:nvGrpSpPr>
+      <p:grpSpPr>
+        <a:xfrm>
+          <a:off x="0" y="0"/>
+          <a:ext cx="0" cy="0"/>
+          <a:chOff x="0" y="0"/>
+          <a:chExt cx="0" cy="0"/>
+        </a:xfrm>
+      </p:grpSpPr>
+      <p:sp>
+        <p:nvSpPr>
+          <p:cNvPr id="2" name="Образ слайда 1"/>
+          <p:cNvSpPr>
+            <a:spLocks noGrp="1" noRot="1" noChangeAspect="1"/>
+          </p:cNvSpPr>
+          <p:nvPr>
+            <p:ph type="sldImg"/>
+          </p:nvPr>
+        </p:nvSpPr>
+        <p:spPr/>
+      </p:sp>
+      <p:sp>
+        <p:nvSpPr>
+          <p:cNvPr id="3" name="Заметки 2"/>
+          <p:cNvSpPr>
+            <a:spLocks noGrp="1"/>
+          </p:cNvSpPr>
+          <p:nvPr>
+            <p:ph type="body" idx="1"/>
+          </p:nvPr>
+        </p:nvSpPr>
+        <p:spPr/>
+        <p:txBody>
+          <a:bodyPr/>
+          <a:lstStyle/>
+          <a:p>
+            <a:endParaRPr lang="ru-RU" dirty="0"/>
+          </a:p>
+        </p:txBody>
+      </p:sp>
+      <p:sp>
+        <p:nvSpPr>
+          <p:cNvPr id="4" name="Номер слайда 3"/>
+          <p:cNvSpPr>
+            <a:spLocks noGrp="1"/>
+          </p:cNvSpPr>
+          <p:nvPr>
+            <p:ph type="sldNum" sz="quarter" idx="10"/>
+          </p:nvPr>
+        </p:nvSpPr>
+        <p:spPr/>
+        <p:txBody>
+          <a:bodyPr/>
+          <a:lstStyle/>
+          <a:p>
+            <a:fld id="{A0B28B7E-B000-4596-AC62-77FFB0327B90}" type="slidenum">
+              <a:rPr lang="ru-RU" smtClean="0"/>
+              <a:t>45</a:t>
+            </a:fld>
+            <a:endParaRPr lang="ru-RU"/>
+          </a:p>
+        </p:txBody>
+      </p:sp>
+    </p:spTree>
+    <p:extLst>
+      <p:ext uri="{BB962C8B-B14F-4D97-AF65-F5344CB8AC3E}">
+        <p14:creationId xmlns:p14="http://schemas.microsoft.com/office/powerpoint/2010/main" val="945403398"/>
       </p:ext>
     </p:extLst>
   </p:cSld>
@@ -5816,234 +6387,92 @@
           <a:bodyPr/>
           <a:lstStyle/>
           <a:p>
-            <a:r>
-              <a:rPr lang="ru-RU" dirty="0"/>
-              <a:t>Мы вынесли из класса </a:t>
-            </a:r>
-            <a:r>
-              <a:rPr lang="ru-RU" b="1" dirty="0" err="1"/>
+            <a:pPr marL="0" marR="0" indent="0" algn="l" defTabSz="914400" rtl="0" eaLnBrk="1" fontAlgn="auto" latinLnBrk="0" hangingPunct="1">
+              <a:lnSpc>
+                <a:spcPct val="100000"/>
+              </a:lnSpc>
+              <a:spcBef>
+                <a:spcPts val="0"/>
+              </a:spcBef>
+              <a:spcAft>
+                <a:spcPts val="0"/>
+              </a:spcAft>
+              <a:buClrTx/>
+              <a:buSzTx/>
+              <a:buFontTx/>
+              <a:buNone/>
+              <a:tabLst/>
+              <a:defRPr/>
+            </a:pPr>
+            <a:r>
+              <a:rPr lang="ru-RU" baseline="0" dirty="0"/>
+              <a:t>Перед нами класс </a:t>
+            </a:r>
+            <a:r>
+              <a:rPr lang="en-US" baseline="0" dirty="0"/>
               <a:t>Bitmap</a:t>
             </a:r>
             <a:r>
-              <a:rPr lang="ru-RU" dirty="0"/>
-              <a:t> две дополнительные ответственности:</a:t>
-            </a:r>
-            <a:br>
-              <a:rPr lang="ru-RU" dirty="0"/>
-            </a:br>
-            <a:r>
-              <a:rPr lang="ru-RU" dirty="0"/>
-              <a:t>— рисование примитивов</a:t>
-            </a:r>
-            <a:br>
-              <a:rPr lang="ru-RU" dirty="0"/>
-            </a:br>
-            <a:r>
-              <a:rPr lang="ru-RU" dirty="0"/>
-              <a:t>— сохранение изображения в файл</a:t>
-            </a:r>
-          </a:p>
-          <a:p>
-            <a:r>
-              <a:rPr lang="ru-RU" dirty="0"/>
-              <a:t>В результате класс </a:t>
-            </a:r>
-            <a:r>
-              <a:rPr lang="ru-RU" b="1" dirty="0" err="1"/>
+              <a:rPr lang="ru-RU" baseline="0" dirty="0"/>
+              <a:t>, предоставляющий операции над растровым изображением</a:t>
+            </a:r>
+            <a:r>
+              <a:rPr lang="en-US" baseline="0" dirty="0"/>
+              <a:t>.</a:t>
+            </a:r>
+            <a:r>
+              <a:rPr lang="ru-RU" baseline="0" dirty="0"/>
+              <a:t> </a:t>
+            </a:r>
+            <a:endParaRPr lang="en-US" baseline="0" dirty="0"/>
+          </a:p>
+          <a:p>
+            <a:pPr marL="0" marR="0" indent="0" algn="l" defTabSz="914400" rtl="0" eaLnBrk="1" fontAlgn="auto" latinLnBrk="0" hangingPunct="1">
+              <a:lnSpc>
+                <a:spcPct val="100000"/>
+              </a:lnSpc>
+              <a:spcBef>
+                <a:spcPts val="0"/>
+              </a:spcBef>
+              <a:spcAft>
+                <a:spcPts val="0"/>
+              </a:spcAft>
+              <a:buClrTx/>
+              <a:buSzTx/>
+              <a:buFontTx/>
+              <a:buNone/>
+              <a:tabLst/>
+              <a:defRPr/>
+            </a:pPr>
+            <a:r>
+              <a:rPr lang="ru-RU" baseline="0" dirty="0"/>
+              <a:t>Помимо основной ответственности – хранения пикселей – в классе присутствуют сохранение в файл и рисование линии. Каждая из этих функций вносит дополнительную ответственность в класс </a:t>
+            </a:r>
+            <a:r>
+              <a:rPr lang="en-US" baseline="0" dirty="0"/>
               <a:t>Bitmap</a:t>
             </a:r>
             <a:r>
-              <a:rPr lang="ru-RU" dirty="0"/>
-              <a:t> теперь инкапсулирует </a:t>
-            </a:r>
-            <a:r>
-              <a:rPr lang="ru-RU" i="1" dirty="0"/>
-              <a:t>только хранение пикселей</a:t>
-            </a:r>
-            <a:r>
-              <a:rPr lang="ru-RU" dirty="0"/>
-              <a:t> и предоставляет методы доступа к ним.</a:t>
-            </a:r>
-          </a:p>
-          <a:p>
-            <a:r>
-              <a:rPr lang="ru-RU" dirty="0"/>
-              <a:t>Функции рисования перенесены в класс </a:t>
-            </a:r>
-            <a:r>
-              <a:rPr lang="ru-RU" b="1" dirty="0" err="1"/>
-              <a:t>BitmapGraphics</a:t>
-            </a:r>
-            <a:r>
-              <a:rPr lang="ru-RU" dirty="0"/>
-              <a:t>, который работает поверх переданного </a:t>
-            </a:r>
-            <a:r>
-              <a:rPr lang="ru-RU" dirty="0" err="1"/>
+              <a:rPr lang="ru-RU" baseline="0" dirty="0"/>
+              <a:t>. Тем самым принцип нарушается.</a:t>
+            </a:r>
+          </a:p>
+          <a:p>
+            <a:r>
+              <a:rPr lang="ru-RU" baseline="0" dirty="0"/>
+              <a:t>Сформулируем ответственность класса в виде предложения: Класс </a:t>
+            </a:r>
+            <a:r>
+              <a:rPr lang="en-US" baseline="0" dirty="0"/>
               <a:t>Bitmap</a:t>
             </a:r>
             <a:r>
-              <a:rPr lang="ru-RU" dirty="0"/>
-              <a:t>.</a:t>
-            </a:r>
-            <a:br>
-              <a:rPr lang="ru-RU" dirty="0"/>
-            </a:br>
-            <a:r>
-              <a:rPr lang="ru-RU" dirty="0"/>
-              <a:t>Сохранение изображения вынесено в класс </a:t>
-            </a:r>
-            <a:r>
-              <a:rPr lang="ru-RU" b="1" dirty="0" err="1"/>
-              <a:t>PngImageEncoder</a:t>
-            </a:r>
-            <a:r>
-              <a:rPr lang="ru-RU" dirty="0"/>
-              <a:t>, чей метод </a:t>
-            </a:r>
-            <a:r>
-              <a:rPr lang="ru-RU" sz="1200" kern="1200" dirty="0" err="1">
-                <a:solidFill>
-                  <a:schemeClr val="tx1"/>
-                </a:solidFill>
-                <a:latin typeface="+mn-lt"/>
-                <a:ea typeface="+mn-ea"/>
-                <a:cs typeface="+mn-cs"/>
-              </a:rPr>
-              <a:t>SaveBitmap</a:t>
-            </a:r>
-            <a:r>
-              <a:rPr lang="ru-RU" dirty="0"/>
-              <a:t> принимает </a:t>
-            </a:r>
-            <a:r>
-              <a:rPr lang="ru-RU" dirty="0" err="1"/>
-              <a:t>Bitmap</a:t>
-            </a:r>
-            <a:r>
-              <a:rPr lang="ru-RU" dirty="0"/>
-              <a:t> и кодирует его в файл.</a:t>
-            </a:r>
-          </a:p>
-          <a:p>
-            <a:r>
-              <a:rPr lang="ru-RU" b="1" dirty="0"/>
-              <a:t>Чего мы добились</a:t>
-            </a:r>
-          </a:p>
-          <a:p>
-            <a:pPr marL="171450" indent="-171450">
-              <a:buFont typeface="Arial" panose="020B0604020202020204" pitchFamily="34" charset="0"/>
-              <a:buChar char="•"/>
-            </a:pPr>
-            <a:r>
-              <a:rPr lang="ru-RU" b="1" dirty="0"/>
-              <a:t>Изменение внутреннего представления пикселей не влияет</a:t>
-            </a:r>
-            <a:r>
-              <a:rPr lang="ru-RU" dirty="0"/>
-              <a:t> на код рисования и код сохранения.</a:t>
-            </a:r>
-          </a:p>
-          <a:p>
-            <a:pPr marL="171450" indent="-171450">
-              <a:buFont typeface="Arial" panose="020B0604020202020204" pitchFamily="34" charset="0"/>
-              <a:buChar char="•"/>
-            </a:pPr>
-            <a:r>
-              <a:rPr lang="ru-RU" dirty="0"/>
-              <a:t>Появилась возможность </a:t>
-            </a:r>
-            <a:r>
-              <a:rPr lang="ru-RU" b="1" dirty="0"/>
-              <a:t>добавлять новые форматы файлов</a:t>
-            </a:r>
-            <a:r>
-              <a:rPr lang="ru-RU" dirty="0"/>
-              <a:t>, создавая новые энкодеры без изменения существующих классов.</a:t>
-            </a:r>
-          </a:p>
-          <a:p>
-            <a:pPr marL="171450" indent="-171450">
-              <a:buFont typeface="Arial" panose="020B0604020202020204" pitchFamily="34" charset="0"/>
-              <a:buChar char="•"/>
-            </a:pPr>
-            <a:r>
-              <a:rPr lang="ru-RU" dirty="0"/>
-              <a:t>Ответственность класса </a:t>
-            </a:r>
-            <a:r>
-              <a:rPr lang="ru-RU" dirty="0" err="1"/>
-              <a:t>Bitmap</a:t>
-            </a:r>
-            <a:r>
-              <a:rPr lang="ru-RU" dirty="0"/>
-              <a:t> формулируется однозначно:</a:t>
-            </a:r>
-            <a:br>
-              <a:rPr lang="ru-RU" dirty="0"/>
-            </a:br>
-            <a:r>
-              <a:rPr lang="ru-RU" b="1" dirty="0"/>
-              <a:t>«Класс </a:t>
-            </a:r>
-            <a:r>
-              <a:rPr lang="ru-RU" b="1" dirty="0" err="1"/>
-              <a:t>Bitmap</a:t>
-            </a:r>
-            <a:r>
-              <a:rPr lang="ru-RU" b="1" dirty="0"/>
-              <a:t> хранит пиксели изображения».</a:t>
-            </a:r>
-            <a:br>
-              <a:rPr lang="ru-RU" dirty="0"/>
-            </a:br>
-            <a:r>
-              <a:rPr lang="ru-RU" dirty="0"/>
-              <a:t>Одно простое предложение ⇒ SRP соблюдён.</a:t>
-            </a:r>
-          </a:p>
-          <a:p>
-            <a:r>
-              <a:rPr lang="ru-RU" b="1" dirty="0"/>
-              <a:t>Недостатки</a:t>
-            </a:r>
-          </a:p>
-          <a:p>
-            <a:pPr marL="171450" indent="-171450">
-              <a:buFont typeface="Arial" panose="020B0604020202020204" pitchFamily="34" charset="0"/>
-              <a:buChar char="•"/>
-            </a:pPr>
-            <a:r>
-              <a:rPr lang="ru-RU" b="1" dirty="0"/>
-              <a:t>Ухудшается </a:t>
-            </a:r>
-            <a:r>
-              <a:rPr lang="ru-RU" b="1" dirty="0" err="1"/>
-              <a:t>discoverability</a:t>
-            </a:r>
-            <a:r>
-              <a:rPr lang="ru-RU" b="1" dirty="0"/>
-              <a:t>:</a:t>
-            </a:r>
-            <a:r>
-              <a:rPr lang="ru-RU" dirty="0"/>
-              <a:t> функции рисования и сохранения теперь нужно искать в отдельных компонентах.</a:t>
-            </a:r>
-          </a:p>
-          <a:p>
-            <a:pPr marL="171450" indent="-171450">
-              <a:buFont typeface="Arial" panose="020B0604020202020204" pitchFamily="34" charset="0"/>
-              <a:buChar char="•"/>
-            </a:pPr>
-            <a:r>
-              <a:rPr lang="ru-RU" b="1" dirty="0"/>
-              <a:t>Сохранение стало более многословным</a:t>
-            </a:r>
-            <a:r>
-              <a:rPr lang="ru-RU" dirty="0"/>
-              <a:t>, особенно если чаще всего используется один формат.</a:t>
-            </a:r>
+              <a:rPr lang="ru-RU" baseline="0" dirty="0"/>
+              <a:t> хранит в себе пиксели изображения, а также позволяет сохранить изображение в файл и нарисовать линию. Предложение получилось сложным, что может свидетельствовать о нарушении принципа.</a:t>
+            </a:r>
+          </a:p>
+          <a:p>
+            <a:endParaRPr lang="ru-RU" baseline="0" dirty="0"/>
           </a:p>
         </p:txBody>
       </p:sp>
@@ -6064,7 +6493,7 @@
           <a:p>
             <a:fld id="{9BF0A773-BC3A-474D-8036-883A816F0F99}" type="slidenum">
               <a:rPr lang="ru-RU" smtClean="0"/>
-              <a:t>6</a:t>
+              <a:t>5</a:t>
             </a:fld>
             <a:endParaRPr lang="ru-RU"/>
           </a:p>
@@ -6073,7 +6502,7 @@
     </p:spTree>
     <p:extLst>
       <p:ext uri="{BB962C8B-B14F-4D97-AF65-F5344CB8AC3E}">
-        <p14:creationId xmlns:p14="http://schemas.microsoft.com/office/powerpoint/2010/main" val="16129081"/>
+        <p14:creationId xmlns:p14="http://schemas.microsoft.com/office/powerpoint/2010/main" val="3276207523"/>
       </p:ext>
     </p:extLst>
   </p:cSld>
@@ -6127,6 +6556,317 @@
           <a:bodyPr/>
           <a:lstStyle/>
           <a:p>
+            <a:r>
+              <a:rPr lang="ru-RU" dirty="0"/>
+              <a:t>Мы вынесли из класса </a:t>
+            </a:r>
+            <a:r>
+              <a:rPr lang="ru-RU" b="1" dirty="0" err="1"/>
+              <a:t>Bitmap</a:t>
+            </a:r>
+            <a:r>
+              <a:rPr lang="ru-RU" dirty="0"/>
+              <a:t> две дополнительные ответственности:</a:t>
+            </a:r>
+            <a:br>
+              <a:rPr lang="ru-RU" dirty="0"/>
+            </a:br>
+            <a:r>
+              <a:rPr lang="ru-RU" dirty="0"/>
+              <a:t>— рисование примитивов</a:t>
+            </a:r>
+            <a:br>
+              <a:rPr lang="ru-RU" dirty="0"/>
+            </a:br>
+            <a:r>
+              <a:rPr lang="ru-RU" dirty="0"/>
+              <a:t>— сохранение изображения в файл</a:t>
+            </a:r>
+          </a:p>
+          <a:p>
+            <a:r>
+              <a:rPr lang="ru-RU" dirty="0"/>
+              <a:t>В результате класс </a:t>
+            </a:r>
+            <a:r>
+              <a:rPr lang="ru-RU" b="1" dirty="0" err="1"/>
+              <a:t>Bitmap</a:t>
+            </a:r>
+            <a:r>
+              <a:rPr lang="ru-RU" dirty="0"/>
+              <a:t> теперь инкапсулирует </a:t>
+            </a:r>
+            <a:r>
+              <a:rPr lang="ru-RU" i="1" dirty="0"/>
+              <a:t>только хранение пикселей</a:t>
+            </a:r>
+            <a:r>
+              <a:rPr lang="ru-RU" dirty="0"/>
+              <a:t> и предоставляет методы доступа к ним.</a:t>
+            </a:r>
+          </a:p>
+          <a:p>
+            <a:r>
+              <a:rPr lang="ru-RU" dirty="0"/>
+              <a:t>Функции рисования перенесены в класс </a:t>
+            </a:r>
+            <a:r>
+              <a:rPr lang="ru-RU" b="1" dirty="0" err="1"/>
+              <a:t>BitmapGraphics</a:t>
+            </a:r>
+            <a:r>
+              <a:rPr lang="ru-RU" dirty="0"/>
+              <a:t>, который работает поверх переданного </a:t>
+            </a:r>
+            <a:r>
+              <a:rPr lang="ru-RU" dirty="0" err="1"/>
+              <a:t>Bitmap</a:t>
+            </a:r>
+            <a:r>
+              <a:rPr lang="ru-RU" dirty="0"/>
+              <a:t>.</a:t>
+            </a:r>
+            <a:br>
+              <a:rPr lang="ru-RU" dirty="0"/>
+            </a:br>
+            <a:r>
+              <a:rPr lang="ru-RU" dirty="0"/>
+              <a:t>Сохранение изображения вынесено в класс </a:t>
+            </a:r>
+            <a:r>
+              <a:rPr lang="ru-RU" b="1" dirty="0" err="1"/>
+              <a:t>PngImageEncoder</a:t>
+            </a:r>
+            <a:r>
+              <a:rPr lang="ru-RU" dirty="0"/>
+              <a:t>, чей метод </a:t>
+            </a:r>
+            <a:r>
+              <a:rPr lang="ru-RU" sz="1200" kern="1200" dirty="0" err="1">
+                <a:solidFill>
+                  <a:schemeClr val="tx1"/>
+                </a:solidFill>
+                <a:latin typeface="+mn-lt"/>
+                <a:ea typeface="+mn-ea"/>
+                <a:cs typeface="+mn-cs"/>
+              </a:rPr>
+              <a:t>SaveBitmap</a:t>
+            </a:r>
+            <a:r>
+              <a:rPr lang="ru-RU" dirty="0"/>
+              <a:t> принимает </a:t>
+            </a:r>
+            <a:r>
+              <a:rPr lang="ru-RU" dirty="0" err="1"/>
+              <a:t>Bitmap</a:t>
+            </a:r>
+            <a:r>
+              <a:rPr lang="ru-RU" dirty="0"/>
+              <a:t> и кодирует его в файл.</a:t>
+            </a:r>
+          </a:p>
+          <a:p>
+            <a:r>
+              <a:rPr lang="ru-RU" b="1" dirty="0"/>
+              <a:t>Чего мы добились</a:t>
+            </a:r>
+          </a:p>
+          <a:p>
+            <a:pPr marL="171450" indent="-171450">
+              <a:buFont typeface="Arial" panose="020B0604020202020204" pitchFamily="34" charset="0"/>
+              <a:buChar char="•"/>
+            </a:pPr>
+            <a:r>
+              <a:rPr lang="ru-RU" b="1" dirty="0"/>
+              <a:t>Изменение внутреннего представления пикселей не влияет</a:t>
+            </a:r>
+            <a:r>
+              <a:rPr lang="ru-RU" dirty="0"/>
+              <a:t> на код рисования и код сохранения.</a:t>
+            </a:r>
+          </a:p>
+          <a:p>
+            <a:pPr marL="171450" indent="-171450">
+              <a:buFont typeface="Arial" panose="020B0604020202020204" pitchFamily="34" charset="0"/>
+              <a:buChar char="•"/>
+            </a:pPr>
+            <a:r>
+              <a:rPr lang="ru-RU" dirty="0"/>
+              <a:t>Появилась возможность </a:t>
+            </a:r>
+            <a:r>
+              <a:rPr lang="ru-RU" b="1" dirty="0"/>
+              <a:t>добавлять новые форматы файлов</a:t>
+            </a:r>
+            <a:r>
+              <a:rPr lang="ru-RU" dirty="0"/>
+              <a:t>, создавая новые энкодеры без изменения существующих классов.</a:t>
+            </a:r>
+          </a:p>
+          <a:p>
+            <a:pPr marL="171450" indent="-171450">
+              <a:buFont typeface="Arial" panose="020B0604020202020204" pitchFamily="34" charset="0"/>
+              <a:buChar char="•"/>
+            </a:pPr>
+            <a:r>
+              <a:rPr lang="ru-RU" dirty="0"/>
+              <a:t>Ответственность класса </a:t>
+            </a:r>
+            <a:r>
+              <a:rPr lang="ru-RU" dirty="0" err="1"/>
+              <a:t>Bitmap</a:t>
+            </a:r>
+            <a:r>
+              <a:rPr lang="ru-RU" dirty="0"/>
+              <a:t> формулируется однозначно:</a:t>
+            </a:r>
+            <a:br>
+              <a:rPr lang="ru-RU" dirty="0"/>
+            </a:br>
+            <a:r>
+              <a:rPr lang="ru-RU" b="1" dirty="0"/>
+              <a:t>«Класс </a:t>
+            </a:r>
+            <a:r>
+              <a:rPr lang="ru-RU" b="1" dirty="0" err="1"/>
+              <a:t>Bitmap</a:t>
+            </a:r>
+            <a:r>
+              <a:rPr lang="ru-RU" b="1" dirty="0"/>
+              <a:t> хранит пиксели изображения».</a:t>
+            </a:r>
+            <a:br>
+              <a:rPr lang="ru-RU" dirty="0"/>
+            </a:br>
+            <a:r>
+              <a:rPr lang="ru-RU" dirty="0"/>
+              <a:t>Одно простое предложение ⇒ SRP соблюдён.</a:t>
+            </a:r>
+          </a:p>
+          <a:p>
+            <a:r>
+              <a:rPr lang="ru-RU" b="1" dirty="0"/>
+              <a:t>Недостатки</a:t>
+            </a:r>
+          </a:p>
+          <a:p>
+            <a:pPr marL="171450" indent="-171450">
+              <a:buFont typeface="Arial" panose="020B0604020202020204" pitchFamily="34" charset="0"/>
+              <a:buChar char="•"/>
+            </a:pPr>
+            <a:r>
+              <a:rPr lang="ru-RU" b="1" dirty="0"/>
+              <a:t>Ухудшается </a:t>
+            </a:r>
+            <a:r>
+              <a:rPr lang="ru-RU" b="1" dirty="0" err="1"/>
+              <a:t>discoverability</a:t>
+            </a:r>
+            <a:r>
+              <a:rPr lang="ru-RU" b="1" dirty="0"/>
+              <a:t>:</a:t>
+            </a:r>
+            <a:r>
+              <a:rPr lang="ru-RU" dirty="0"/>
+              <a:t> функции рисования и сохранения теперь нужно искать в отдельных компонентах.</a:t>
+            </a:r>
+          </a:p>
+          <a:p>
+            <a:pPr marL="171450" indent="-171450">
+              <a:buFont typeface="Arial" panose="020B0604020202020204" pitchFamily="34" charset="0"/>
+              <a:buChar char="•"/>
+            </a:pPr>
+            <a:r>
+              <a:rPr lang="ru-RU" b="1" dirty="0"/>
+              <a:t>Сохранение стало более многословным</a:t>
+            </a:r>
+            <a:r>
+              <a:rPr lang="ru-RU" dirty="0"/>
+              <a:t>, особенно если чаще всего используется один формат.</a:t>
+            </a:r>
+          </a:p>
+        </p:txBody>
+      </p:sp>
+      <p:sp>
+        <p:nvSpPr>
+          <p:cNvPr id="4" name="Номер слайда 3"/>
+          <p:cNvSpPr>
+            <a:spLocks noGrp="1"/>
+          </p:cNvSpPr>
+          <p:nvPr>
+            <p:ph type="sldNum" sz="quarter" idx="10"/>
+          </p:nvPr>
+        </p:nvSpPr>
+        <p:spPr/>
+        <p:txBody>
+          <a:bodyPr/>
+          <a:lstStyle/>
+          <a:p>
+            <a:fld id="{9BF0A773-BC3A-474D-8036-883A816F0F99}" type="slidenum">
+              <a:rPr lang="ru-RU" smtClean="0"/>
+              <a:t>6</a:t>
+            </a:fld>
+            <a:endParaRPr lang="ru-RU"/>
+          </a:p>
+        </p:txBody>
+      </p:sp>
+    </p:spTree>
+    <p:extLst>
+      <p:ext uri="{BB962C8B-B14F-4D97-AF65-F5344CB8AC3E}">
+        <p14:creationId xmlns:p14="http://schemas.microsoft.com/office/powerpoint/2010/main" val="16129081"/>
+      </p:ext>
+    </p:extLst>
+  </p:cSld>
+  <p:clrMapOvr>
+    <a:masterClrMapping/>
+  </p:clrMapOvr>
+</p:notes>
+</file>
+
+<file path=ppt/notesSlides/notesSlide7.xml><?xml version="1.0" encoding="utf-8"?>
+<p:notes xmlns:a="http://schemas.openxmlformats.org/drawingml/2006/main" xmlns:r="http://schemas.openxmlformats.org/officeDocument/2006/relationships" xmlns:p="http://schemas.openxmlformats.org/presentationml/2006/main">
+  <p:cSld>
+    <p:spTree>
+      <p:nvGrpSpPr>
+        <p:cNvPr id="1" name=""/>
+        <p:cNvGrpSpPr/>
+        <p:nvPr/>
+      </p:nvGrpSpPr>
+      <p:grpSpPr>
+        <a:xfrm>
+          <a:off x="0" y="0"/>
+          <a:ext cx="0" cy="0"/>
+          <a:chOff x="0" y="0"/>
+          <a:chExt cx="0" cy="0"/>
+        </a:xfrm>
+      </p:grpSpPr>
+      <p:sp>
+        <p:nvSpPr>
+          <p:cNvPr id="2" name="Образ слайда 1"/>
+          <p:cNvSpPr>
+            <a:spLocks noGrp="1" noRot="1" noChangeAspect="1"/>
+          </p:cNvSpPr>
+          <p:nvPr>
+            <p:ph type="sldImg"/>
+          </p:nvPr>
+        </p:nvSpPr>
+        <p:spPr/>
+      </p:sp>
+      <p:sp>
+        <p:nvSpPr>
+          <p:cNvPr id="3" name="Заметки 2"/>
+          <p:cNvSpPr>
+            <a:spLocks noGrp="1"/>
+          </p:cNvSpPr>
+          <p:nvPr>
+            <p:ph type="body" idx="1"/>
+          </p:nvPr>
+        </p:nvSpPr>
+        <p:spPr/>
+        <p:txBody>
+          <a:bodyPr/>
+          <a:lstStyle/>
+          <a:p>
             <a:pPr marL="0" marR="0" indent="0" algn="l" defTabSz="914400" rtl="0" eaLnBrk="1" fontAlgn="auto" latinLnBrk="0" hangingPunct="1">
               <a:lnSpc>
                 <a:spcPct val="100000"/>
@@ -6277,7 +7017,7 @@
 </p:notes>
 </file>
 
-<file path=ppt/notesSlides/notesSlide7.xml><?xml version="1.0" encoding="utf-8"?>
+<file path=ppt/notesSlides/notesSlide8.xml><?xml version="1.0" encoding="utf-8"?>
 <p:notes xmlns:a="http://schemas.openxmlformats.org/drawingml/2006/main" xmlns:r="http://schemas.openxmlformats.org/officeDocument/2006/relationships" xmlns:p="http://schemas.openxmlformats.org/presentationml/2006/main">
   <p:cSld>
     <p:spTree>
@@ -6425,172 +7165,6 @@
     <p:extLst>
       <p:ext uri="{BB962C8B-B14F-4D97-AF65-F5344CB8AC3E}">
         <p14:creationId xmlns:p14="http://schemas.microsoft.com/office/powerpoint/2010/main" val="380169112"/>
-      </p:ext>
-    </p:extLst>
-  </p:cSld>
-  <p:clrMapOvr>
-    <a:masterClrMapping/>
-  </p:clrMapOvr>
-</p:notes>
-</file>
-
-<file path=ppt/notesSlides/notesSlide8.xml><?xml version="1.0" encoding="utf-8"?>
-<p:notes xmlns:a="http://schemas.openxmlformats.org/drawingml/2006/main" xmlns:r="http://schemas.openxmlformats.org/officeDocument/2006/relationships" xmlns:p="http://schemas.openxmlformats.org/presentationml/2006/main">
-  <p:cSld>
-    <p:spTree>
-      <p:nvGrpSpPr>
-        <p:cNvPr id="1" name=""/>
-        <p:cNvGrpSpPr/>
-        <p:nvPr/>
-      </p:nvGrpSpPr>
-      <p:grpSpPr>
-        <a:xfrm>
-          <a:off x="0" y="0"/>
-          <a:ext cx="0" cy="0"/>
-          <a:chOff x="0" y="0"/>
-          <a:chExt cx="0" cy="0"/>
-        </a:xfrm>
-      </p:grpSpPr>
-      <p:sp>
-        <p:nvSpPr>
-          <p:cNvPr id="2" name="Образ слайда 1"/>
-          <p:cNvSpPr>
-            <a:spLocks noGrp="1" noRot="1" noChangeAspect="1"/>
-          </p:cNvSpPr>
-          <p:nvPr>
-            <p:ph type="sldImg"/>
-          </p:nvPr>
-        </p:nvSpPr>
-        <p:spPr/>
-      </p:sp>
-      <p:sp>
-        <p:nvSpPr>
-          <p:cNvPr id="3" name="Заметки 2"/>
-          <p:cNvSpPr>
-            <a:spLocks noGrp="1"/>
-          </p:cNvSpPr>
-          <p:nvPr>
-            <p:ph type="body" idx="1"/>
-          </p:nvPr>
-        </p:nvSpPr>
-        <p:spPr/>
-        <p:txBody>
-          <a:bodyPr/>
-          <a:lstStyle/>
-          <a:p>
-            <a:r>
-              <a:rPr lang="ru-RU" dirty="0"/>
-              <a:t>Но есть и недостатки. Применение SRP почти всегда увеличивает количество классов. Структура проекта становится более насыщенной, появляются дополнительные ссылки и зависимости.</a:t>
-            </a:r>
-          </a:p>
-          <a:p>
-            <a:endParaRPr lang="ru-RU" dirty="0"/>
-          </a:p>
-          <a:p>
-            <a:r>
-              <a:rPr lang="ru-RU" dirty="0"/>
-              <a:t>Второй минус — </a:t>
-            </a:r>
-            <a:r>
-              <a:rPr lang="ru-RU" dirty="0" err="1"/>
-              <a:t>discoverability</a:t>
-            </a:r>
-            <a:r>
-              <a:rPr lang="ru-RU" dirty="0"/>
-              <a:t>. Пользователю библиотеки нужно понимать, что сохранение теперь не в </a:t>
-            </a:r>
-            <a:r>
-              <a:rPr lang="ru-RU" dirty="0" err="1"/>
-              <a:t>Bitmap</a:t>
-            </a:r>
-            <a:r>
-              <a:rPr lang="ru-RU" dirty="0"/>
-              <a:t>, а в отдельном энкодере, что рисование — не в </a:t>
-            </a:r>
-            <a:r>
-              <a:rPr lang="ru-RU" dirty="0" err="1"/>
-              <a:t>Bitmap</a:t>
-            </a:r>
-            <a:r>
-              <a:rPr lang="ru-RU" dirty="0"/>
-              <a:t>, а в </a:t>
-            </a:r>
-            <a:r>
-              <a:rPr lang="ru-RU" dirty="0" err="1"/>
-              <a:t>BitmapGraphics</a:t>
-            </a:r>
-            <a:r>
-              <a:rPr lang="ru-RU" dirty="0"/>
-              <a:t>.</a:t>
-            </a:r>
-          </a:p>
-          <a:p>
-            <a:endParaRPr lang="ru-RU" dirty="0"/>
-          </a:p>
-          <a:p>
-            <a:r>
-              <a:rPr lang="ru-RU" dirty="0"/>
-              <a:t>И третий — код становится чуть более многословным. Вместо одного вызова иногда нужно создать объект-обёртку, передать зависимости, вызвать метод. В небольших проектах это может ощущаться как лишняя нагрузка.</a:t>
-            </a:r>
-          </a:p>
-          <a:p>
-            <a:endParaRPr lang="ru-RU" dirty="0"/>
-          </a:p>
-          <a:p>
-            <a:r>
-              <a:rPr lang="ru-RU" dirty="0"/>
-              <a:t>Тем не менее, эти минусы — плата за архитектурную гибкость. В долгосрочной перспективе SRP почти всегда окупается, особенно в проектах, которые живут больше нескольких месяцев и требуют развития.</a:t>
-            </a:r>
-          </a:p>
-          <a:p>
-            <a:pPr marL="0" marR="0" indent="0" algn="l" defTabSz="914400" rtl="0" eaLnBrk="1" fontAlgn="auto" latinLnBrk="0" hangingPunct="1">
-              <a:lnSpc>
-                <a:spcPct val="100000"/>
-              </a:lnSpc>
-              <a:spcBef>
-                <a:spcPts val="0"/>
-              </a:spcBef>
-              <a:spcAft>
-                <a:spcPts val="0"/>
-              </a:spcAft>
-              <a:buClrTx/>
-              <a:buSzTx/>
-              <a:buFontTx/>
-              <a:buNone/>
-              <a:tabLst/>
-              <a:defRPr/>
-            </a:pPr>
-            <a:endParaRPr lang="ru-RU" baseline="0" dirty="0"/>
-          </a:p>
-        </p:txBody>
-      </p:sp>
-      <p:sp>
-        <p:nvSpPr>
-          <p:cNvPr id="4" name="Номер слайда 3"/>
-          <p:cNvSpPr>
-            <a:spLocks noGrp="1"/>
-          </p:cNvSpPr>
-          <p:nvPr>
-            <p:ph type="sldNum" sz="quarter" idx="10"/>
-          </p:nvPr>
-        </p:nvSpPr>
-        <p:spPr/>
-        <p:txBody>
-          <a:bodyPr/>
-          <a:lstStyle/>
-          <a:p>
-            <a:fld id="{9BF0A773-BC3A-474D-8036-883A816F0F99}" type="slidenum">
-              <a:rPr lang="ru-RU" smtClean="0"/>
-              <a:t>9</a:t>
-            </a:fld>
-            <a:endParaRPr lang="ru-RU"/>
-          </a:p>
-        </p:txBody>
-      </p:sp>
-    </p:spTree>
-    <p:extLst>
-      <p:ext uri="{BB962C8B-B14F-4D97-AF65-F5344CB8AC3E}">
-        <p14:creationId xmlns:p14="http://schemas.microsoft.com/office/powerpoint/2010/main" val="1764649004"/>
       </p:ext>
     </p:extLst>
   </p:cSld>
@@ -6646,7 +7220,7 @@
           <a:p>
             <a:r>
               <a:rPr lang="ru-RU" dirty="0"/>
-              <a:t>Например, если у нас есть энкодер изображений, который умеет сохранять только PNG, и мы хотим добавить JPEG — по OCP мы создаём новый энкодер, а не лезем редактировать код старого. Это уменьшает хрупкость системы: вероятность что-то сломать в проверенном коде намного ниже.</a:t>
+              <a:t>Но есть и недостатки. Применение SRP почти всегда увеличивает количество классов. Структура проекта становится более насыщенной, появляются дополнительные ссылки и зависимости.</a:t>
             </a:r>
           </a:p>
           <a:p>
@@ -6655,64 +7229,78 @@
           <a:p>
             <a:r>
               <a:rPr lang="ru-RU" dirty="0"/>
-              <a:t>Теперь давайте посмотрим, как можно достичь соблюдения OCP.</a:t>
-            </a:r>
-          </a:p>
-          <a:p>
-            <a:r>
-              <a:rPr lang="ru-RU" dirty="0"/>
-              <a:t>Первый инструмент — это </a:t>
-            </a:r>
-            <a:r>
-              <a:rPr lang="ru-RU" b="1" dirty="0"/>
-              <a:t>полиморфизм</a:t>
-            </a:r>
-            <a:r>
-              <a:rPr lang="ru-RU" dirty="0"/>
-              <a:t>. Мы выделяем абстракцию, описывающую поведение, а конкретные реализации помещаем в отдельные классы. Код, который пользуется абстракцией, больше не зависит от деталей реализации и может работать с чем угодно, что эту абстракцию реализует.</a:t>
-            </a:r>
-          </a:p>
-          <a:p>
-            <a:r>
-              <a:rPr lang="ru-RU" dirty="0"/>
-              <a:t>Второй подход — </a:t>
-            </a:r>
-            <a:r>
-              <a:rPr lang="ru-RU" b="1" dirty="0"/>
-              <a:t>композиция</a:t>
-            </a:r>
-            <a:r>
-              <a:rPr lang="ru-RU" dirty="0"/>
-              <a:t>. Вместо того чтобы менять класс изнутри, мы передаём внутрь компонент с нужным поведением. Хотим другое поведение — передаём другой компонент.</a:t>
-            </a:r>
-          </a:p>
-          <a:p>
-            <a:r>
-              <a:rPr lang="ru-RU" dirty="0"/>
-              <a:t>Третий механизм — </a:t>
-            </a:r>
-            <a:r>
-              <a:rPr lang="ru-RU" b="1" dirty="0"/>
-              <a:t>параметризация поведением</a:t>
-            </a:r>
-            <a:r>
-              <a:rPr lang="ru-RU" dirty="0"/>
-              <a:t>, как через интерфейсы, так и через функции или лямбда-выражения. Это особенно удобно, когда изменение касается небольшой части алгоритма.</a:t>
-            </a:r>
-          </a:p>
-          <a:p>
-            <a:r>
-              <a:rPr lang="ru-RU" dirty="0"/>
-              <a:t>В C++ у нас есть и более мощный инструмент — </a:t>
-            </a:r>
-            <a:r>
-              <a:rPr lang="ru-RU" b="1" dirty="0"/>
-              <a:t>шаблоны</a:t>
-            </a:r>
-            <a:r>
-              <a:rPr lang="ru-RU" dirty="0"/>
-              <a:t>. Шаблоны позволяют расширять поведение на этапе компиляции, не изменяя код существующего класса. Политики, CRTP, параметризация типами — всё это механизмы, которые отлично работают в рамках OCP.</a:t>
-            </a:r>
+              <a:t>Второй минус — </a:t>
+            </a:r>
+            <a:r>
+              <a:rPr lang="ru-RU" dirty="0" err="1"/>
+              <a:t>discoverability</a:t>
+            </a:r>
+            <a:r>
+              <a:rPr lang="ru-RU" dirty="0"/>
+              <a:t>. Пользователю библиотеки нужно понимать, что сохранение теперь не в </a:t>
+            </a:r>
+            <a:r>
+              <a:rPr lang="ru-RU" dirty="0" err="1"/>
+              <a:t>Bitmap</a:t>
+            </a:r>
+            <a:r>
+              <a:rPr lang="ru-RU" dirty="0"/>
+              <a:t>, а в отдельном энкодере, что рисование — не в </a:t>
+            </a:r>
+            <a:r>
+              <a:rPr lang="ru-RU" dirty="0" err="1"/>
+              <a:t>Bitmap</a:t>
+            </a:r>
+            <a:r>
+              <a:rPr lang="ru-RU" dirty="0"/>
+              <a:t>, а в </a:t>
+            </a:r>
+            <a:r>
+              <a:rPr lang="ru-RU" dirty="0" err="1"/>
+              <a:t>BitmapGraphics</a:t>
+            </a:r>
+            <a:r>
+              <a:rPr lang="ru-RU" dirty="0"/>
+              <a:t>.</a:t>
+            </a:r>
+          </a:p>
+          <a:p>
+            <a:endParaRPr lang="ru-RU" dirty="0"/>
+          </a:p>
+          <a:p>
+            <a:r>
+              <a:rPr lang="ru-RU" dirty="0"/>
+              <a:t>И третий — код становится чуть более многословным. Вместо одного вызова иногда нужно создать объект-обёртку, передать зависимости, вызвать метод. В небольших проектах это может ощущаться как лишняя нагрузка.</a:t>
+            </a:r>
+          </a:p>
+          <a:p>
+            <a:endParaRPr lang="ru-RU" dirty="0"/>
+          </a:p>
+          <a:p>
+            <a:r>
+              <a:rPr lang="ru-RU" dirty="0"/>
+              <a:t>Тем не менее, эти минусы — плата за архитектурную гибкость. В долгосрочной перспективе SRP почти всегда окупается, особенно в проектах, которые живут больше нескольких месяцев и требуют развития.</a:t>
+            </a:r>
+          </a:p>
+          <a:p>
+            <a:pPr marL="0" marR="0" indent="0" algn="l" defTabSz="914400" rtl="0" eaLnBrk="1" fontAlgn="auto" latinLnBrk="0" hangingPunct="1">
+              <a:lnSpc>
+                <a:spcPct val="100000"/>
+              </a:lnSpc>
+              <a:spcBef>
+                <a:spcPts val="0"/>
+              </a:spcBef>
+              <a:spcAft>
+                <a:spcPts val="0"/>
+              </a:spcAft>
+              <a:buClrTx/>
+              <a:buSzTx/>
+              <a:buFontTx/>
+              <a:buNone/>
+              <a:tabLst/>
+              <a:defRPr/>
+            </a:pPr>
+            <a:endParaRPr lang="ru-RU" baseline="0" dirty="0"/>
           </a:p>
         </p:txBody>
       </p:sp>
@@ -6733,7 +7321,7 @@
           <a:p>
             <a:fld id="{9BF0A773-BC3A-474D-8036-883A816F0F99}" type="slidenum">
               <a:rPr lang="ru-RU" smtClean="0"/>
-              <a:t>11</a:t>
+              <a:t>9</a:t>
             </a:fld>
             <a:endParaRPr lang="ru-RU"/>
           </a:p>
@@ -6742,7 +7330,7 @@
     </p:spTree>
     <p:extLst>
       <p:ext uri="{BB962C8B-B14F-4D97-AF65-F5344CB8AC3E}">
-        <p14:creationId xmlns:p14="http://schemas.microsoft.com/office/powerpoint/2010/main" val="26544882"/>
+        <p14:creationId xmlns:p14="http://schemas.microsoft.com/office/powerpoint/2010/main" val="1764649004"/>
       </p:ext>
     </p:extLst>
   </p:cSld>
@@ -6881,7 +7469,7 @@
           <a:p>
             <a:fld id="{955B8494-3BC4-476A-8180-C7D531D1BDE9}" type="datetime1">
               <a:rPr lang="ru-RU" smtClean="0"/>
-              <a:t>11.12.2025</a:t>
+              <a:t>06.02.2026</a:t>
             </a:fld>
             <a:endParaRPr lang="ru-RU"/>
           </a:p>
@@ -7049,7 +7637,7 @@
           <a:p>
             <a:fld id="{896BD083-5DC9-4DDD-99DA-87E972459BE3}" type="datetime1">
               <a:rPr lang="ru-RU" smtClean="0"/>
-              <a:t>11.12.2025</a:t>
+              <a:t>06.02.2026</a:t>
             </a:fld>
             <a:endParaRPr lang="ru-RU"/>
           </a:p>
@@ -7227,7 +7815,7 @@
           <a:p>
             <a:fld id="{B6EA1591-1064-4C12-A3F3-9E222C1602E4}" type="datetime1">
               <a:rPr lang="ru-RU" smtClean="0"/>
-              <a:t>11.12.2025</a:t>
+              <a:t>06.02.2026</a:t>
             </a:fld>
             <a:endParaRPr lang="ru-RU"/>
           </a:p>
@@ -7395,7 +7983,7 @@
           <a:p>
             <a:fld id="{3EADD36C-E1EE-433A-85C1-8AB557831B59}" type="datetime1">
               <a:rPr lang="ru-RU" smtClean="0"/>
-              <a:t>11.12.2025</a:t>
+              <a:t>06.02.2026</a:t>
             </a:fld>
             <a:endParaRPr lang="ru-RU"/>
           </a:p>
@@ -7640,7 +8228,7 @@
           <a:p>
             <a:fld id="{F1E52A6F-751B-4577-A656-6A26D16D5D73}" type="datetime1">
               <a:rPr lang="ru-RU" smtClean="0"/>
-              <a:t>11.12.2025</a:t>
+              <a:t>06.02.2026</a:t>
             </a:fld>
             <a:endParaRPr lang="ru-RU"/>
           </a:p>
@@ -7869,7 +8457,7 @@
           <a:p>
             <a:fld id="{89C84D38-0A16-4A00-84F3-995FB60A1A24}" type="datetime1">
               <a:rPr lang="ru-RU" smtClean="0"/>
-              <a:t>11.12.2025</a:t>
+              <a:t>06.02.2026</a:t>
             </a:fld>
             <a:endParaRPr lang="ru-RU"/>
           </a:p>
@@ -8233,7 +8821,7 @@
           <a:p>
             <a:fld id="{B111A698-E52A-4D93-9D0B-B26B973770CA}" type="datetime1">
               <a:rPr lang="ru-RU" smtClean="0"/>
-              <a:t>11.12.2025</a:t>
+              <a:t>06.02.2026</a:t>
             </a:fld>
             <a:endParaRPr lang="ru-RU"/>
           </a:p>
@@ -8355,7 +8943,7 @@
           <a:p>
             <a:fld id="{C0BCB9B2-13AF-492A-A8D5-A78E42E45C90}" type="datetime1">
               <a:rPr lang="ru-RU" smtClean="0"/>
-              <a:t>11.12.2025</a:t>
+              <a:t>06.02.2026</a:t>
             </a:fld>
             <a:endParaRPr lang="ru-RU"/>
           </a:p>
@@ -8450,7 +9038,7 @@
           <a:p>
             <a:fld id="{368E88DF-F7A1-4621-9321-DD92F290BCA2}" type="datetime1">
               <a:rPr lang="ru-RU" smtClean="0"/>
-              <a:t>11.12.2025</a:t>
+              <a:t>06.02.2026</a:t>
             </a:fld>
             <a:endParaRPr lang="ru-RU"/>
           </a:p>
@@ -8725,7 +9313,7 @@
           <a:p>
             <a:fld id="{B178670F-7223-45BA-8607-F009D6E07C98}" type="datetime1">
               <a:rPr lang="ru-RU" smtClean="0"/>
-              <a:t>11.12.2025</a:t>
+              <a:t>06.02.2026</a:t>
             </a:fld>
             <a:endParaRPr lang="ru-RU"/>
           </a:p>
@@ -8977,7 +9565,7 @@
           <a:p>
             <a:fld id="{0E94A463-41EE-4B69-9D4D-FCEF376903A8}" type="datetime1">
               <a:rPr lang="ru-RU" smtClean="0"/>
-              <a:t>11.12.2025</a:t>
+              <a:t>06.02.2026</a:t>
             </a:fld>
             <a:endParaRPr lang="ru-RU"/>
           </a:p>
@@ -9188,7 +9776,7 @@
           <a:p>
             <a:fld id="{A898E17F-A256-4882-B4AC-587C535C0026}" type="datetime1">
               <a:rPr lang="ru-RU" smtClean="0"/>
-              <a:t>11.12.2025</a:t>
+              <a:t>06.02.2026</a:t>
             </a:fld>
             <a:endParaRPr lang="ru-RU"/>
           </a:p>
